--- a/exports/Moradabad_Division_DRM_Budget_FR_Analysis_H_Full_FY_2025_26_Actual.pptx
+++ b/exports/Moradabad_Division_DRM_Budget_FR_Analysis_H_Full_FY_2025_26_Actual.pptx
@@ -29038,19 +29038,19 @@
                     <a:p>
                       <a:pPr algn="ctr"/>
                       <a:r>
-                        <a:rPr lang="en-US" sz="1130" b="1">
-                          <a:solidFill>
-                            <a:srgbClr val="000000"/>
-                          </a:solidFill>
-                          <a:latin typeface="Times New Roman"/>
-                        </a:rPr>
-                        <a:t>Total</a:t>
-                      </a:r>
-                    </a:p>
-                  </a:txBody>
-                  <a:tcPr marL="12000" marR="12000" marT="8000" marB="8000">
-                    <a:solidFill>
-                      <a:srgbClr val="C8D6E8"/>
+                        <a:rPr lang="en-US" sz="1000" b="1">
+                          <a:solidFill>
+                            <a:srgbClr val="000000"/>
+                          </a:solidFill>
+                          <a:latin typeface="Times New Roman"/>
+                        </a:rPr>
+                        <a:t/>
+                      </a:r>
+                    </a:p>
+                  </a:txBody>
+                  <a:tcPr marL="12000" marR="12000" marT="8000" marB="8000">
+                    <a:solidFill>
+                      <a:srgbClr val="FFFFFF"/>
                     </a:solidFill>
                     <a:lnL w="12700">
                       <a:solidFill>
@@ -29081,7 +29081,7 @@
                     <a:p>
                       <a:pPr algn="l"/>
                       <a:r>
-                        <a:rPr lang="en-US" sz="1130" b="1">
+                        <a:rPr lang="en-US" sz="1000">
                           <a:solidFill>
                             <a:srgbClr val="000000"/>
                           </a:solidFill>
@@ -29093,38 +29093,38 @@
                   </a:txBody>
                   <a:tcPr marL="12000" marR="12000" marT="8000" marB="8000">
                     <a:solidFill>
-                      <a:srgbClr val="C8D6E8"/>
-                    </a:solidFill>
-                    <a:lnL w="12700">
-                      <a:solidFill>
-                        <a:srgbClr val="000000"/>
-                      </a:solidFill>
-                    </a:lnL>
-                    <a:lnR w="12700">
-                      <a:solidFill>
-                        <a:srgbClr val="000000"/>
-                      </a:solidFill>
-                    </a:lnR>
-                    <a:lnT w="12700">
-                      <a:solidFill>
-                        <a:srgbClr val="000000"/>
-                      </a:solidFill>
-                    </a:lnT>
-                    <a:lnB w="12700">
-                      <a:solidFill>
-                        <a:srgbClr val="000000"/>
-                      </a:solidFill>
-                    </a:lnB>
-                  </a:tcPr>
-                </a:tc>
-                <a:tc>
-                  <a:txBody>
-                    <a:bodyPr wrap="square" anchor="ctr" lIns="18000" rIns="18000" tIns="10000" bIns="10000"/>
-                    <a:lstStyle/>
-                    <a:p>
-                      <a:pPr algn="ctr"/>
-                      <a:r>
-                        <a:rPr lang="en-US" sz="1130" b="1">
+                      <a:srgbClr val="FFFFFF"/>
+                    </a:solidFill>
+                    <a:lnL w="12700">
+                      <a:solidFill>
+                        <a:srgbClr val="000000"/>
+                      </a:solidFill>
+                    </a:lnL>
+                    <a:lnR w="12700">
+                      <a:solidFill>
+                        <a:srgbClr val="000000"/>
+                      </a:solidFill>
+                    </a:lnR>
+                    <a:lnT w="12700">
+                      <a:solidFill>
+                        <a:srgbClr val="000000"/>
+                      </a:solidFill>
+                    </a:lnT>
+                    <a:lnB w="12700">
+                      <a:solidFill>
+                        <a:srgbClr val="000000"/>
+                      </a:solidFill>
+                    </a:lnB>
+                  </a:tcPr>
+                </a:tc>
+                <a:tc>
+                  <a:txBody>
+                    <a:bodyPr wrap="square" anchor="ctr" lIns="18000" rIns="18000" tIns="10000" bIns="10000"/>
+                    <a:lstStyle/>
+                    <a:p>
+                      <a:pPr algn="ctr"/>
+                      <a:r>
+                        <a:rPr lang="en-US" sz="1000">
                           <a:solidFill>
                             <a:srgbClr val="000000"/>
                           </a:solidFill>
@@ -29134,7 +29134,7 @@
                       </a:r>
                       <a:br/>
                       <a:r>
-                        <a:rPr lang="en-US" sz="1130" b="1">
+                        <a:rPr lang="en-US" sz="1000">
                           <a:solidFill>
                             <a:srgbClr val="000000"/>
                           </a:solidFill>
@@ -29146,38 +29146,38 @@
                   </a:txBody>
                   <a:tcPr marL="12000" marR="12000" marT="8000" marB="8000">
                     <a:solidFill>
-                      <a:srgbClr val="C8D6E8"/>
-                    </a:solidFill>
-                    <a:lnL w="12700">
-                      <a:solidFill>
-                        <a:srgbClr val="000000"/>
-                      </a:solidFill>
-                    </a:lnL>
-                    <a:lnR w="12700">
-                      <a:solidFill>
-                        <a:srgbClr val="000000"/>
-                      </a:solidFill>
-                    </a:lnR>
-                    <a:lnT w="12700">
-                      <a:solidFill>
-                        <a:srgbClr val="000000"/>
-                      </a:solidFill>
-                    </a:lnT>
-                    <a:lnB w="12700">
-                      <a:solidFill>
-                        <a:srgbClr val="000000"/>
-                      </a:solidFill>
-                    </a:lnB>
-                  </a:tcPr>
-                </a:tc>
-                <a:tc>
-                  <a:txBody>
-                    <a:bodyPr wrap="square" anchor="ctr" lIns="18000" rIns="18000" tIns="10000" bIns="10000"/>
-                    <a:lstStyle/>
-                    <a:p>
-                      <a:pPr algn="ctr"/>
-                      <a:r>
-                        <a:rPr lang="en-US" sz="1130" b="1">
+                      <a:srgbClr val="FFFFFF"/>
+                    </a:solidFill>
+                    <a:lnL w="12700">
+                      <a:solidFill>
+                        <a:srgbClr val="000000"/>
+                      </a:solidFill>
+                    </a:lnL>
+                    <a:lnR w="12700">
+                      <a:solidFill>
+                        <a:srgbClr val="000000"/>
+                      </a:solidFill>
+                    </a:lnR>
+                    <a:lnT w="12700">
+                      <a:solidFill>
+                        <a:srgbClr val="000000"/>
+                      </a:solidFill>
+                    </a:lnT>
+                    <a:lnB w="12700">
+                      <a:solidFill>
+                        <a:srgbClr val="000000"/>
+                      </a:solidFill>
+                    </a:lnB>
+                  </a:tcPr>
+                </a:tc>
+                <a:tc>
+                  <a:txBody>
+                    <a:bodyPr wrap="square" anchor="ctr" lIns="18000" rIns="18000" tIns="10000" bIns="10000"/>
+                    <a:lstStyle/>
+                    <a:p>
+                      <a:pPr algn="ctr"/>
+                      <a:r>
+                        <a:rPr lang="en-US" sz="1000">
                           <a:solidFill>
                             <a:srgbClr val="000000"/>
                           </a:solidFill>
@@ -29187,7 +29187,7 @@
                       </a:r>
                       <a:br/>
                       <a:r>
-                        <a:rPr lang="en-US" sz="1130" b="1">
+                        <a:rPr lang="en-US" sz="1000">
                           <a:solidFill>
                             <a:srgbClr val="000000"/>
                           </a:solidFill>
@@ -29199,38 +29199,38 @@
                   </a:txBody>
                   <a:tcPr marL="12000" marR="12000" marT="8000" marB="8000">
                     <a:solidFill>
-                      <a:srgbClr val="C8D6E8"/>
-                    </a:solidFill>
-                    <a:lnL w="12700">
-                      <a:solidFill>
-                        <a:srgbClr val="000000"/>
-                      </a:solidFill>
-                    </a:lnL>
-                    <a:lnR w="12700">
-                      <a:solidFill>
-                        <a:srgbClr val="000000"/>
-                      </a:solidFill>
-                    </a:lnR>
-                    <a:lnT w="12700">
-                      <a:solidFill>
-                        <a:srgbClr val="000000"/>
-                      </a:solidFill>
-                    </a:lnT>
-                    <a:lnB w="12700">
-                      <a:solidFill>
-                        <a:srgbClr val="000000"/>
-                      </a:solidFill>
-                    </a:lnB>
-                  </a:tcPr>
-                </a:tc>
-                <a:tc>
-                  <a:txBody>
-                    <a:bodyPr wrap="square" anchor="ctr" lIns="18000" rIns="18000" tIns="10000" bIns="10000"/>
-                    <a:lstStyle/>
-                    <a:p>
-                      <a:pPr algn="ctr"/>
-                      <a:r>
-                        <a:rPr lang="en-US" sz="1130" b="1">
+                      <a:srgbClr val="FFFFFF"/>
+                    </a:solidFill>
+                    <a:lnL w="12700">
+                      <a:solidFill>
+                        <a:srgbClr val="000000"/>
+                      </a:solidFill>
+                    </a:lnL>
+                    <a:lnR w="12700">
+                      <a:solidFill>
+                        <a:srgbClr val="000000"/>
+                      </a:solidFill>
+                    </a:lnR>
+                    <a:lnT w="12700">
+                      <a:solidFill>
+                        <a:srgbClr val="000000"/>
+                      </a:solidFill>
+                    </a:lnT>
+                    <a:lnB w="12700">
+                      <a:solidFill>
+                        <a:srgbClr val="000000"/>
+                      </a:solidFill>
+                    </a:lnB>
+                  </a:tcPr>
+                </a:tc>
+                <a:tc>
+                  <a:txBody>
+                    <a:bodyPr wrap="square" anchor="ctr" lIns="18000" rIns="18000" tIns="10000" bIns="10000"/>
+                    <a:lstStyle/>
+                    <a:p>
+                      <a:pPr algn="ctr"/>
+                      <a:r>
+                        <a:rPr lang="en-US" sz="1000">
                           <a:solidFill>
                             <a:srgbClr val="000000"/>
                           </a:solidFill>
@@ -29240,7 +29240,7 @@
                       </a:r>
                       <a:br/>
                       <a:r>
-                        <a:rPr lang="en-US" sz="1130" b="1">
+                        <a:rPr lang="en-US" sz="1000">
                           <a:solidFill>
                             <a:srgbClr val="000000"/>
                           </a:solidFill>
@@ -29252,40 +29252,40 @@
                   </a:txBody>
                   <a:tcPr marL="12000" marR="12000" marT="8000" marB="8000">
                     <a:solidFill>
-                      <a:srgbClr val="C8D6E8"/>
-                    </a:solidFill>
-                    <a:lnL w="12700">
-                      <a:solidFill>
-                        <a:srgbClr val="000000"/>
-                      </a:solidFill>
-                    </a:lnL>
-                    <a:lnR w="12700">
-                      <a:solidFill>
-                        <a:srgbClr val="000000"/>
-                      </a:solidFill>
-                    </a:lnR>
-                    <a:lnT w="12700">
-                      <a:solidFill>
-                        <a:srgbClr val="000000"/>
-                      </a:solidFill>
-                    </a:lnT>
-                    <a:lnB w="12700">
-                      <a:solidFill>
-                        <a:srgbClr val="000000"/>
-                      </a:solidFill>
-                    </a:lnB>
-                  </a:tcPr>
-                </a:tc>
-                <a:tc>
-                  <a:txBody>
-                    <a:bodyPr wrap="square" anchor="ctr" lIns="18000" rIns="18000" tIns="10000" bIns="10000"/>
-                    <a:lstStyle/>
-                    <a:p>
-                      <a:pPr algn="ctr"/>
-                      <a:r>
-                        <a:rPr lang="en-US" sz="1130" b="1">
-                          <a:solidFill>
-                            <a:srgbClr val="FFFFFF"/>
+                      <a:srgbClr val="FFFFFF"/>
+                    </a:solidFill>
+                    <a:lnL w="12700">
+                      <a:solidFill>
+                        <a:srgbClr val="000000"/>
+                      </a:solidFill>
+                    </a:lnL>
+                    <a:lnR w="12700">
+                      <a:solidFill>
+                        <a:srgbClr val="000000"/>
+                      </a:solidFill>
+                    </a:lnR>
+                    <a:lnT w="12700">
+                      <a:solidFill>
+                        <a:srgbClr val="000000"/>
+                      </a:solidFill>
+                    </a:lnT>
+                    <a:lnB w="12700">
+                      <a:solidFill>
+                        <a:srgbClr val="000000"/>
+                      </a:solidFill>
+                    </a:lnB>
+                  </a:tcPr>
+                </a:tc>
+                <a:tc>
+                  <a:txBody>
+                    <a:bodyPr wrap="square" anchor="ctr" lIns="18000" rIns="18000" tIns="10000" bIns="10000"/>
+                    <a:lstStyle/>
+                    <a:p>
+                      <a:pPr algn="ctr"/>
+                      <a:r>
+                        <a:rPr lang="en-US" sz="1000" b="1">
+                          <a:solidFill>
+                            <a:srgbClr val="000000"/>
                           </a:solidFill>
                           <a:latin typeface="Times New Roman"/>
                         </a:rPr>
@@ -29295,50 +29295,50 @@
                   </a:txBody>
                   <a:tcPr marL="12000" marR="12000" marT="8000" marB="8000">
                     <a:solidFill>
-                      <a:srgbClr val="25A55B"/>
-                    </a:solidFill>
-                    <a:lnL w="12700">
-                      <a:solidFill>
-                        <a:srgbClr val="000000"/>
-                      </a:solidFill>
-                    </a:lnL>
-                    <a:lnR w="12700">
-                      <a:solidFill>
-                        <a:srgbClr val="000000"/>
-                      </a:solidFill>
-                    </a:lnR>
-                    <a:lnT w="12700">
-                      <a:solidFill>
-                        <a:srgbClr val="000000"/>
-                      </a:solidFill>
-                    </a:lnT>
-                    <a:lnB w="12700">
-                      <a:solidFill>
-                        <a:srgbClr val="000000"/>
-                      </a:solidFill>
-                    </a:lnB>
-                  </a:tcPr>
-                </a:tc>
-                <a:tc>
-                  <a:txBody>
-                    <a:bodyPr wrap="square" anchor="ctr" lIns="18000" rIns="18000" tIns="10000" bIns="10000"/>
-                    <a:lstStyle/>
-                    <a:p>
-                      <a:pPr algn="ctr"/>
-                      <a:r>
-                        <a:rPr lang="en-US" sz="1130" b="1">
-                          <a:solidFill>
-                            <a:srgbClr val="000000"/>
-                          </a:solidFill>
-                          <a:latin typeface="Times New Roman"/>
-                        </a:rPr>
-                        <a:t>771.97 Cr</a:t>
-                      </a:r>
-                    </a:p>
-                  </a:txBody>
-                  <a:tcPr marL="12000" marR="12000" marT="8000" marB="8000">
-                    <a:solidFill>
-                      <a:srgbClr val="C8D6E8"/>
+                      <a:srgbClr val="DFF3E7"/>
+                    </a:solidFill>
+                    <a:lnL w="12700">
+                      <a:solidFill>
+                        <a:srgbClr val="000000"/>
+                      </a:solidFill>
+                    </a:lnL>
+                    <a:lnR w="12700">
+                      <a:solidFill>
+                        <a:srgbClr val="000000"/>
+                      </a:solidFill>
+                    </a:lnR>
+                    <a:lnT w="12700">
+                      <a:solidFill>
+                        <a:srgbClr val="000000"/>
+                      </a:solidFill>
+                    </a:lnT>
+                    <a:lnB w="12700">
+                      <a:solidFill>
+                        <a:srgbClr val="000000"/>
+                      </a:solidFill>
+                    </a:lnB>
+                  </a:tcPr>
+                </a:tc>
+                <a:tc>
+                  <a:txBody>
+                    <a:bodyPr wrap="square" anchor="ctr" lIns="18000" rIns="18000" tIns="10000" bIns="10000"/>
+                    <a:lstStyle/>
+                    <a:p>
+                      <a:pPr algn="ctr"/>
+                      <a:r>
+                        <a:rPr lang="en-US" sz="1000" b="1">
+                          <a:solidFill>
+                            <a:srgbClr val="000000"/>
+                          </a:solidFill>
+                          <a:latin typeface="Times New Roman"/>
+                        </a:rPr>
+                        <a:t>0.00 Cr</a:t>
+                      </a:r>
+                    </a:p>
+                  </a:txBody>
+                  <a:tcPr marL="12000" marR="12000" marT="8000" marB="8000">
+                    <a:solidFill>
+                      <a:srgbClr val="FFFFFF"/>
                     </a:solidFill>
                     <a:lnL w="12700">
                       <a:solidFill>

--- a/exports/Moradabad_Division_DRM_Budget_FR_Analysis_H_Full_FY_2025_26_Actual.pptx
+++ b/exports/Moradabad_Division_DRM_Budget_FR_Analysis_H_Full_FY_2025_26_Actual.pptx
@@ -6185,7 +6185,7 @@
                 </a:solidFill>
                 <a:latin typeface="Times New Roman"/>
               </a:rPr>
-              <a:t>Demand SMH Wise - JUL 2026 | uploaded 2026-08-17T11:13:04+05:30</a:t>
+              <a:t>Demand SMH Wise - JUL 2026 | uploaded 2026-08-25T15:43:05+05:30</a:t>
             </a:r>
           </a:p>
         </p:txBody>
@@ -13304,7 +13304,7 @@
                 </a:solidFill>
                 <a:latin typeface="Times New Roman"/>
               </a:rPr>
-              <a:t>PU Wise - Staff - JUL 2026 | uploaded 2026-08-17T11:13:04+05:30</a:t>
+              <a:t>PU Wise - Staff - JUL 2026 | uploaded 2026-08-25T15:43:05+05:30</a:t>
             </a:r>
           </a:p>
         </p:txBody>
@@ -19820,7 +19820,7 @@
                 </a:solidFill>
                 <a:latin typeface="Times New Roman"/>
               </a:rPr>
-              <a:t>PU Wise - Non-Staff Part 1 - JUL 2026 | uploaded 2026-08-17T11:13:04+05:30</a:t>
+              <a:t>PU Wise - Non-Staff Part 1 - JUL 2026 | uploaded 2026-08-25T15:43:05+05:30</a:t>
             </a:r>
           </a:p>
         </p:txBody>

--- a/exports/Moradabad_Division_DRM_Budget_FR_Analysis_H_Full_FY_2025_26_Actual.pptx
+++ b/exports/Moradabad_Division_DRM_Budget_FR_Analysis_H_Full_FY_2025_26_Actual.pptx
@@ -23193,7 +23193,7 @@
                 </a:solidFill>
                 <a:latin typeface="Times New Roman"/>
               </a:rPr>
-              <a:t>Open Line FR Report - As On 17.08.2026 (Rows 1-13)</a:t>
+              <a:t>Open Line FR Report - As On 27.08.2026 (Rows 1-13)</a:t>
             </a:r>
           </a:p>
         </p:txBody>
@@ -23737,7 +23737,7 @@
                           </a:solidFill>
                           <a:latin typeface="Times New Roman"/>
                         </a:rPr>
-                        <a:t>77,164</a:t>
+                        <a:t>77,175</a:t>
                       </a:r>
                       <a:br/>
                       <a:r>
@@ -23790,7 +23790,7 @@
                           </a:solidFill>
                           <a:latin typeface="Times New Roman"/>
                         </a:rPr>
-                        <a:t>-83,739</a:t>
+                        <a:t>-83,728</a:t>
                       </a:r>
                       <a:br/>
                       <a:r>
@@ -24070,7 +24070,7 @@
                           </a:solidFill>
                           <a:latin typeface="Times New Roman"/>
                         </a:rPr>
-                        <a:t>8,452</a:t>
+                        <a:t>10,761</a:t>
                       </a:r>
                       <a:br/>
                       <a:r>
@@ -24080,7 +24080,7 @@
                           </a:solidFill>
                           <a:latin typeface="Times New Roman"/>
                         </a:rPr>
-                        <a:t>Cr. 0.85</a:t>
+                        <a:t>Cr. 1.08</a:t>
                       </a:r>
                     </a:p>
                   </a:txBody>
@@ -24123,7 +24123,7 @@
                           </a:solidFill>
                           <a:latin typeface="Times New Roman"/>
                         </a:rPr>
-                        <a:t>-23,775</a:t>
+                        <a:t>-21,466</a:t>
                       </a:r>
                       <a:br/>
                       <a:r>
@@ -24133,7 +24133,7 @@
                           </a:solidFill>
                           <a:latin typeface="Times New Roman"/>
                         </a:rPr>
-                        <a:t>Cr. -2.38</a:t>
+                        <a:t>Cr. -2.15</a:t>
                       </a:r>
                     </a:p>
                   </a:txBody>
@@ -24176,7 +24176,7 @@
                           </a:solidFill>
                           <a:latin typeface="Times New Roman"/>
                         </a:rPr>
-                        <a:t>26.23</a:t>
+                        <a:t>33.39</a:t>
                       </a:r>
                     </a:p>
                   </a:txBody>
@@ -24403,7 +24403,7 @@
                           </a:solidFill>
                           <a:latin typeface="Times New Roman"/>
                         </a:rPr>
-                        <a:t>55,924</a:t>
+                        <a:t>57,023</a:t>
                       </a:r>
                       <a:br/>
                       <a:r>
@@ -24413,7 +24413,7 @@
                           </a:solidFill>
                           <a:latin typeface="Times New Roman"/>
                         </a:rPr>
-                        <a:t>Cr. 5.59</a:t>
+                        <a:t>Cr. 5.70</a:t>
                       </a:r>
                     </a:p>
                   </a:txBody>
@@ -24456,7 +24456,7 @@
                           </a:solidFill>
                           <a:latin typeface="Times New Roman"/>
                         </a:rPr>
-                        <a:t>-64,394</a:t>
+                        <a:t>-63,295</a:t>
                       </a:r>
                       <a:br/>
                       <a:r>
@@ -24466,7 +24466,7 @@
                           </a:solidFill>
                           <a:latin typeface="Times New Roman"/>
                         </a:rPr>
-                        <a:t>Cr. -6.44</a:t>
+                        <a:t>Cr. -6.33</a:t>
                       </a:r>
                     </a:p>
                   </a:txBody>
@@ -24509,7 +24509,7 @@
                           </a:solidFill>
                           <a:latin typeface="Times New Roman"/>
                         </a:rPr>
-                        <a:t>46.48</a:t>
+                        <a:t>47.39</a:t>
                       </a:r>
                     </a:p>
                   </a:txBody>
@@ -24736,7 +24736,7 @@
                           </a:solidFill>
                           <a:latin typeface="Times New Roman"/>
                         </a:rPr>
-                        <a:t>327,869</a:t>
+                        <a:t>337,625</a:t>
                       </a:r>
                       <a:br/>
                       <a:r>
@@ -24746,7 +24746,7 @@
                           </a:solidFill>
                           <a:latin typeface="Times New Roman"/>
                         </a:rPr>
-                        <a:t>Cr. 32.79</a:t>
+                        <a:t>Cr. 33.76</a:t>
                       </a:r>
                     </a:p>
                   </a:txBody>
@@ -24789,7 +24789,7 @@
                           </a:solidFill>
                           <a:latin typeface="Times New Roman"/>
                         </a:rPr>
-                        <a:t>-179,551</a:t>
+                        <a:t>-169,795</a:t>
                       </a:r>
                       <a:br/>
                       <a:r>
@@ -24799,7 +24799,7 @@
                           </a:solidFill>
                           <a:latin typeface="Times New Roman"/>
                         </a:rPr>
-                        <a:t>Cr. -17.96</a:t>
+                        <a:t>Cr. -16.98</a:t>
                       </a:r>
                     </a:p>
                   </a:txBody>
@@ -24842,7 +24842,7 @@
                           </a:solidFill>
                           <a:latin typeface="Times New Roman"/>
                         </a:rPr>
-                        <a:t>64.61</a:t>
+                        <a:t>66.54</a:t>
                       </a:r>
                     </a:p>
                   </a:txBody>
@@ -25069,7 +25069,7 @@
                           </a:solidFill>
                           <a:latin typeface="Times New Roman"/>
                         </a:rPr>
-                        <a:t>3,070,343</a:t>
+                        <a:t>3,110,796</a:t>
                       </a:r>
                       <a:br/>
                       <a:r>
@@ -25079,7 +25079,7 @@
                           </a:solidFill>
                           <a:latin typeface="Times New Roman"/>
                         </a:rPr>
-                        <a:t>Cr. 307.03</a:t>
+                        <a:t>Cr. 311.08</a:t>
                       </a:r>
                     </a:p>
                   </a:txBody>
@@ -25122,7 +25122,7 @@
                           </a:solidFill>
                           <a:latin typeface="Times New Roman"/>
                         </a:rPr>
-                        <a:t>107,548</a:t>
+                        <a:t>148,001</a:t>
                       </a:r>
                       <a:br/>
                       <a:r>
@@ -25132,7 +25132,7 @@
                           </a:solidFill>
                           <a:latin typeface="Times New Roman"/>
                         </a:rPr>
-                        <a:t>Cr. 10.75</a:t>
+                        <a:t>Cr. 14.80</a:t>
                       </a:r>
                     </a:p>
                   </a:txBody>
@@ -25175,7 +25175,7 @@
                           </a:solidFill>
                           <a:latin typeface="Times New Roman"/>
                         </a:rPr>
-                        <a:t>103.63</a:t>
+                        <a:t>105.00</a:t>
                       </a:r>
                     </a:p>
                   </a:txBody>
@@ -25402,7 +25402,7 @@
                           </a:solidFill>
                           <a:latin typeface="Times New Roman"/>
                         </a:rPr>
-                        <a:t>142,510</a:t>
+                        <a:t>150,620</a:t>
                       </a:r>
                       <a:br/>
                       <a:r>
@@ -25412,7 +25412,7 @@
                           </a:solidFill>
                           <a:latin typeface="Times New Roman"/>
                         </a:rPr>
-                        <a:t>Cr. 14.25</a:t>
+                        <a:t>Cr. 15.06</a:t>
                       </a:r>
                     </a:p>
                   </a:txBody>
@@ -25455,7 +25455,7 @@
                           </a:solidFill>
                           <a:latin typeface="Times New Roman"/>
                         </a:rPr>
-                        <a:t>10,243</a:t>
+                        <a:t>18,353</a:t>
                       </a:r>
                       <a:br/>
                       <a:r>
@@ -25465,7 +25465,7 @@
                           </a:solidFill>
                           <a:latin typeface="Times New Roman"/>
                         </a:rPr>
-                        <a:t>Cr. 1.02</a:t>
+                        <a:t>Cr. 1.84</a:t>
                       </a:r>
                     </a:p>
                   </a:txBody>
@@ -25508,7 +25508,7 @@
                           </a:solidFill>
                           <a:latin typeface="Times New Roman"/>
                         </a:rPr>
-                        <a:t>107.74</a:t>
+                        <a:t>113.88</a:t>
                       </a:r>
                     </a:p>
                   </a:txBody>
@@ -25735,7 +25735,7 @@
                           </a:solidFill>
                           <a:latin typeface="Times New Roman"/>
                         </a:rPr>
-                        <a:t>120,694</a:t>
+                        <a:t>120,775</a:t>
                       </a:r>
                       <a:br/>
                       <a:r>
@@ -25745,7 +25745,7 @@
                           </a:solidFill>
                           <a:latin typeface="Times New Roman"/>
                         </a:rPr>
-                        <a:t>Cr. 12.07</a:t>
+                        <a:t>Cr. 12.08</a:t>
                       </a:r>
                     </a:p>
                   </a:txBody>
@@ -25788,7 +25788,7 @@
                           </a:solidFill>
                           <a:latin typeface="Times New Roman"/>
                         </a:rPr>
-                        <a:t>-402,149</a:t>
+                        <a:t>-402,068</a:t>
                       </a:r>
                       <a:br/>
                       <a:r>
@@ -25841,7 +25841,7 @@
                           </a:solidFill>
                           <a:latin typeface="Times New Roman"/>
                         </a:rPr>
-                        <a:t>23.08</a:t>
+                        <a:t>23.10</a:t>
                       </a:r>
                     </a:p>
                   </a:txBody>
@@ -26068,7 +26068,7 @@
                           </a:solidFill>
                           <a:latin typeface="Times New Roman"/>
                         </a:rPr>
-                        <a:t>92,648</a:t>
+                        <a:t>94,918</a:t>
                       </a:r>
                       <a:br/>
                       <a:r>
@@ -26078,7 +26078,7 @@
                           </a:solidFill>
                           <a:latin typeface="Times New Roman"/>
                         </a:rPr>
-                        <a:t>Cr. 9.26</a:t>
+                        <a:t>Cr. 9.49</a:t>
                       </a:r>
                     </a:p>
                   </a:txBody>
@@ -26121,7 +26121,7 @@
                           </a:solidFill>
                           <a:latin typeface="Times New Roman"/>
                         </a:rPr>
-                        <a:t>-215,195</a:t>
+                        <a:t>-212,925</a:t>
                       </a:r>
                       <a:br/>
                       <a:r>
@@ -26131,7 +26131,7 @@
                           </a:solidFill>
                           <a:latin typeface="Times New Roman"/>
                         </a:rPr>
-                        <a:t>Cr. -21.52</a:t>
+                        <a:t>Cr. -21.29</a:t>
                       </a:r>
                     </a:p>
                   </a:txBody>
@@ -26174,7 +26174,7 @@
                           </a:solidFill>
                           <a:latin typeface="Times New Roman"/>
                         </a:rPr>
-                        <a:t>30.10</a:t>
+                        <a:t>30.83</a:t>
                       </a:r>
                     </a:p>
                   </a:txBody>
@@ -27400,7 +27400,7 @@
                           </a:solidFill>
                           <a:latin typeface="Times New Roman"/>
                         </a:rPr>
-                        <a:t>42,044</a:t>
+                        <a:t>52,019</a:t>
                       </a:r>
                       <a:br/>
                       <a:r>
@@ -27410,7 +27410,7 @@
                           </a:solidFill>
                           <a:latin typeface="Times New Roman"/>
                         </a:rPr>
-                        <a:t>Cr. 4.20</a:t>
+                        <a:t>Cr. 5.20</a:t>
                       </a:r>
                     </a:p>
                   </a:txBody>
@@ -27453,7 +27453,7 @@
                           </a:solidFill>
                           <a:latin typeface="Times New Roman"/>
                         </a:rPr>
-                        <a:t>-55,456</a:t>
+                        <a:t>-45,481</a:t>
                       </a:r>
                       <a:br/>
                       <a:r>
@@ -27463,7 +27463,7 @@
                           </a:solidFill>
                           <a:latin typeface="Times New Roman"/>
                         </a:rPr>
-                        <a:t>Cr. -5.55</a:t>
+                        <a:t>Cr. -4.55</a:t>
                       </a:r>
                     </a:p>
                   </a:txBody>
@@ -27506,7 +27506,7 @@
                           </a:solidFill>
                           <a:latin typeface="Times New Roman"/>
                         </a:rPr>
-                        <a:t>43.12</a:t>
+                        <a:t>53.35</a:t>
                       </a:r>
                     </a:p>
                   </a:txBody>
@@ -27733,7 +27733,7 @@
                           </a:solidFill>
                           <a:latin typeface="Times New Roman"/>
                         </a:rPr>
-                        <a:t>117,954</a:t>
+                        <a:t>125,269</a:t>
                       </a:r>
                       <a:br/>
                       <a:r>
@@ -27743,7 +27743,7 @@
                           </a:solidFill>
                           <a:latin typeface="Times New Roman"/>
                         </a:rPr>
-                        <a:t>Cr. 11.80</a:t>
+                        <a:t>Cr. 12.53</a:t>
                       </a:r>
                     </a:p>
                   </a:txBody>
@@ -27786,7 +27786,7 @@
                           </a:solidFill>
                           <a:latin typeface="Times New Roman"/>
                         </a:rPr>
-                        <a:t>-192,958</a:t>
+                        <a:t>-185,643</a:t>
                       </a:r>
                       <a:br/>
                       <a:r>
@@ -27796,7 +27796,7 @@
                           </a:solidFill>
                           <a:latin typeface="Times New Roman"/>
                         </a:rPr>
-                        <a:t>Cr. -19.30</a:t>
+                        <a:t>Cr. -18.56</a:t>
                       </a:r>
                     </a:p>
                   </a:txBody>
@@ -27839,7 +27839,7 @@
                           </a:solidFill>
                           <a:latin typeface="Times New Roman"/>
                         </a:rPr>
-                        <a:t>37.94</a:t>
+                        <a:t>40.29</a:t>
                       </a:r>
                     </a:p>
                   </a:txBody>
@@ -27973,7 +27973,7 @@
                 </a:solidFill>
                 <a:latin typeface="Times New Roman"/>
               </a:rPr>
-              <a:t>Open Line FR Report - As On 17.08.2026 (Rows 14-18)</a:t>
+              <a:t>Open Line FR Report - As On 27.08.2026 (Rows 14-18)</a:t>
             </a:r>
           </a:p>
         </p:txBody>
@@ -28850,7 +28850,7 @@
                           </a:solidFill>
                           <a:latin typeface="Times New Roman"/>
                         </a:rPr>
-                        <a:t>85,279</a:t>
+                        <a:t>98,749</a:t>
                       </a:r>
                       <a:br/>
                       <a:r>
@@ -28860,7 +28860,7 @@
                           </a:solidFill>
                           <a:latin typeface="Times New Roman"/>
                         </a:rPr>
-                        <a:t>Cr. 8.53</a:t>
+                        <a:t>Cr. 9.87</a:t>
                       </a:r>
                     </a:p>
                   </a:txBody>
@@ -28903,7 +28903,7 @@
                           </a:solidFill>
                           <a:latin typeface="Times New Roman"/>
                         </a:rPr>
-                        <a:t>-230,454</a:t>
+                        <a:t>-216,984</a:t>
                       </a:r>
                       <a:br/>
                       <a:r>
@@ -28913,7 +28913,7 @@
                           </a:solidFill>
                           <a:latin typeface="Times New Roman"/>
                         </a:rPr>
-                        <a:t>Cr. -23.05</a:t>
+                        <a:t>Cr. -21.70</a:t>
                       </a:r>
                     </a:p>
                   </a:txBody>
@@ -28956,7 +28956,7 @@
                           </a:solidFill>
                           <a:latin typeface="Times New Roman"/>
                         </a:rPr>
-                        <a:t>27.01</a:t>
+                        <a:t>31.28</a:t>
                       </a:r>
                     </a:p>
                   </a:txBody>
@@ -29849,7 +29849,7 @@
                           </a:solidFill>
                           <a:latin typeface="Times New Roman"/>
                         </a:rPr>
-                        <a:t>4,155,709</a:t>
+                        <a:t>4,250,558</a:t>
                       </a:r>
                       <a:br/>
                       <a:r>
@@ -29859,7 +29859,7 @@
                           </a:solidFill>
                           <a:latin typeface="Times New Roman"/>
                         </a:rPr>
-                        <a:t>Cr. 415.57</a:t>
+                        <a:t>Cr. 425.06</a:t>
                       </a:r>
                     </a:p>
                   </a:txBody>
@@ -29902,7 +29902,7 @@
                           </a:solidFill>
                           <a:latin typeface="Times New Roman"/>
                         </a:rPr>
-                        <a:t>-1,451,992</a:t>
+                        <a:t>-1,357,143</a:t>
                       </a:r>
                       <a:br/>
                       <a:r>
@@ -29912,7 +29912,7 @@
                           </a:solidFill>
                           <a:latin typeface="Times New Roman"/>
                         </a:rPr>
-                        <a:t>Cr. -145.20</a:t>
+                        <a:t>Cr. -135.71</a:t>
                       </a:r>
                     </a:p>
                   </a:txBody>
@@ -29951,17 +29951,17 @@
                       <a:r>
                         <a:rPr lang="en-US" sz="1130" b="1">
                           <a:solidFill>
-                            <a:srgbClr val="FFFFFF"/>
-                          </a:solidFill>
-                          <a:latin typeface="Times New Roman"/>
-                        </a:rPr>
-                        <a:t>74.11</a:t>
-                      </a:r>
-                    </a:p>
-                  </a:txBody>
-                  <a:tcPr marL="12000" marR="12000" marT="8000" marB="8000">
-                    <a:solidFill>
-                      <a:srgbClr val="25A55B"/>
+                            <a:srgbClr val="000000"/>
+                          </a:solidFill>
+                          <a:latin typeface="Times New Roman"/>
+                        </a:rPr>
+                        <a:t>75.80</a:t>
+                      </a:r>
+                    </a:p>
+                  </a:txBody>
+                  <a:tcPr marL="12000" marR="12000" marT="8000" marB="8000">
+                    <a:solidFill>
+                      <a:srgbClr val="F2C230"/>
                     </a:solidFill>
                     <a:lnL w="12700">
                       <a:solidFill>
@@ -30089,7 +30089,7 @@
                 </a:solidFill>
                 <a:latin typeface="Times New Roman"/>
               </a:rPr>
-              <a:t>Open Line FR Fund Wise - As On 17.08.2026</a:t>
+              <a:t>Open Line FR Fund Wise - As On 27.08.2026</a:t>
             </a:r>
           </a:p>
         </p:txBody>
@@ -30590,7 +30590,7 @@
                           </a:solidFill>
                           <a:latin typeface="Times New Roman"/>
                         </a:rPr>
-                        <a:t>354,585</a:t>
+                        <a:t>380,485</a:t>
                       </a:r>
                       <a:br/>
                       <a:r>
@@ -30600,7 +30600,7 @@
                           </a:solidFill>
                           <a:latin typeface="Times New Roman"/>
                         </a:rPr>
-                        <a:t>Cr. 35.46</a:t>
+                        <a:t>Cr. 38.05</a:t>
                       </a:r>
                     </a:p>
                   </a:txBody>
@@ -30643,7 +30643,7 @@
                           </a:solidFill>
                           <a:latin typeface="Times New Roman"/>
                         </a:rPr>
-                        <a:t>663,768</a:t>
+                        <a:t>637,868</a:t>
                       </a:r>
                       <a:br/>
                       <a:r>
@@ -30653,7 +30653,7 @@
                           </a:solidFill>
                           <a:latin typeface="Times New Roman"/>
                         </a:rPr>
-                        <a:t>Cr. 66.38</a:t>
+                        <a:t>Cr. 63.79</a:t>
                       </a:r>
                     </a:p>
                   </a:txBody>
@@ -30696,7 +30696,7 @@
                           </a:solidFill>
                           <a:latin typeface="Times New Roman"/>
                         </a:rPr>
-                        <a:t>34.82</a:t>
+                        <a:t>37.36</a:t>
                       </a:r>
                     </a:p>
                   </a:txBody>
@@ -30739,7 +30739,7 @@
                           </a:solidFill>
                           <a:latin typeface="Times New Roman"/>
                         </a:rPr>
-                        <a:t>65.18</a:t>
+                        <a:t>62.64</a:t>
                       </a:r>
                     </a:p>
                   </a:txBody>
@@ -31922,7 +31922,7 @@
                           </a:solidFill>
                           <a:latin typeface="Times New Roman"/>
                         </a:rPr>
-                        <a:t>3,142,858</a:t>
+                        <a:t>3,175,144</a:t>
                       </a:r>
                       <a:br/>
                       <a:r>
@@ -31932,7 +31932,7 @@
                           </a:solidFill>
                           <a:latin typeface="Times New Roman"/>
                         </a:rPr>
-                        <a:t>Cr. 314.29</a:t>
+                        <a:t>Cr. 317.51</a:t>
                       </a:r>
                     </a:p>
                   </a:txBody>
@@ -31975,7 +31975,7 @@
                           </a:solidFill>
                           <a:latin typeface="Times New Roman"/>
                         </a:rPr>
-                        <a:t>-25,343</a:t>
+                        <a:t>-57,629</a:t>
                       </a:r>
                       <a:br/>
                       <a:r>
@@ -31985,7 +31985,7 @@
                           </a:solidFill>
                           <a:latin typeface="Times New Roman"/>
                         </a:rPr>
-                        <a:t>Cr. -2.53</a:t>
+                        <a:t>Cr. -5.76</a:t>
                       </a:r>
                     </a:p>
                   </a:txBody>
@@ -32028,7 +32028,7 @@
                           </a:solidFill>
                           <a:latin typeface="Times New Roman"/>
                         </a:rPr>
-                        <a:t>100.81</a:t>
+                        <a:t>101.85</a:t>
                       </a:r>
                     </a:p>
                   </a:txBody>
@@ -32071,7 +32071,7 @@
                           </a:solidFill>
                           <a:latin typeface="Times New Roman"/>
                         </a:rPr>
-                        <a:t>-0.81</a:t>
+                        <a:t>-1.85</a:t>
                       </a:r>
                     </a:p>
                   </a:txBody>
@@ -32588,7 +32588,7 @@
                           </a:solidFill>
                           <a:latin typeface="Times New Roman"/>
                         </a:rPr>
-                        <a:t>631,485</a:t>
+                        <a:t>668,148</a:t>
                       </a:r>
                       <a:br/>
                       <a:r>
@@ -32598,7 +32598,7 @@
                           </a:solidFill>
                           <a:latin typeface="Times New Roman"/>
                         </a:rPr>
-                        <a:t>Cr. 63.15</a:t>
+                        <a:t>Cr. 66.81</a:t>
                       </a:r>
                     </a:p>
                   </a:txBody>
@@ -32641,7 +32641,7 @@
                           </a:solidFill>
                           <a:latin typeface="Times New Roman"/>
                         </a:rPr>
-                        <a:t>669,524</a:t>
+                        <a:t>632,861</a:t>
                       </a:r>
                       <a:br/>
                       <a:r>
@@ -32651,7 +32651,7 @@
                           </a:solidFill>
                           <a:latin typeface="Times New Roman"/>
                         </a:rPr>
-                        <a:t>Cr. 66.95</a:t>
+                        <a:t>Cr. 63.29</a:t>
                       </a:r>
                     </a:p>
                   </a:txBody>
@@ -32694,7 +32694,7 @@
                           </a:solidFill>
                           <a:latin typeface="Times New Roman"/>
                         </a:rPr>
-                        <a:t>48.54</a:t>
+                        <a:t>51.36</a:t>
                       </a:r>
                     </a:p>
                   </a:txBody>
@@ -32737,7 +32737,7 @@
                           </a:solidFill>
                           <a:latin typeface="Times New Roman"/>
                         </a:rPr>
-                        <a:t>51.46</a:t>
+                        <a:t>48.64</a:t>
                       </a:r>
                     </a:p>
                   </a:txBody>

--- a/exports/Moradabad_Division_DRM_Budget_FR_Analysis_H_Full_FY_2025_26_Actual.pptx
+++ b/exports/Moradabad_Division_DRM_Budget_FR_Analysis_H_Full_FY_2025_26_Actual.pptx
@@ -6185,7 +6185,7 @@
                 </a:solidFill>
                 <a:latin typeface="Times New Roman"/>
               </a:rPr>
-              <a:t>Demand SMH Wise - JUL 2026 | uploaded 2026-08-25T15:43:05+05:30</a:t>
+              <a:t>Demand SMH Wise - JUL 2026 | uploaded 2026-08-31T12:33:38+05:30</a:t>
             </a:r>
           </a:p>
         </p:txBody>
@@ -7054,7 +7054,7 @@
                           </a:solidFill>
                           <a:latin typeface="Times New Roman"/>
                         </a:rPr>
-                        <a:t>232,594</a:t>
+                        <a:t>236,563</a:t>
                       </a:r>
                       <a:br/>
                       <a:r>
@@ -7064,7 +7064,7 @@
                           </a:solidFill>
                           <a:latin typeface="Times New Roman"/>
                         </a:rPr>
-                        <a:t>Cr. 23.26</a:t>
+                        <a:t>Cr. 23.66</a:t>
                       </a:r>
                     </a:p>
                   </a:txBody>
@@ -7107,7 +7107,7 @@
                           </a:solidFill>
                           <a:latin typeface="Times New Roman"/>
                         </a:rPr>
-                        <a:t>-7,437</a:t>
+                        <a:t>-3,468</a:t>
                       </a:r>
                       <a:br/>
                       <a:r>
@@ -7117,7 +7117,7 @@
                           </a:solidFill>
                           <a:latin typeface="Times New Roman"/>
                         </a:rPr>
-                        <a:t>Cr. -0.74</a:t>
+                        <a:t>Cr. -0.35</a:t>
                       </a:r>
                     </a:p>
                   </a:txBody>
@@ -7160,7 +7160,7 @@
                           </a:solidFill>
                           <a:latin typeface="Times New Roman"/>
                         </a:rPr>
-                        <a:t>97</a:t>
+                        <a:t>99</a:t>
                       </a:r>
                     </a:p>
                   </a:txBody>
@@ -7203,7 +7203,7 @@
                           </a:solidFill>
                           <a:latin typeface="Times New Roman"/>
                         </a:rPr>
-                        <a:t>408,928</a:t>
+                        <a:t>404,959</a:t>
                       </a:r>
                       <a:br/>
                       <a:r>
@@ -7213,7 +7213,7 @@
                           </a:solidFill>
                           <a:latin typeface="Times New Roman"/>
                         </a:rPr>
-                        <a:t>Cr. 40.89</a:t>
+                        <a:t>Cr. 40.50</a:t>
                       </a:r>
                     </a:p>
                   </a:txBody>
@@ -7256,7 +7256,7 @@
                           </a:solidFill>
                           <a:latin typeface="Times New Roman"/>
                         </a:rPr>
-                        <a:t>36</a:t>
+                        <a:t>37</a:t>
                       </a:r>
                     </a:p>
                   </a:txBody>
@@ -7546,7 +7546,7 @@
                           </a:solidFill>
                           <a:latin typeface="Times New Roman"/>
                         </a:rPr>
-                        <a:t>1,467,818</a:t>
+                        <a:t>1,473,830</a:t>
                       </a:r>
                       <a:br/>
                       <a:r>
@@ -7556,7 +7556,7 @@
                           </a:solidFill>
                           <a:latin typeface="Times New Roman"/>
                         </a:rPr>
-                        <a:t>Cr. 146.78</a:t>
+                        <a:t>Cr. 147.38</a:t>
                       </a:r>
                     </a:p>
                   </a:txBody>
@@ -7599,7 +7599,7 @@
                           </a:solidFill>
                           <a:latin typeface="Times New Roman"/>
                         </a:rPr>
-                        <a:t>289,834</a:t>
+                        <a:t>295,846</a:t>
                       </a:r>
                       <a:br/>
                       <a:r>
@@ -7609,7 +7609,7 @@
                           </a:solidFill>
                           <a:latin typeface="Times New Roman"/>
                         </a:rPr>
-                        <a:t>Cr. 28.98</a:t>
+                        <a:t>Cr. 29.58</a:t>
                       </a:r>
                     </a:p>
                   </a:txBody>
@@ -7695,7 +7695,7 @@
                           </a:solidFill>
                           <a:latin typeface="Times New Roman"/>
                         </a:rPr>
-                        <a:t>2,141,084</a:t>
+                        <a:t>2,135,072</a:t>
                       </a:r>
                       <a:br/>
                       <a:r>
@@ -7705,7 +7705,7 @@
                           </a:solidFill>
                           <a:latin typeface="Times New Roman"/>
                         </a:rPr>
-                        <a:t>Cr. 214.11</a:t>
+                        <a:t>Cr. 213.51</a:t>
                       </a:r>
                     </a:p>
                   </a:txBody>
@@ -8530,7 +8530,7 @@
                           </a:solidFill>
                           <a:latin typeface="Times New Roman"/>
                         </a:rPr>
-                        <a:t>722,606</a:t>
+                        <a:t>765,059</a:t>
                       </a:r>
                       <a:br/>
                       <a:r>
@@ -8540,7 +8540,7 @@
                           </a:solidFill>
                           <a:latin typeface="Times New Roman"/>
                         </a:rPr>
-                        <a:t>Cr. 72.26</a:t>
+                        <a:t>Cr. 76.51</a:t>
                       </a:r>
                     </a:p>
                   </a:txBody>
@@ -8583,7 +8583,7 @@
                           </a:solidFill>
                           <a:latin typeface="Times New Roman"/>
                         </a:rPr>
-                        <a:t>308,646</a:t>
+                        <a:t>351,099</a:t>
                       </a:r>
                       <a:br/>
                       <a:r>
@@ -8593,7 +8593,7 @@
                           </a:solidFill>
                           <a:latin typeface="Times New Roman"/>
                         </a:rPr>
-                        <a:t>Cr. 30.86</a:t>
+                        <a:t>Cr. 35.11</a:t>
                       </a:r>
                     </a:p>
                   </a:txBody>
@@ -8636,7 +8636,7 @@
                           </a:solidFill>
                           <a:latin typeface="Times New Roman"/>
                         </a:rPr>
-                        <a:t>175</a:t>
+                        <a:t>185</a:t>
                       </a:r>
                     </a:p>
                   </a:txBody>
@@ -8679,7 +8679,7 @@
                           </a:solidFill>
                           <a:latin typeface="Times New Roman"/>
                         </a:rPr>
-                        <a:t>630,975</a:t>
+                        <a:t>588,522</a:t>
                       </a:r>
                       <a:br/>
                       <a:r>
@@ -8689,7 +8689,7 @@
                           </a:solidFill>
                           <a:latin typeface="Times New Roman"/>
                         </a:rPr>
-                        <a:t>Cr. 63.10</a:t>
+                        <a:t>Cr. 58.85</a:t>
                       </a:r>
                     </a:p>
                   </a:txBody>
@@ -8732,7 +8732,7 @@
                           </a:solidFill>
                           <a:latin typeface="Times New Roman"/>
                         </a:rPr>
-                        <a:t>53</a:t>
+                        <a:t>57</a:t>
                       </a:r>
                     </a:p>
                   </a:txBody>
@@ -9022,7 +9022,7 @@
                           </a:solidFill>
                           <a:latin typeface="Times New Roman"/>
                         </a:rPr>
-                        <a:t>800,112</a:t>
+                        <a:t>838,163</a:t>
                       </a:r>
                       <a:br/>
                       <a:r>
@@ -9032,7 +9032,7 @@
                           </a:solidFill>
                           <a:latin typeface="Times New Roman"/>
                         </a:rPr>
-                        <a:t>Cr. 80.01</a:t>
+                        <a:t>Cr. 83.82</a:t>
                       </a:r>
                     </a:p>
                   </a:txBody>
@@ -9075,7 +9075,7 @@
                           </a:solidFill>
                           <a:latin typeface="Times New Roman"/>
                         </a:rPr>
-                        <a:t>105,972</a:t>
+                        <a:t>144,023</a:t>
                       </a:r>
                       <a:br/>
                       <a:r>
@@ -9085,7 +9085,7 @@
                           </a:solidFill>
                           <a:latin typeface="Times New Roman"/>
                         </a:rPr>
-                        <a:t>Cr. 10.60</a:t>
+                        <a:t>Cr. 14.40</a:t>
                       </a:r>
                     </a:p>
                   </a:txBody>
@@ -9128,7 +9128,7 @@
                           </a:solidFill>
                           <a:latin typeface="Times New Roman"/>
                         </a:rPr>
-                        <a:t>115</a:t>
+                        <a:t>121</a:t>
                       </a:r>
                     </a:p>
                   </a:txBody>
@@ -9171,7 +9171,7 @@
                           </a:solidFill>
                           <a:latin typeface="Times New Roman"/>
                         </a:rPr>
-                        <a:t>1,259,838</a:t>
+                        <a:t>1,221,787</a:t>
                       </a:r>
                       <a:br/>
                       <a:r>
@@ -9181,7 +9181,7 @@
                           </a:solidFill>
                           <a:latin typeface="Times New Roman"/>
                         </a:rPr>
-                        <a:t>Cr. 125.98</a:t>
+                        <a:t>Cr. 122.18</a:t>
                       </a:r>
                     </a:p>
                   </a:txBody>
@@ -9224,7 +9224,7 @@
                           </a:solidFill>
                           <a:latin typeface="Times New Roman"/>
                         </a:rPr>
-                        <a:t>39</a:t>
+                        <a:t>41</a:t>
                       </a:r>
                     </a:p>
                   </a:txBody>
@@ -9514,7 +9514,7 @@
                           </a:solidFill>
                           <a:latin typeface="Times New Roman"/>
                         </a:rPr>
-                        <a:t>1,562,963</a:t>
+                        <a:t>1,617,389</a:t>
                       </a:r>
                       <a:br/>
                       <a:r>
@@ -9524,7 +9524,7 @@
                           </a:solidFill>
                           <a:latin typeface="Times New Roman"/>
                         </a:rPr>
-                        <a:t>Cr. 156.30</a:t>
+                        <a:t>Cr. 161.74</a:t>
                       </a:r>
                     </a:p>
                   </a:txBody>
@@ -9567,7 +9567,7 @@
                           </a:solidFill>
                           <a:latin typeface="Times New Roman"/>
                         </a:rPr>
-                        <a:t>345,691</a:t>
+                        <a:t>400,117</a:t>
                       </a:r>
                       <a:br/>
                       <a:r>
@@ -9577,7 +9577,7 @@
                           </a:solidFill>
                           <a:latin typeface="Times New Roman"/>
                         </a:rPr>
-                        <a:t>Cr. 34.57</a:t>
+                        <a:t>Cr. 40.01</a:t>
                       </a:r>
                     </a:p>
                   </a:txBody>
@@ -9620,7 +9620,7 @@
                           </a:solidFill>
                           <a:latin typeface="Times New Roman"/>
                         </a:rPr>
-                        <a:t>128</a:t>
+                        <a:t>133</a:t>
                       </a:r>
                     </a:p>
                   </a:txBody>
@@ -9663,7 +9663,7 @@
                           </a:solidFill>
                           <a:latin typeface="Times New Roman"/>
                         </a:rPr>
-                        <a:t>1,789,603</a:t>
+                        <a:t>1,735,177</a:t>
                       </a:r>
                       <a:br/>
                       <a:r>
@@ -9673,7 +9673,7 @@
                           </a:solidFill>
                           <a:latin typeface="Times New Roman"/>
                         </a:rPr>
-                        <a:t>Cr. 178.96</a:t>
+                        <a:t>Cr. 173.52</a:t>
                       </a:r>
                     </a:p>
                   </a:txBody>
@@ -9716,7 +9716,7 @@
                           </a:solidFill>
                           <a:latin typeface="Times New Roman"/>
                         </a:rPr>
-                        <a:t>47</a:t>
+                        <a:t>48</a:t>
                       </a:r>
                     </a:p>
                   </a:txBody>
@@ -10006,7 +10006,7 @@
                           </a:solidFill>
                           <a:latin typeface="Times New Roman"/>
                         </a:rPr>
-                        <a:t>1,777,301</a:t>
+                        <a:t>1,782,151</a:t>
                       </a:r>
                       <a:br/>
                       <a:r>
@@ -10016,7 +10016,7 @@
                           </a:solidFill>
                           <a:latin typeface="Times New Roman"/>
                         </a:rPr>
-                        <a:t>Cr. 177.73</a:t>
+                        <a:t>Cr. 178.22</a:t>
                       </a:r>
                     </a:p>
                   </a:txBody>
@@ -10059,7 +10059,7 @@
                           </a:solidFill>
                           <a:latin typeface="Times New Roman"/>
                         </a:rPr>
-                        <a:t>266,110</a:t>
+                        <a:t>270,960</a:t>
                       </a:r>
                       <a:br/>
                       <a:r>
@@ -10069,7 +10069,7 @@
                           </a:solidFill>
                           <a:latin typeface="Times New Roman"/>
                         </a:rPr>
-                        <a:t>Cr. 26.61</a:t>
+                        <a:t>Cr. 27.10</a:t>
                       </a:r>
                     </a:p>
                   </a:txBody>
@@ -10155,7 +10155,7 @@
                           </a:solidFill>
                           <a:latin typeface="Times New Roman"/>
                         </a:rPr>
-                        <a:t>2,651,465</a:t>
+                        <a:t>2,646,615</a:t>
                       </a:r>
                       <a:br/>
                       <a:r>
@@ -10165,7 +10165,7 @@
                           </a:solidFill>
                           <a:latin typeface="Times New Roman"/>
                         </a:rPr>
-                        <a:t>Cr. 265.15</a:t>
+                        <a:t>Cr. 264.66</a:t>
                       </a:r>
                     </a:p>
                   </a:txBody>
@@ -10498,7 +10498,7 @@
                           </a:solidFill>
                           <a:latin typeface="Times New Roman"/>
                         </a:rPr>
-                        <a:t>3,545,214</a:t>
+                        <a:t>4,605,644</a:t>
                       </a:r>
                       <a:br/>
                       <a:r>
@@ -10508,7 +10508,7 @@
                           </a:solidFill>
                           <a:latin typeface="Times New Roman"/>
                         </a:rPr>
-                        <a:t>Cr. 354.52</a:t>
+                        <a:t>Cr. 460.56</a:t>
                       </a:r>
                     </a:p>
                   </a:txBody>
@@ -10551,7 +10551,7 @@
                           </a:solidFill>
                           <a:latin typeface="Times New Roman"/>
                         </a:rPr>
-                        <a:t>-317,091</a:t>
+                        <a:t>743,339</a:t>
                       </a:r>
                       <a:br/>
                       <a:r>
@@ -10561,7 +10561,7 @@
                           </a:solidFill>
                           <a:latin typeface="Times New Roman"/>
                         </a:rPr>
-                        <a:t>Cr. -31.71</a:t>
+                        <a:t>Cr. 74.33</a:t>
                       </a:r>
                     </a:p>
                   </a:txBody>
@@ -10604,50 +10604,50 @@
                           </a:solidFill>
                           <a:latin typeface="Times New Roman"/>
                         </a:rPr>
-                        <a:t>92</a:t>
-                      </a:r>
-                    </a:p>
-                  </a:txBody>
-                  <a:tcPr marL="12000" marR="12000" marT="8000" marB="8000">
-                    <a:solidFill>
-                      <a:srgbClr val="FFF2CC"/>
-                    </a:solidFill>
-                    <a:lnL w="12700">
-                      <a:solidFill>
-                        <a:srgbClr val="000000"/>
-                      </a:solidFill>
-                    </a:lnL>
-                    <a:lnR w="12700">
-                      <a:solidFill>
-                        <a:srgbClr val="000000"/>
-                      </a:solidFill>
-                    </a:lnR>
-                    <a:lnT w="12700">
-                      <a:solidFill>
-                        <a:srgbClr val="000000"/>
-                      </a:solidFill>
-                    </a:lnT>
-                    <a:lnB w="12700">
-                      <a:solidFill>
-                        <a:srgbClr val="000000"/>
-                      </a:solidFill>
-                    </a:lnB>
-                  </a:tcPr>
-                </a:tc>
-                <a:tc>
-                  <a:txBody>
-                    <a:bodyPr wrap="square" anchor="ctr" lIns="18000" rIns="18000" tIns="10000" bIns="10000"/>
-                    <a:lstStyle/>
-                    <a:p>
-                      <a:pPr algn="ctr"/>
-                      <a:r>
-                        <a:rPr lang="en-US" sz="1000">
-                          <a:solidFill>
-                            <a:srgbClr val="000000"/>
-                          </a:solidFill>
-                          <a:latin typeface="Times New Roman"/>
-                        </a:rPr>
-                        <a:t>8,061,992</a:t>
+                        <a:t>119</a:t>
+                      </a:r>
+                    </a:p>
+                  </a:txBody>
+                  <a:tcPr marL="12000" marR="12000" marT="8000" marB="8000">
+                    <a:solidFill>
+                      <a:srgbClr val="FCE4E4"/>
+                    </a:solidFill>
+                    <a:lnL w="12700">
+                      <a:solidFill>
+                        <a:srgbClr val="000000"/>
+                      </a:solidFill>
+                    </a:lnL>
+                    <a:lnR w="12700">
+                      <a:solidFill>
+                        <a:srgbClr val="000000"/>
+                      </a:solidFill>
+                    </a:lnR>
+                    <a:lnT w="12700">
+                      <a:solidFill>
+                        <a:srgbClr val="000000"/>
+                      </a:solidFill>
+                    </a:lnT>
+                    <a:lnB w="12700">
+                      <a:solidFill>
+                        <a:srgbClr val="000000"/>
+                      </a:solidFill>
+                    </a:lnB>
+                  </a:tcPr>
+                </a:tc>
+                <a:tc>
+                  <a:txBody>
+                    <a:bodyPr wrap="square" anchor="ctr" lIns="18000" rIns="18000" tIns="10000" bIns="10000"/>
+                    <a:lstStyle/>
+                    <a:p>
+                      <a:pPr algn="ctr"/>
+                      <a:r>
+                        <a:rPr lang="en-US" sz="1000">
+                          <a:solidFill>
+                            <a:srgbClr val="000000"/>
+                          </a:solidFill>
+                          <a:latin typeface="Times New Roman"/>
+                        </a:rPr>
+                        <a:t>7,001,562</a:t>
                       </a:r>
                       <a:br/>
                       <a:r>
@@ -10657,7 +10657,7 @@
                           </a:solidFill>
                           <a:latin typeface="Times New Roman"/>
                         </a:rPr>
-                        <a:t>Cr. 806.20</a:t>
+                        <a:t>Cr. 700.16</a:t>
                       </a:r>
                     </a:p>
                   </a:txBody>
@@ -10700,7 +10700,7 @@
                           </a:solidFill>
                           <a:latin typeface="Times New Roman"/>
                         </a:rPr>
-                        <a:t>31</a:t>
+                        <a:t>40</a:t>
                       </a:r>
                     </a:p>
                   </a:txBody>
@@ -10990,7 +10990,7 @@
                           </a:solidFill>
                           <a:latin typeface="Times New Roman"/>
                         </a:rPr>
-                        <a:t>807,750</a:t>
+                        <a:t>810,746</a:t>
                       </a:r>
                       <a:br/>
                       <a:r>
@@ -11000,7 +11000,7 @@
                           </a:solidFill>
                           <a:latin typeface="Times New Roman"/>
                         </a:rPr>
-                        <a:t>Cr. 80.78</a:t>
+                        <a:t>Cr. 81.07</a:t>
                       </a:r>
                     </a:p>
                   </a:txBody>
@@ -11043,7 +11043,7 @@
                           </a:solidFill>
                           <a:latin typeface="Times New Roman"/>
                         </a:rPr>
-                        <a:t>209,076</a:t>
+                        <a:t>212,072</a:t>
                       </a:r>
                       <a:br/>
                       <a:r>
@@ -11053,7 +11053,7 @@
                           </a:solidFill>
                           <a:latin typeface="Times New Roman"/>
                         </a:rPr>
-                        <a:t>Cr. 20.91</a:t>
+                        <a:t>Cr. 21.21</a:t>
                       </a:r>
                     </a:p>
                   </a:txBody>
@@ -11139,7 +11139,7 @@
                           </a:solidFill>
                           <a:latin typeface="Times New Roman"/>
                         </a:rPr>
-                        <a:t>585,082</a:t>
+                        <a:t>582,086</a:t>
                       </a:r>
                       <a:br/>
                       <a:r>
@@ -11149,7 +11149,7 @@
                           </a:solidFill>
                           <a:latin typeface="Times New Roman"/>
                         </a:rPr>
-                        <a:t>Cr. 58.51</a:t>
+                        <a:t>Cr. 58.21</a:t>
                       </a:r>
                     </a:p>
                   </a:txBody>
@@ -11482,7 +11482,7 @@
                           </a:solidFill>
                           <a:latin typeface="Times New Roman"/>
                         </a:rPr>
-                        <a:t>355,866</a:t>
+                        <a:t>356,768</a:t>
                       </a:r>
                       <a:br/>
                       <a:r>
@@ -11492,7 +11492,7 @@
                           </a:solidFill>
                           <a:latin typeface="Times New Roman"/>
                         </a:rPr>
-                        <a:t>Cr. 35.59</a:t>
+                        <a:t>Cr. 35.68</a:t>
                       </a:r>
                     </a:p>
                   </a:txBody>
@@ -11535,7 +11535,7 @@
                           </a:solidFill>
                           <a:latin typeface="Times New Roman"/>
                         </a:rPr>
-                        <a:t>30,178</a:t>
+                        <a:t>31,080</a:t>
                       </a:r>
                       <a:br/>
                       <a:r>
@@ -11545,7 +11545,7 @@
                           </a:solidFill>
                           <a:latin typeface="Times New Roman"/>
                         </a:rPr>
-                        <a:t>Cr. 3.02</a:t>
+                        <a:t>Cr. 3.11</a:t>
                       </a:r>
                     </a:p>
                   </a:txBody>
@@ -11588,7 +11588,7 @@
                           </a:solidFill>
                           <a:latin typeface="Times New Roman"/>
                         </a:rPr>
-                        <a:t>109</a:t>
+                        <a:t>110</a:t>
                       </a:r>
                     </a:p>
                   </a:txBody>
@@ -11631,7 +11631,7 @@
                           </a:solidFill>
                           <a:latin typeface="Times New Roman"/>
                         </a:rPr>
-                        <a:t>638,772</a:t>
+                        <a:t>637,870</a:t>
                       </a:r>
                       <a:br/>
                       <a:r>
@@ -11641,7 +11641,7 @@
                           </a:solidFill>
                           <a:latin typeface="Times New Roman"/>
                         </a:rPr>
-                        <a:t>Cr. 63.88</a:t>
+                        <a:t>Cr. 63.79</a:t>
                       </a:r>
                     </a:p>
                   </a:txBody>
@@ -12466,7 +12466,7 @@
                           </a:solidFill>
                           <a:latin typeface="Times New Roman"/>
                         </a:rPr>
-                        <a:t>12,479,934</a:t>
+                        <a:t>13,694,023</a:t>
                       </a:r>
                       <a:br/>
                       <a:r>
@@ -12476,7 +12476,7 @@
                           </a:solidFill>
                           <a:latin typeface="Times New Roman"/>
                         </a:rPr>
-                        <a:t>Cr. 1247.99</a:t>
+                        <a:t>Cr. 1369.40</a:t>
                       </a:r>
                     </a:p>
                   </a:txBody>
@@ -12519,7 +12519,7 @@
                           </a:solidFill>
                           <a:latin typeface="Times New Roman"/>
                         </a:rPr>
-                        <a:t>1,126,378</a:t>
+                        <a:t>2,340,467</a:t>
                       </a:r>
                       <a:br/>
                       <a:r>
@@ -12529,7 +12529,7 @@
                           </a:solidFill>
                           <a:latin typeface="Times New Roman"/>
                         </a:rPr>
-                        <a:t>Cr. 112.64</a:t>
+                        <a:t>Cr. 234.05</a:t>
                       </a:r>
                     </a:p>
                   </a:txBody>
@@ -12572,7 +12572,7 @@
                           </a:solidFill>
                           <a:latin typeface="Times New Roman"/>
                         </a:rPr>
-                        <a:t>110</a:t>
+                        <a:t>121</a:t>
                       </a:r>
                     </a:p>
                   </a:txBody>
@@ -12615,7 +12615,7 @@
                           </a:solidFill>
                           <a:latin typeface="Times New Roman"/>
                         </a:rPr>
-                        <a:t>20,115,939</a:t>
+                        <a:t>18,901,850</a:t>
                       </a:r>
                       <a:br/>
                       <a:r>
@@ -12625,7 +12625,7 @@
                           </a:solidFill>
                           <a:latin typeface="Times New Roman"/>
                         </a:rPr>
-                        <a:t>Cr. 2011.59</a:t>
+                        <a:t>Cr. 1890.18</a:t>
                       </a:r>
                     </a:p>
                   </a:txBody>
@@ -12668,7 +12668,7 @@
                           </a:solidFill>
                           <a:latin typeface="Times New Roman"/>
                         </a:rPr>
-                        <a:t>38</a:t>
+                        <a:t>42</a:t>
                       </a:r>
                     </a:p>
                   </a:txBody>
@@ -12958,7 +12958,7 @@
                           </a:solidFill>
                           <a:latin typeface="Times New Roman"/>
                         </a:rPr>
-                        <a:t>1,569,032</a:t>
+                        <a:t>1,569,443</a:t>
                       </a:r>
                       <a:br/>
                       <a:r>
@@ -12968,7 +12968,7 @@
                           </a:solidFill>
                           <a:latin typeface="Times New Roman"/>
                         </a:rPr>
-                        <a:t>Cr. 156.90</a:t>
+                        <a:t>Cr. 156.94</a:t>
                       </a:r>
                     </a:p>
                   </a:txBody>
@@ -13011,7 +13011,7 @@
                           </a:solidFill>
                           <a:latin typeface="Times New Roman"/>
                         </a:rPr>
-                        <a:t>206,233</a:t>
+                        <a:t>206,644</a:t>
                       </a:r>
                       <a:br/>
                       <a:r>
@@ -13021,7 +13021,7 @@
                           </a:solidFill>
                           <a:latin typeface="Times New Roman"/>
                         </a:rPr>
-                        <a:t>Cr. 20.62</a:t>
+                        <a:t>Cr. 20.66</a:t>
                       </a:r>
                     </a:p>
                   </a:txBody>
@@ -13107,7 +13107,7 @@
                           </a:solidFill>
                           <a:latin typeface="Times New Roman"/>
                         </a:rPr>
-                        <a:t>-1,582,077</a:t>
+                        <a:t>-1,582,488</a:t>
                       </a:r>
                       <a:br/>
                       <a:r>
@@ -13117,7 +13117,7 @@
                           </a:solidFill>
                           <a:latin typeface="Times New Roman"/>
                         </a:rPr>
-                        <a:t>Cr. -158.21</a:t>
+                        <a:t>Cr. -158.25</a:t>
                       </a:r>
                     </a:p>
                   </a:txBody>
@@ -13160,7 +13160,7 @@
                           </a:solidFill>
                           <a:latin typeface="Times New Roman"/>
                         </a:rPr>
-                        <a:t>-12028</a:t>
+                        <a:t>-12031</a:t>
                       </a:r>
                     </a:p>
                   </a:txBody>
@@ -13304,7 +13304,7 @@
                 </a:solidFill>
                 <a:latin typeface="Times New Roman"/>
               </a:rPr>
-              <a:t>PU Wise - Staff - JUL 2026 | uploaded 2026-08-25T15:43:05+05:30</a:t>
+              <a:t>PU Wise - Staff - JUL 2026 | uploaded 2026-08-31T12:33:38+05:30</a:t>
             </a:r>
           </a:p>
         </p:txBody>
@@ -14086,7 +14086,7 @@
                           </a:solidFill>
                           <a:latin typeface="Times New Roman"/>
                         </a:rPr>
-                        <a:t>2,454,892</a:t>
+                        <a:t>2,453,873</a:t>
                       </a:r>
                       <a:br/>
                       <a:r>
@@ -14096,7 +14096,7 @@
                           </a:solidFill>
                           <a:latin typeface="Times New Roman"/>
                         </a:rPr>
-                        <a:t>Cr. 245.49</a:t>
+                        <a:t>Cr. 245.39</a:t>
                       </a:r>
                     </a:p>
                   </a:txBody>
@@ -14139,7 +14139,7 @@
                           </a:solidFill>
                           <a:latin typeface="Times New Roman"/>
                         </a:rPr>
-                        <a:t>205,828</a:t>
+                        <a:t>204,809</a:t>
                       </a:r>
                       <a:br/>
                       <a:r>
@@ -14149,7 +14149,7 @@
                           </a:solidFill>
                           <a:latin typeface="Times New Roman"/>
                         </a:rPr>
-                        <a:t>Cr. 20.58</a:t>
+                        <a:t>Cr. 20.48</a:t>
                       </a:r>
                     </a:p>
                   </a:txBody>
@@ -14235,7 +14235,7 @@
                           </a:solidFill>
                           <a:latin typeface="Times New Roman"/>
                         </a:rPr>
-                        <a:t>4,251,517</a:t>
+                        <a:t>4,252,536</a:t>
                       </a:r>
                       <a:br/>
                       <a:r>
@@ -14245,7 +14245,7 @@
                           </a:solidFill>
                           <a:latin typeface="Times New Roman"/>
                         </a:rPr>
-                        <a:t>Cr. 425.15</a:t>
+                        <a:t>Cr. 425.25</a:t>
                       </a:r>
                     </a:p>
                   </a:txBody>
@@ -14535,7 +14535,7 @@
                           </a:solidFill>
                           <a:latin typeface="Times New Roman"/>
                         </a:rPr>
-                        <a:t>1,579,845</a:t>
+                        <a:t>1,579,536</a:t>
                       </a:r>
                       <a:br/>
                       <a:r>
@@ -14545,7 +14545,7 @@
                           </a:solidFill>
                           <a:latin typeface="Times New Roman"/>
                         </a:rPr>
-                        <a:t>Cr. 157.98</a:t>
+                        <a:t>Cr. 157.95</a:t>
                       </a:r>
                     </a:p>
                   </a:txBody>
@@ -14588,7 +14588,7 @@
                           </a:solidFill>
                           <a:latin typeface="Times New Roman"/>
                         </a:rPr>
-                        <a:t>220,441</a:t>
+                        <a:t>220,132</a:t>
                       </a:r>
                       <a:br/>
                       <a:r>
@@ -14598,7 +14598,7 @@
                           </a:solidFill>
                           <a:latin typeface="Times New Roman"/>
                         </a:rPr>
-                        <a:t>Cr. 22.04</a:t>
+                        <a:t>Cr. 22.01</a:t>
                       </a:r>
                     </a:p>
                   </a:txBody>
@@ -14684,7 +14684,7 @@
                           </a:solidFill>
                           <a:latin typeface="Times New Roman"/>
                         </a:rPr>
-                        <a:t>2,520,608</a:t>
+                        <a:t>2,520,917</a:t>
                       </a:r>
                       <a:br/>
                       <a:r>
@@ -14694,7 +14694,7 @@
                           </a:solidFill>
                           <a:latin typeface="Times New Roman"/>
                         </a:rPr>
-                        <a:t>Cr. 252.06</a:t>
+                        <a:t>Cr. 252.09</a:t>
                       </a:r>
                     </a:p>
                   </a:txBody>
@@ -15433,7 +15433,7 @@
                           </a:solidFill>
                           <a:latin typeface="Times New Roman"/>
                         </a:rPr>
-                        <a:t>269,991</a:t>
+                        <a:t>269,887</a:t>
                       </a:r>
                       <a:br/>
                       <a:r>
@@ -15443,7 +15443,7 @@
                           </a:solidFill>
                           <a:latin typeface="Times New Roman"/>
                         </a:rPr>
-                        <a:t>Cr. 27.00</a:t>
+                        <a:t>Cr. 26.99</a:t>
                       </a:r>
                     </a:p>
                   </a:txBody>
@@ -15486,7 +15486,7 @@
                           </a:solidFill>
                           <a:latin typeface="Times New Roman"/>
                         </a:rPr>
-                        <a:t>1,139</a:t>
+                        <a:t>1,035</a:t>
                       </a:r>
                       <a:br/>
                       <a:r>
@@ -15496,7 +15496,7 @@
                           </a:solidFill>
                           <a:latin typeface="Times New Roman"/>
                         </a:rPr>
-                        <a:t>Cr. 0.11</a:t>
+                        <a:t>Cr. 0.10</a:t>
                       </a:r>
                     </a:p>
                   </a:txBody>
@@ -15582,7 +15582,7 @@
                           </a:solidFill>
                           <a:latin typeface="Times New Roman"/>
                         </a:rPr>
-                        <a:t>506,207</a:t>
+                        <a:t>506,311</a:t>
                       </a:r>
                       <a:br/>
                       <a:r>
@@ -15592,7 +15592,7 @@
                           </a:solidFill>
                           <a:latin typeface="Times New Roman"/>
                         </a:rPr>
-                        <a:t>Cr. 50.62</a:t>
+                        <a:t>Cr. 50.63</a:t>
                       </a:r>
                     </a:p>
                   </a:txBody>
@@ -15882,7 +15882,7 @@
                           </a:solidFill>
                           <a:latin typeface="Times New Roman"/>
                         </a:rPr>
-                        <a:t>173,507</a:t>
+                        <a:t>173,467</a:t>
                       </a:r>
                       <a:br/>
                       <a:r>
@@ -15935,7 +15935,7 @@
                           </a:solidFill>
                           <a:latin typeface="Times New Roman"/>
                         </a:rPr>
-                        <a:t>6,195</a:t>
+                        <a:t>6,155</a:t>
                       </a:r>
                       <a:br/>
                       <a:r>
@@ -16031,7 +16031,7 @@
                           </a:solidFill>
                           <a:latin typeface="Times New Roman"/>
                         </a:rPr>
-                        <a:t>323,102</a:t>
+                        <a:t>323,142</a:t>
                       </a:r>
                       <a:br/>
                       <a:r>
@@ -16780,7 +16780,7 @@
                           </a:solidFill>
                           <a:latin typeface="Times New Roman"/>
                         </a:rPr>
-                        <a:t>54,545</a:t>
+                        <a:t>54,782</a:t>
                       </a:r>
                       <a:br/>
                       <a:r>
@@ -16790,7 +16790,7 @@
                           </a:solidFill>
                           <a:latin typeface="Times New Roman"/>
                         </a:rPr>
-                        <a:t>Cr. 5.45</a:t>
+                        <a:t>Cr. 5.48</a:t>
                       </a:r>
                     </a:p>
                   </a:txBody>
@@ -16833,7 +16833,7 @@
                           </a:solidFill>
                           <a:latin typeface="Times New Roman"/>
                         </a:rPr>
-                        <a:t>27,621</a:t>
+                        <a:t>27,858</a:t>
                       </a:r>
                       <a:br/>
                       <a:r>
@@ -16843,7 +16843,7 @@
                           </a:solidFill>
                           <a:latin typeface="Times New Roman"/>
                         </a:rPr>
-                        <a:t>Cr. 2.76</a:t>
+                        <a:t>Cr. 2.79</a:t>
                       </a:r>
                     </a:p>
                   </a:txBody>
@@ -16929,7 +16929,7 @@
                           </a:solidFill>
                           <a:latin typeface="Times New Roman"/>
                         </a:rPr>
-                        <a:t>22,755</a:t>
+                        <a:t>22,518</a:t>
                       </a:r>
                       <a:br/>
                       <a:r>
@@ -16939,7 +16939,7 @@
                           </a:solidFill>
                           <a:latin typeface="Times New Roman"/>
                         </a:rPr>
-                        <a:t>Cr. 2.28</a:t>
+                        <a:t>Cr. 2.25</a:t>
                       </a:r>
                     </a:p>
                   </a:txBody>
@@ -17678,7 +17678,7 @@
                           </a:solidFill>
                           <a:latin typeface="Times New Roman"/>
                         </a:rPr>
-                        <a:t>250,793</a:t>
+                        <a:t>250,736</a:t>
                       </a:r>
                       <a:br/>
                       <a:r>
@@ -17688,7 +17688,7 @@
                           </a:solidFill>
                           <a:latin typeface="Times New Roman"/>
                         </a:rPr>
-                        <a:t>Cr. 25.08</a:t>
+                        <a:t>Cr. 25.07</a:t>
                       </a:r>
                     </a:p>
                   </a:txBody>
@@ -17731,7 +17731,7 @@
                           </a:solidFill>
                           <a:latin typeface="Times New Roman"/>
                         </a:rPr>
-                        <a:t>-22,684</a:t>
+                        <a:t>-22,741</a:t>
                       </a:r>
                       <a:br/>
                       <a:r>
@@ -17827,7 +17827,7 @@
                           </a:solidFill>
                           <a:latin typeface="Times New Roman"/>
                         </a:rPr>
-                        <a:t>277,039</a:t>
+                        <a:t>277,096</a:t>
                       </a:r>
                       <a:br/>
                       <a:r>
@@ -17837,7 +17837,7 @@
                           </a:solidFill>
                           <a:latin typeface="Times New Roman"/>
                         </a:rPr>
-                        <a:t>Cr. 27.70</a:t>
+                        <a:t>Cr. 27.71</a:t>
                       </a:r>
                     </a:p>
                   </a:txBody>
@@ -19474,7 +19474,7 @@
                           </a:solidFill>
                           <a:latin typeface="Times New Roman"/>
                         </a:rPr>
-                        <a:t>5,715,910</a:t>
+                        <a:t>5,714,618</a:t>
                       </a:r>
                       <a:br/>
                       <a:r>
@@ -19484,7 +19484,7 @@
                           </a:solidFill>
                           <a:latin typeface="Times New Roman"/>
                         </a:rPr>
-                        <a:t>Cr. 571.59</a:t>
+                        <a:t>Cr. 571.46</a:t>
                       </a:r>
                     </a:p>
                   </a:txBody>
@@ -19527,7 +19527,7 @@
                           </a:solidFill>
                           <a:latin typeface="Times New Roman"/>
                         </a:rPr>
-                        <a:t>619,931</a:t>
+                        <a:t>618,639</a:t>
                       </a:r>
                       <a:br/>
                       <a:r>
@@ -19537,7 +19537,7 @@
                           </a:solidFill>
                           <a:latin typeface="Times New Roman"/>
                         </a:rPr>
-                        <a:t>Cr. 61.99</a:t>
+                        <a:t>Cr. 61.86</a:t>
                       </a:r>
                     </a:p>
                   </a:txBody>
@@ -19623,7 +19623,7 @@
                           </a:solidFill>
                           <a:latin typeface="Times New Roman"/>
                         </a:rPr>
-                        <a:t>8,847,637</a:t>
+                        <a:t>8,848,929</a:t>
                       </a:r>
                       <a:br/>
                       <a:r>
@@ -19633,7 +19633,7 @@
                           </a:solidFill>
                           <a:latin typeface="Times New Roman"/>
                         </a:rPr>
-                        <a:t>Cr. 884.76</a:t>
+                        <a:t>Cr. 884.89</a:t>
                       </a:r>
                     </a:p>
                   </a:txBody>
@@ -19820,7 +19820,7 @@
                 </a:solidFill>
                 <a:latin typeface="Times New Roman"/>
               </a:rPr>
-              <a:t>PU Wise - Non-Staff Part 1 - JUL 2026 | uploaded 2026-08-25T15:43:05+05:30</a:t>
+              <a:t>PU Wise - Non-Staff Part 1 - JUL 2026 | uploaded 2026-08-31T12:33:38+05:30</a:t>
             </a:r>
           </a:p>
         </p:txBody>
@@ -20602,7 +20602,7 @@
                           </a:solidFill>
                           <a:latin typeface="Times New Roman"/>
                         </a:rPr>
-                        <a:t>588,317</a:t>
+                        <a:t>737,391</a:t>
                       </a:r>
                       <a:br/>
                       <a:r>
@@ -20612,7 +20612,7 @@
                           </a:solidFill>
                           <a:latin typeface="Times New Roman"/>
                         </a:rPr>
-                        <a:t>Cr. 58.83</a:t>
+                        <a:t>Cr. 73.74</a:t>
                       </a:r>
                     </a:p>
                   </a:txBody>
@@ -20655,7 +20655,7 @@
                           </a:solidFill>
                           <a:latin typeface="Times New Roman"/>
                         </a:rPr>
-                        <a:t>237,595</a:t>
+                        <a:t>386,669</a:t>
                       </a:r>
                       <a:br/>
                       <a:r>
@@ -20665,7 +20665,7 @@
                           </a:solidFill>
                           <a:latin typeface="Times New Roman"/>
                         </a:rPr>
-                        <a:t>Cr. 23.76</a:t>
+                        <a:t>Cr. 38.67</a:t>
                       </a:r>
                     </a:p>
                   </a:txBody>
@@ -20708,7 +20708,7 @@
                           </a:solidFill>
                           <a:latin typeface="Times New Roman"/>
                         </a:rPr>
-                        <a:t>168</a:t>
+                        <a:t>210</a:t>
                       </a:r>
                     </a:p>
                   </a:txBody>
@@ -20751,7 +20751,7 @@
                           </a:solidFill>
                           <a:latin typeface="Times New Roman"/>
                         </a:rPr>
-                        <a:t>480,435</a:t>
+                        <a:t>331,361</a:t>
                       </a:r>
                       <a:br/>
                       <a:r>
@@ -20761,7 +20761,7 @@
                           </a:solidFill>
                           <a:latin typeface="Times New Roman"/>
                         </a:rPr>
-                        <a:t>Cr. 48.04</a:t>
+                        <a:t>Cr. 33.14</a:t>
                       </a:r>
                     </a:p>
                   </a:txBody>
@@ -20804,7 +20804,7 @@
                           </a:solidFill>
                           <a:latin typeface="Times New Roman"/>
                         </a:rPr>
-                        <a:t>55</a:t>
+                        <a:t>69</a:t>
                       </a:r>
                     </a:p>
                   </a:txBody>
@@ -21051,7 +21051,7 @@
                           </a:solidFill>
                           <a:latin typeface="Times New Roman"/>
                         </a:rPr>
-                        <a:t>63,019</a:t>
+                        <a:t>63,087</a:t>
                       </a:r>
                       <a:br/>
                       <a:r>
@@ -21061,7 +21061,7 @@
                           </a:solidFill>
                           <a:latin typeface="Times New Roman"/>
                         </a:rPr>
-                        <a:t>Cr. 6.30</a:t>
+                        <a:t>Cr. 6.31</a:t>
                       </a:r>
                     </a:p>
                   </a:txBody>
@@ -21104,7 +21104,7 @@
                           </a:solidFill>
                           <a:latin typeface="Times New Roman"/>
                         </a:rPr>
-                        <a:t>10,300</a:t>
+                        <a:t>10,368</a:t>
                       </a:r>
                       <a:br/>
                       <a:r>
@@ -21114,7 +21114,7 @@
                           </a:solidFill>
                           <a:latin typeface="Times New Roman"/>
                         </a:rPr>
-                        <a:t>Cr. 1.03</a:t>
+                        <a:t>Cr. 1.04</a:t>
                       </a:r>
                     </a:p>
                   </a:txBody>
@@ -21200,7 +21200,7 @@
                           </a:solidFill>
                           <a:latin typeface="Times New Roman"/>
                         </a:rPr>
-                        <a:t>86,928</a:t>
+                        <a:t>86,860</a:t>
                       </a:r>
                       <a:br/>
                       <a:r>
@@ -21500,7 +21500,7 @@
                           </a:solidFill>
                           <a:latin typeface="Times New Roman"/>
                         </a:rPr>
-                        <a:t>1,100,220</a:t>
+                        <a:t>1,415,221</a:t>
                       </a:r>
                       <a:br/>
                       <a:r>
@@ -21510,7 +21510,7 @@
                           </a:solidFill>
                           <a:latin typeface="Times New Roman"/>
                         </a:rPr>
-                        <a:t>Cr. 110.02</a:t>
+                        <a:t>Cr. 141.52</a:t>
                       </a:r>
                     </a:p>
                   </a:txBody>
@@ -21553,7 +21553,7 @@
                           </a:solidFill>
                           <a:latin typeface="Times New Roman"/>
                         </a:rPr>
-                        <a:t>-230,054</a:t>
+                        <a:t>84,947</a:t>
                       </a:r>
                       <a:br/>
                       <a:r>
@@ -21563,7 +21563,7 @@
                           </a:solidFill>
                           <a:latin typeface="Times New Roman"/>
                         </a:rPr>
-                        <a:t>Cr. -23.01</a:t>
+                        <a:t>Cr. 8.49</a:t>
                       </a:r>
                     </a:p>
                   </a:txBody>
@@ -21606,50 +21606,50 @@
                           </a:solidFill>
                           <a:latin typeface="Times New Roman"/>
                         </a:rPr>
-                        <a:t>83</a:t>
-                      </a:r>
-                    </a:p>
-                  </a:txBody>
-                  <a:tcPr marL="12000" marR="12000" marT="8000" marB="8000">
-                    <a:solidFill>
-                      <a:srgbClr val="FFF2CC"/>
-                    </a:solidFill>
-                    <a:lnL w="12700">
-                      <a:solidFill>
-                        <a:srgbClr val="000000"/>
-                      </a:solidFill>
-                    </a:lnL>
-                    <a:lnR w="12700">
-                      <a:solidFill>
-                        <a:srgbClr val="000000"/>
-                      </a:solidFill>
-                    </a:lnR>
-                    <a:lnT w="12700">
-                      <a:solidFill>
-                        <a:srgbClr val="000000"/>
-                      </a:solidFill>
-                    </a:lnT>
-                    <a:lnB w="12700">
-                      <a:solidFill>
-                        <a:srgbClr val="000000"/>
-                      </a:solidFill>
-                    </a:lnB>
-                  </a:tcPr>
-                </a:tc>
-                <a:tc>
-                  <a:txBody>
-                    <a:bodyPr wrap="square" anchor="ctr" lIns="18000" rIns="18000" tIns="10000" bIns="10000"/>
-                    <a:lstStyle/>
-                    <a:p>
-                      <a:pPr algn="ctr"/>
-                      <a:r>
-                        <a:rPr lang="en-US" sz="1000">
-                          <a:solidFill>
-                            <a:srgbClr val="000000"/>
-                          </a:solidFill>
-                          <a:latin typeface="Times New Roman"/>
-                        </a:rPr>
-                        <a:t>2,778,504</a:t>
+                        <a:t>106</a:t>
+                      </a:r>
+                    </a:p>
+                  </a:txBody>
+                  <a:tcPr marL="12000" marR="12000" marT="8000" marB="8000">
+                    <a:solidFill>
+                      <a:srgbClr val="FCE4E4"/>
+                    </a:solidFill>
+                    <a:lnL w="12700">
+                      <a:solidFill>
+                        <a:srgbClr val="000000"/>
+                      </a:solidFill>
+                    </a:lnL>
+                    <a:lnR w="12700">
+                      <a:solidFill>
+                        <a:srgbClr val="000000"/>
+                      </a:solidFill>
+                    </a:lnR>
+                    <a:lnT w="12700">
+                      <a:solidFill>
+                        <a:srgbClr val="000000"/>
+                      </a:solidFill>
+                    </a:lnT>
+                    <a:lnB w="12700">
+                      <a:solidFill>
+                        <a:srgbClr val="000000"/>
+                      </a:solidFill>
+                    </a:lnB>
+                  </a:tcPr>
+                </a:tc>
+                <a:tc>
+                  <a:txBody>
+                    <a:bodyPr wrap="square" anchor="ctr" lIns="18000" rIns="18000" tIns="10000" bIns="10000"/>
+                    <a:lstStyle/>
+                    <a:p>
+                      <a:pPr algn="ctr"/>
+                      <a:r>
+                        <a:rPr lang="en-US" sz="1000">
+                          <a:solidFill>
+                            <a:srgbClr val="000000"/>
+                          </a:solidFill>
+                          <a:latin typeface="Times New Roman"/>
+                        </a:rPr>
+                        <a:t>2,463,503</a:t>
                       </a:r>
                       <a:br/>
                       <a:r>
@@ -21659,7 +21659,7 @@
                           </a:solidFill>
                           <a:latin typeface="Times New Roman"/>
                         </a:rPr>
-                        <a:t>Cr. 277.85</a:t>
+                        <a:t>Cr. 246.35</a:t>
                       </a:r>
                     </a:p>
                   </a:txBody>
@@ -21702,7 +21702,7 @@
                           </a:solidFill>
                           <a:latin typeface="Times New Roman"/>
                         </a:rPr>
-                        <a:t>28</a:t>
+                        <a:t>36</a:t>
                       </a:r>
                     </a:p>
                   </a:txBody>
@@ -21949,7 +21949,7 @@
                           </a:solidFill>
                           <a:latin typeface="Times New Roman"/>
                         </a:rPr>
-                        <a:t>1,658,467</a:t>
+                        <a:t>1,686,250</a:t>
                       </a:r>
                       <a:br/>
                       <a:r>
@@ -21959,7 +21959,7 @@
                           </a:solidFill>
                           <a:latin typeface="Times New Roman"/>
                         </a:rPr>
-                        <a:t>Cr. 165.85</a:t>
+                        <a:t>Cr. 168.62</a:t>
                       </a:r>
                     </a:p>
                   </a:txBody>
@@ -22002,7 +22002,7 @@
                           </a:solidFill>
                           <a:latin typeface="Times New Roman"/>
                         </a:rPr>
-                        <a:t>262,139</a:t>
+                        <a:t>289,922</a:t>
                       </a:r>
                       <a:br/>
                       <a:r>
@@ -22012,7 +22012,7 @@
                           </a:solidFill>
                           <a:latin typeface="Times New Roman"/>
                         </a:rPr>
-                        <a:t>Cr. 26.21</a:t>
+                        <a:t>Cr. 28.99</a:t>
                       </a:r>
                     </a:p>
                   </a:txBody>
@@ -22055,7 +22055,7 @@
                           </a:solidFill>
                           <a:latin typeface="Times New Roman"/>
                         </a:rPr>
-                        <a:t>119</a:t>
+                        <a:t>121</a:t>
                       </a:r>
                     </a:p>
                   </a:txBody>
@@ -22098,7 +22098,7 @@
                           </a:solidFill>
                           <a:latin typeface="Times New Roman"/>
                         </a:rPr>
-                        <a:t>1,595,843</a:t>
+                        <a:t>1,568,060</a:t>
                       </a:r>
                       <a:br/>
                       <a:r>
@@ -22108,7 +22108,7 @@
                           </a:solidFill>
                           <a:latin typeface="Times New Roman"/>
                         </a:rPr>
-                        <a:t>Cr. 159.58</a:t>
+                        <a:t>Cr. 156.81</a:t>
                       </a:r>
                     </a:p>
                   </a:txBody>
@@ -22151,7 +22151,7 @@
                           </a:solidFill>
                           <a:latin typeface="Times New Roman"/>
                         </a:rPr>
-                        <a:t>51</a:t>
+                        <a:t>52</a:t>
                       </a:r>
                     </a:p>
                   </a:txBody>
@@ -22398,7 +22398,7 @@
                           </a:solidFill>
                           <a:latin typeface="Times New Roman"/>
                         </a:rPr>
-                        <a:t>1,807,074</a:t>
+                        <a:t>2,303,206</a:t>
                       </a:r>
                       <a:br/>
                       <a:r>
@@ -22408,7 +22408,7 @@
                           </a:solidFill>
                           <a:latin typeface="Times New Roman"/>
                         </a:rPr>
-                        <a:t>Cr. 180.71</a:t>
+                        <a:t>Cr. 230.32</a:t>
                       </a:r>
                     </a:p>
                   </a:txBody>
@@ -22451,7 +22451,7 @@
                           </a:solidFill>
                           <a:latin typeface="Times New Roman"/>
                         </a:rPr>
-                        <a:t>268,642</a:t>
+                        <a:t>764,774</a:t>
                       </a:r>
                       <a:br/>
                       <a:r>
@@ -22461,7 +22461,7 @@
                           </a:solidFill>
                           <a:latin typeface="Times New Roman"/>
                         </a:rPr>
-                        <a:t>Cr. 26.86</a:t>
+                        <a:t>Cr. 76.48</a:t>
                       </a:r>
                     </a:p>
                   </a:txBody>
@@ -22504,7 +22504,7 @@
                           </a:solidFill>
                           <a:latin typeface="Times New Roman"/>
                         </a:rPr>
-                        <a:t>117</a:t>
+                        <a:t>150</a:t>
                       </a:r>
                     </a:p>
                   </a:txBody>
@@ -22547,7 +22547,7 @@
                           </a:solidFill>
                           <a:latin typeface="Times New Roman"/>
                         </a:rPr>
-                        <a:t>2,896,282</a:t>
+                        <a:t>2,400,150</a:t>
                       </a:r>
                       <a:br/>
                       <a:r>
@@ -22557,7 +22557,7 @@
                           </a:solidFill>
                           <a:latin typeface="Times New Roman"/>
                         </a:rPr>
-                        <a:t>Cr. 289.63</a:t>
+                        <a:t>Cr. 240.01</a:t>
                       </a:r>
                     </a:p>
                   </a:txBody>
@@ -22600,7 +22600,7 @@
                           </a:solidFill>
                           <a:latin typeface="Times New Roman"/>
                         </a:rPr>
-                        <a:t>38</a:t>
+                        <a:t>49</a:t>
                       </a:r>
                     </a:p>
                   </a:txBody>
@@ -22847,7 +22847,7 @@
                           </a:solidFill>
                           <a:latin typeface="Times New Roman"/>
                         </a:rPr>
-                        <a:t>5,217,097</a:t>
+                        <a:t>6,205,155</a:t>
                       </a:r>
                       <a:br/>
                       <a:r>
@@ -22857,7 +22857,7 @@
                           </a:solidFill>
                           <a:latin typeface="Times New Roman"/>
                         </a:rPr>
-                        <a:t>Cr. 521.71</a:t>
+                        <a:t>Cr. 620.52</a:t>
                       </a:r>
                     </a:p>
                   </a:txBody>
@@ -22900,7 +22900,7 @@
                           </a:solidFill>
                           <a:latin typeface="Times New Roman"/>
                         </a:rPr>
-                        <a:t>548,622</a:t>
+                        <a:t>1,536,680</a:t>
                       </a:r>
                       <a:br/>
                       <a:r>
@@ -22910,7 +22910,7 @@
                           </a:solidFill>
                           <a:latin typeface="Times New Roman"/>
                         </a:rPr>
-                        <a:t>Cr. 54.86</a:t>
+                        <a:t>Cr. 153.67</a:t>
                       </a:r>
                     </a:p>
                   </a:txBody>
@@ -22953,7 +22953,7 @@
                           </a:solidFill>
                           <a:latin typeface="Times New Roman"/>
                         </a:rPr>
-                        <a:t>112</a:t>
+                        <a:t>133</a:t>
                       </a:r>
                     </a:p>
                   </a:txBody>
@@ -22996,7 +22996,7 @@
                           </a:solidFill>
                           <a:latin typeface="Times New Roman"/>
                         </a:rPr>
-                        <a:t>7,837,992</a:t>
+                        <a:t>6,849,934</a:t>
                       </a:r>
                       <a:br/>
                       <a:r>
@@ -23006,7 +23006,7 @@
                           </a:solidFill>
                           <a:latin typeface="Times New Roman"/>
                         </a:rPr>
-                        <a:t>Cr. 783.80</a:t>
+                        <a:t>Cr. 684.99</a:t>
                       </a:r>
                     </a:p>
                   </a:txBody>
@@ -23049,7 +23049,7 @@
                           </a:solidFill>
                           <a:latin typeface="Times New Roman"/>
                         </a:rPr>
-                        <a:t>40</a:t>
+                        <a:t>48</a:t>
                       </a:r>
                     </a:p>
                   </a:txBody>

--- a/exports/Moradabad_Division_DRM_Budget_FR_Analysis_H_Full_FY_2025_26_Actual.pptx
+++ b/exports/Moradabad_Division_DRM_Budget_FR_Analysis_H_Full_FY_2025_26_Actual.pptx
@@ -5942,7 +5942,7 @@
                 </a:solidFill>
                 <a:latin typeface="Times New Roman"/>
               </a:rPr>
-              <a:t>Accounts Dept | FY 2026-2027 | DRM Budget &amp; FR Analysis | Completed JUL 2026 | H column: actual final expenditure FY 2025-26</a:t>
+              <a:t>Accounts Dept | FY 2026-2027 | DRM Budget &amp; FR Analysis | Completed AUG 2026 | H column: actual final expenditure FY 2025-26</a:t>
             </a:r>
           </a:p>
         </p:txBody>
@@ -6185,7 +6185,7 @@
                 </a:solidFill>
                 <a:latin typeface="Times New Roman"/>
               </a:rPr>
-              <a:t>Demand SMH Wise - JUL 2026 | uploaded 2026-08-31T12:33:38+05:30</a:t>
+              <a:t>Demand SMH Wise - AUG 2026 | uploaded 2026-09-01T12:16:24+05:30</a:t>
             </a:r>
           </a:p>
         </p:txBody>
@@ -6439,7 +6439,7 @@
                           </a:solidFill>
                           <a:latin typeface="Times New Roman"/>
                         </a:rPr>
-                        <a:t>BP UPTO JUL 2026</a:t>
+                        <a:t>A / 12 * 5</a:t>
                       </a:r>
                     </a:p>
                   </a:txBody>
@@ -6502,7 +6502,7 @@
                           </a:solidFill>
                           <a:latin typeface="Times New Roman"/>
                         </a:rPr>
-                        <a:t>Actuals Upto JUL 2026</a:t>
+                        <a:t>Actuals up to AUG 2026</a:t>
                       </a:r>
                     </a:p>
                   </a:txBody>
@@ -7001,7 +7001,7 @@
                           </a:solidFill>
                           <a:latin typeface="Times New Roman"/>
                         </a:rPr>
-                        <a:t>240,031</a:t>
+                        <a:t>267,301</a:t>
                       </a:r>
                       <a:br/>
                       <a:r>
@@ -7011,7 +7011,7 @@
                           </a:solidFill>
                           <a:latin typeface="Times New Roman"/>
                         </a:rPr>
-                        <a:t>Cr. 24.00</a:t>
+                        <a:t>Cr. 26.73</a:t>
                       </a:r>
                     </a:p>
                   </a:txBody>
@@ -7054,7 +7054,7 @@
                           </a:solidFill>
                           <a:latin typeface="Times New Roman"/>
                         </a:rPr>
-                        <a:t>236,563</a:t>
+                        <a:t>294,025</a:t>
                       </a:r>
                       <a:br/>
                       <a:r>
@@ -7064,7 +7064,7 @@
                           </a:solidFill>
                           <a:latin typeface="Times New Roman"/>
                         </a:rPr>
-                        <a:t>Cr. 23.66</a:t>
+                        <a:t>Cr. 29.40</a:t>
                       </a:r>
                     </a:p>
                   </a:txBody>
@@ -7107,7 +7107,7 @@
                           </a:solidFill>
                           <a:latin typeface="Times New Roman"/>
                         </a:rPr>
-                        <a:t>-3,468</a:t>
+                        <a:t>26,724</a:t>
                       </a:r>
                       <a:br/>
                       <a:r>
@@ -7117,7 +7117,7 @@
                           </a:solidFill>
                           <a:latin typeface="Times New Roman"/>
                         </a:rPr>
-                        <a:t>Cr. -0.35</a:t>
+                        <a:t>Cr. 2.67</a:t>
                       </a:r>
                     </a:p>
                   </a:txBody>
@@ -7160,50 +7160,50 @@
                           </a:solidFill>
                           <a:latin typeface="Times New Roman"/>
                         </a:rPr>
-                        <a:t>99</a:t>
-                      </a:r>
-                    </a:p>
-                  </a:txBody>
-                  <a:tcPr marL="12000" marR="12000" marT="8000" marB="8000">
-                    <a:solidFill>
-                      <a:srgbClr val="FFF2CC"/>
-                    </a:solidFill>
-                    <a:lnL w="12700">
-                      <a:solidFill>
-                        <a:srgbClr val="000000"/>
-                      </a:solidFill>
-                    </a:lnL>
-                    <a:lnR w="12700">
-                      <a:solidFill>
-                        <a:srgbClr val="000000"/>
-                      </a:solidFill>
-                    </a:lnR>
-                    <a:lnT w="12700">
-                      <a:solidFill>
-                        <a:srgbClr val="000000"/>
-                      </a:solidFill>
-                    </a:lnT>
-                    <a:lnB w="12700">
-                      <a:solidFill>
-                        <a:srgbClr val="000000"/>
-                      </a:solidFill>
-                    </a:lnB>
-                  </a:tcPr>
-                </a:tc>
-                <a:tc>
-                  <a:txBody>
-                    <a:bodyPr wrap="square" anchor="ctr" lIns="18000" rIns="18000" tIns="10000" bIns="10000"/>
-                    <a:lstStyle/>
-                    <a:p>
-                      <a:pPr algn="ctr"/>
-                      <a:r>
-                        <a:rPr lang="en-US" sz="1000">
-                          <a:solidFill>
-                            <a:srgbClr val="000000"/>
-                          </a:solidFill>
-                          <a:latin typeface="Times New Roman"/>
-                        </a:rPr>
-                        <a:t>404,959</a:t>
+                        <a:t>110</a:t>
+                      </a:r>
+                    </a:p>
+                  </a:txBody>
+                  <a:tcPr marL="12000" marR="12000" marT="8000" marB="8000">
+                    <a:solidFill>
+                      <a:srgbClr val="FCE4E4"/>
+                    </a:solidFill>
+                    <a:lnL w="12700">
+                      <a:solidFill>
+                        <a:srgbClr val="000000"/>
+                      </a:solidFill>
+                    </a:lnL>
+                    <a:lnR w="12700">
+                      <a:solidFill>
+                        <a:srgbClr val="000000"/>
+                      </a:solidFill>
+                    </a:lnR>
+                    <a:lnT w="12700">
+                      <a:solidFill>
+                        <a:srgbClr val="000000"/>
+                      </a:solidFill>
+                    </a:lnT>
+                    <a:lnB w="12700">
+                      <a:solidFill>
+                        <a:srgbClr val="000000"/>
+                      </a:solidFill>
+                    </a:lnB>
+                  </a:tcPr>
+                </a:tc>
+                <a:tc>
+                  <a:txBody>
+                    <a:bodyPr wrap="square" anchor="ctr" lIns="18000" rIns="18000" tIns="10000" bIns="10000"/>
+                    <a:lstStyle/>
+                    <a:p>
+                      <a:pPr algn="ctr"/>
+                      <a:r>
+                        <a:rPr lang="en-US" sz="1000">
+                          <a:solidFill>
+                            <a:srgbClr val="000000"/>
+                          </a:solidFill>
+                          <a:latin typeface="Times New Roman"/>
+                        </a:rPr>
+                        <a:t>347,497</a:t>
                       </a:r>
                       <a:br/>
                       <a:r>
@@ -7213,7 +7213,7 @@
                           </a:solidFill>
                           <a:latin typeface="Times New Roman"/>
                         </a:rPr>
-                        <a:t>Cr. 40.50</a:t>
+                        <a:t>Cr. 34.75</a:t>
                       </a:r>
                     </a:p>
                   </a:txBody>
@@ -7256,7 +7256,7 @@
                           </a:solidFill>
                           <a:latin typeface="Times New Roman"/>
                         </a:rPr>
-                        <a:t>37</a:t>
+                        <a:t>46</a:t>
                       </a:r>
                     </a:p>
                   </a:txBody>
@@ -7493,7 +7493,7 @@
                           </a:solidFill>
                           <a:latin typeface="Times New Roman"/>
                         </a:rPr>
-                        <a:t>1,177,984</a:t>
+                        <a:t>1,503,709</a:t>
                       </a:r>
                       <a:br/>
                       <a:r>
@@ -7503,7 +7503,7 @@
                           </a:solidFill>
                           <a:latin typeface="Times New Roman"/>
                         </a:rPr>
-                        <a:t>Cr. 117.80</a:t>
+                        <a:t>Cr. 150.37</a:t>
                       </a:r>
                     </a:p>
                   </a:txBody>
@@ -7546,7 +7546,7 @@
                           </a:solidFill>
                           <a:latin typeface="Times New Roman"/>
                         </a:rPr>
-                        <a:t>1,473,830</a:t>
+                        <a:t>1,779,391</a:t>
                       </a:r>
                       <a:br/>
                       <a:r>
@@ -7556,7 +7556,7 @@
                           </a:solidFill>
                           <a:latin typeface="Times New Roman"/>
                         </a:rPr>
-                        <a:t>Cr. 147.38</a:t>
+                        <a:t>Cr. 177.94</a:t>
                       </a:r>
                     </a:p>
                   </a:txBody>
@@ -7599,7 +7599,7 @@
                           </a:solidFill>
                           <a:latin typeface="Times New Roman"/>
                         </a:rPr>
-                        <a:t>295,846</a:t>
+                        <a:t>275,682</a:t>
                       </a:r>
                       <a:br/>
                       <a:r>
@@ -7609,7 +7609,7 @@
                           </a:solidFill>
                           <a:latin typeface="Times New Roman"/>
                         </a:rPr>
-                        <a:t>Cr. 29.58</a:t>
+                        <a:t>Cr. 27.57</a:t>
                       </a:r>
                     </a:p>
                   </a:txBody>
@@ -7652,7 +7652,7 @@
                           </a:solidFill>
                           <a:latin typeface="Times New Roman"/>
                         </a:rPr>
-                        <a:t>125</a:t>
+                        <a:t>118</a:t>
                       </a:r>
                     </a:p>
                   </a:txBody>
@@ -7695,7 +7695,7 @@
                           </a:solidFill>
                           <a:latin typeface="Times New Roman"/>
                         </a:rPr>
-                        <a:t>2,135,072</a:t>
+                        <a:t>1,829,511</a:t>
                       </a:r>
                       <a:br/>
                       <a:r>
@@ -7705,7 +7705,7 @@
                           </a:solidFill>
                           <a:latin typeface="Times New Roman"/>
                         </a:rPr>
-                        <a:t>Cr. 213.51</a:t>
+                        <a:t>Cr. 182.95</a:t>
                       </a:r>
                     </a:p>
                   </a:txBody>
@@ -7748,7 +7748,7 @@
                           </a:solidFill>
                           <a:latin typeface="Times New Roman"/>
                         </a:rPr>
-                        <a:t>41</a:t>
+                        <a:t>49</a:t>
                       </a:r>
                     </a:p>
                   </a:txBody>
@@ -7985,7 +7985,7 @@
                           </a:solidFill>
                           <a:latin typeface="Times New Roman"/>
                         </a:rPr>
-                        <a:t>923,741</a:t>
+                        <a:t>777,018</a:t>
                       </a:r>
                       <a:br/>
                       <a:r>
@@ -7995,7 +7995,7 @@
                           </a:solidFill>
                           <a:latin typeface="Times New Roman"/>
                         </a:rPr>
-                        <a:t>Cr. 92.37</a:t>
+                        <a:t>Cr. 77.70</a:t>
                       </a:r>
                     </a:p>
                   </a:txBody>
@@ -8091,7 +8091,7 @@
                           </a:solidFill>
                           <a:latin typeface="Times New Roman"/>
                         </a:rPr>
-                        <a:t>-141,709</a:t>
+                        <a:t>5,014</a:t>
                       </a:r>
                       <a:br/>
                       <a:r>
@@ -8101,7 +8101,7 @@
                           </a:solidFill>
                           <a:latin typeface="Times New Roman"/>
                         </a:rPr>
-                        <a:t>Cr. -14.17</a:t>
+                        <a:t>Cr. 0.50</a:t>
                       </a:r>
                     </a:p>
                   </a:txBody>
@@ -8144,13 +8144,13 @@
                           </a:solidFill>
                           <a:latin typeface="Times New Roman"/>
                         </a:rPr>
-                        <a:t>85</a:t>
-                      </a:r>
-                    </a:p>
-                  </a:txBody>
-                  <a:tcPr marL="12000" marR="12000" marT="8000" marB="8000">
-                    <a:solidFill>
-                      <a:srgbClr val="FFF2CC"/>
+                        <a:t>101</a:t>
+                      </a:r>
+                    </a:p>
+                  </a:txBody>
+                  <a:tcPr marL="12000" marR="12000" marT="8000" marB="8000">
+                    <a:solidFill>
+                      <a:srgbClr val="FCE4E4"/>
                     </a:solidFill>
                     <a:lnL w="12700">
                       <a:solidFill>
@@ -8477,7 +8477,7 @@
                           </a:solidFill>
                           <a:latin typeface="Times New Roman"/>
                         </a:rPr>
-                        <a:t>413,960</a:t>
+                        <a:t>563,992</a:t>
                       </a:r>
                       <a:br/>
                       <a:r>
@@ -8487,7 +8487,7 @@
                           </a:solidFill>
                           <a:latin typeface="Times New Roman"/>
                         </a:rPr>
-                        <a:t>Cr. 41.40</a:t>
+                        <a:t>Cr. 56.40</a:t>
                       </a:r>
                     </a:p>
                   </a:txBody>
@@ -8530,7 +8530,7 @@
                           </a:solidFill>
                           <a:latin typeface="Times New Roman"/>
                         </a:rPr>
-                        <a:t>765,059</a:t>
+                        <a:t>882,060</a:t>
                       </a:r>
                       <a:br/>
                       <a:r>
@@ -8540,7 +8540,7 @@
                           </a:solidFill>
                           <a:latin typeface="Times New Roman"/>
                         </a:rPr>
-                        <a:t>Cr. 76.51</a:t>
+                        <a:t>Cr. 88.21</a:t>
                       </a:r>
                     </a:p>
                   </a:txBody>
@@ -8583,7 +8583,7 @@
                           </a:solidFill>
                           <a:latin typeface="Times New Roman"/>
                         </a:rPr>
-                        <a:t>351,099</a:t>
+                        <a:t>318,068</a:t>
                       </a:r>
                       <a:br/>
                       <a:r>
@@ -8593,7 +8593,7 @@
                           </a:solidFill>
                           <a:latin typeface="Times New Roman"/>
                         </a:rPr>
-                        <a:t>Cr. 35.11</a:t>
+                        <a:t>Cr. 31.81</a:t>
                       </a:r>
                     </a:p>
                   </a:txBody>
@@ -8636,7 +8636,7 @@
                           </a:solidFill>
                           <a:latin typeface="Times New Roman"/>
                         </a:rPr>
-                        <a:t>185</a:t>
+                        <a:t>156</a:t>
                       </a:r>
                     </a:p>
                   </a:txBody>
@@ -8679,7 +8679,7 @@
                           </a:solidFill>
                           <a:latin typeface="Times New Roman"/>
                         </a:rPr>
-                        <a:t>588,522</a:t>
+                        <a:t>471,521</a:t>
                       </a:r>
                       <a:br/>
                       <a:r>
@@ -8689,7 +8689,7 @@
                           </a:solidFill>
                           <a:latin typeface="Times New Roman"/>
                         </a:rPr>
-                        <a:t>Cr. 58.85</a:t>
+                        <a:t>Cr. 47.15</a:t>
                       </a:r>
                     </a:p>
                   </a:txBody>
@@ -8732,7 +8732,7 @@
                           </a:solidFill>
                           <a:latin typeface="Times New Roman"/>
                         </a:rPr>
-                        <a:t>57</a:t>
+                        <a:t>65</a:t>
                       </a:r>
                     </a:p>
                   </a:txBody>
@@ -8969,7 +8969,7 @@
                           </a:solidFill>
                           <a:latin typeface="Times New Roman"/>
                         </a:rPr>
-                        <a:t>694,140</a:t>
+                        <a:t>858,312</a:t>
                       </a:r>
                       <a:br/>
                       <a:r>
@@ -8979,7 +8979,7 @@
                           </a:solidFill>
                           <a:latin typeface="Times New Roman"/>
                         </a:rPr>
-                        <a:t>Cr. 69.41</a:t>
+                        <a:t>Cr. 85.83</a:t>
                       </a:r>
                     </a:p>
                   </a:txBody>
@@ -9022,7 +9022,7 @@
                           </a:solidFill>
                           <a:latin typeface="Times New Roman"/>
                         </a:rPr>
-                        <a:t>838,163</a:t>
+                        <a:t>987,240</a:t>
                       </a:r>
                       <a:br/>
                       <a:r>
@@ -9032,7 +9032,7 @@
                           </a:solidFill>
                           <a:latin typeface="Times New Roman"/>
                         </a:rPr>
-                        <a:t>Cr. 83.82</a:t>
+                        <a:t>Cr. 98.72</a:t>
                       </a:r>
                     </a:p>
                   </a:txBody>
@@ -9075,7 +9075,7 @@
                           </a:solidFill>
                           <a:latin typeface="Times New Roman"/>
                         </a:rPr>
-                        <a:t>144,023</a:t>
+                        <a:t>128,928</a:t>
                       </a:r>
                       <a:br/>
                       <a:r>
@@ -9085,7 +9085,7 @@
                           </a:solidFill>
                           <a:latin typeface="Times New Roman"/>
                         </a:rPr>
-                        <a:t>Cr. 14.40</a:t>
+                        <a:t>Cr. 12.89</a:t>
                       </a:r>
                     </a:p>
                   </a:txBody>
@@ -9128,7 +9128,7 @@
                           </a:solidFill>
                           <a:latin typeface="Times New Roman"/>
                         </a:rPr>
-                        <a:t>121</a:t>
+                        <a:t>115</a:t>
                       </a:r>
                     </a:p>
                   </a:txBody>
@@ -9171,7 +9171,7 @@
                           </a:solidFill>
                           <a:latin typeface="Times New Roman"/>
                         </a:rPr>
-                        <a:t>1,221,787</a:t>
+                        <a:t>1,072,710</a:t>
                       </a:r>
                       <a:br/>
                       <a:r>
@@ -9181,7 +9181,7 @@
                           </a:solidFill>
                           <a:latin typeface="Times New Roman"/>
                         </a:rPr>
-                        <a:t>Cr. 122.18</a:t>
+                        <a:t>Cr. 107.27</a:t>
                       </a:r>
                     </a:p>
                   </a:txBody>
@@ -9224,7 +9224,7 @@
                           </a:solidFill>
                           <a:latin typeface="Times New Roman"/>
                         </a:rPr>
-                        <a:t>41</a:t>
+                        <a:t>48</a:t>
                       </a:r>
                     </a:p>
                   </a:txBody>
@@ -9461,7 +9461,7 @@
                           </a:solidFill>
                           <a:latin typeface="Times New Roman"/>
                         </a:rPr>
-                        <a:t>1,217,272</a:t>
+                        <a:t>1,396,902</a:t>
                       </a:r>
                       <a:br/>
                       <a:r>
@@ -9471,7 +9471,7 @@
                           </a:solidFill>
                           <a:latin typeface="Times New Roman"/>
                         </a:rPr>
-                        <a:t>Cr. 121.73</a:t>
+                        <a:t>Cr. 139.69</a:t>
                       </a:r>
                     </a:p>
                   </a:txBody>
@@ -9514,7 +9514,7 @@
                           </a:solidFill>
                           <a:latin typeface="Times New Roman"/>
                         </a:rPr>
-                        <a:t>1,617,389</a:t>
+                        <a:t>1,953,133</a:t>
                       </a:r>
                       <a:br/>
                       <a:r>
@@ -9524,7 +9524,7 @@
                           </a:solidFill>
                           <a:latin typeface="Times New Roman"/>
                         </a:rPr>
-                        <a:t>Cr. 161.74</a:t>
+                        <a:t>Cr. 195.31</a:t>
                       </a:r>
                     </a:p>
                   </a:txBody>
@@ -9567,7 +9567,7 @@
                           </a:solidFill>
                           <a:latin typeface="Times New Roman"/>
                         </a:rPr>
-                        <a:t>400,117</a:t>
+                        <a:t>556,231</a:t>
                       </a:r>
                       <a:br/>
                       <a:r>
@@ -9577,7 +9577,7 @@
                           </a:solidFill>
                           <a:latin typeface="Times New Roman"/>
                         </a:rPr>
-                        <a:t>Cr. 40.01</a:t>
+                        <a:t>Cr. 55.62</a:t>
                       </a:r>
                     </a:p>
                   </a:txBody>
@@ -9620,7 +9620,7 @@
                           </a:solidFill>
                           <a:latin typeface="Times New Roman"/>
                         </a:rPr>
-                        <a:t>133</a:t>
+                        <a:t>140</a:t>
                       </a:r>
                     </a:p>
                   </a:txBody>
@@ -9663,7 +9663,7 @@
                           </a:solidFill>
                           <a:latin typeface="Times New Roman"/>
                         </a:rPr>
-                        <a:t>1,735,177</a:t>
+                        <a:t>1,399,433</a:t>
                       </a:r>
                       <a:br/>
                       <a:r>
@@ -9673,7 +9673,7 @@
                           </a:solidFill>
                           <a:latin typeface="Times New Roman"/>
                         </a:rPr>
-                        <a:t>Cr. 173.52</a:t>
+                        <a:t>Cr. 139.94</a:t>
                       </a:r>
                     </a:p>
                   </a:txBody>
@@ -9716,7 +9716,7 @@
                           </a:solidFill>
                           <a:latin typeface="Times New Roman"/>
                         </a:rPr>
-                        <a:t>48</a:t>
+                        <a:t>58</a:t>
                       </a:r>
                     </a:p>
                   </a:txBody>
@@ -9953,7 +9953,7 @@
                           </a:solidFill>
                           <a:latin typeface="Times New Roman"/>
                         </a:rPr>
-                        <a:t>1,511,191</a:t>
+                        <a:t>1,845,319</a:t>
                       </a:r>
                       <a:br/>
                       <a:r>
@@ -9963,7 +9963,7 @@
                           </a:solidFill>
                           <a:latin typeface="Times New Roman"/>
                         </a:rPr>
-                        <a:t>Cr. 151.12</a:t>
+                        <a:t>Cr. 184.53</a:t>
                       </a:r>
                     </a:p>
                   </a:txBody>
@@ -10006,7 +10006,7 @@
                           </a:solidFill>
                           <a:latin typeface="Times New Roman"/>
                         </a:rPr>
-                        <a:t>1,782,151</a:t>
+                        <a:t>2,193,589</a:t>
                       </a:r>
                       <a:br/>
                       <a:r>
@@ -10016,7 +10016,7 @@
                           </a:solidFill>
                           <a:latin typeface="Times New Roman"/>
                         </a:rPr>
-                        <a:t>Cr. 178.22</a:t>
+                        <a:t>Cr. 219.36</a:t>
                       </a:r>
                     </a:p>
                   </a:txBody>
@@ -10059,7 +10059,7 @@
                           </a:solidFill>
                           <a:latin typeface="Times New Roman"/>
                         </a:rPr>
-                        <a:t>270,960</a:t>
+                        <a:t>348,270</a:t>
                       </a:r>
                       <a:br/>
                       <a:r>
@@ -10069,7 +10069,7 @@
                           </a:solidFill>
                           <a:latin typeface="Times New Roman"/>
                         </a:rPr>
-                        <a:t>Cr. 27.10</a:t>
+                        <a:t>Cr. 34.83</a:t>
                       </a:r>
                     </a:p>
                   </a:txBody>
@@ -10112,7 +10112,7 @@
                           </a:solidFill>
                           <a:latin typeface="Times New Roman"/>
                         </a:rPr>
-                        <a:t>118</a:t>
+                        <a:t>119</a:t>
                       </a:r>
                     </a:p>
                   </a:txBody>
@@ -10155,7 +10155,7 @@
                           </a:solidFill>
                           <a:latin typeface="Times New Roman"/>
                         </a:rPr>
-                        <a:t>2,646,615</a:t>
+                        <a:t>2,235,177</a:t>
                       </a:r>
                       <a:br/>
                       <a:r>
@@ -10165,7 +10165,7 @@
                           </a:solidFill>
                           <a:latin typeface="Times New Roman"/>
                         </a:rPr>
-                        <a:t>Cr. 264.66</a:t>
+                        <a:t>Cr. 223.52</a:t>
                       </a:r>
                     </a:p>
                   </a:txBody>
@@ -10208,7 +10208,7 @@
                           </a:solidFill>
                           <a:latin typeface="Times New Roman"/>
                         </a:rPr>
-                        <a:t>40</a:t>
+                        <a:t>50</a:t>
                       </a:r>
                     </a:p>
                   </a:txBody>
@@ -10445,7 +10445,7 @@
                           </a:solidFill>
                           <a:latin typeface="Times New Roman"/>
                         </a:rPr>
-                        <a:t>3,862,305</a:t>
+                        <a:t>4,836,336</a:t>
                       </a:r>
                       <a:br/>
                       <a:r>
@@ -10455,7 +10455,7 @@
                           </a:solidFill>
                           <a:latin typeface="Times New Roman"/>
                         </a:rPr>
-                        <a:t>Cr. 386.23</a:t>
+                        <a:t>Cr. 483.63</a:t>
                       </a:r>
                     </a:p>
                   </a:txBody>
@@ -10498,7 +10498,7 @@
                           </a:solidFill>
                           <a:latin typeface="Times New Roman"/>
                         </a:rPr>
-                        <a:t>4,605,644</a:t>
+                        <a:t>4,657,805</a:t>
                       </a:r>
                       <a:br/>
                       <a:r>
@@ -10508,7 +10508,7 @@
                           </a:solidFill>
                           <a:latin typeface="Times New Roman"/>
                         </a:rPr>
-                        <a:t>Cr. 460.56</a:t>
+                        <a:t>Cr. 465.78</a:t>
                       </a:r>
                     </a:p>
                   </a:txBody>
@@ -10551,7 +10551,7 @@
                           </a:solidFill>
                           <a:latin typeface="Times New Roman"/>
                         </a:rPr>
-                        <a:t>743,339</a:t>
+                        <a:t>-178,531</a:t>
                       </a:r>
                       <a:br/>
                       <a:r>
@@ -10561,7 +10561,7 @@
                           </a:solidFill>
                           <a:latin typeface="Times New Roman"/>
                         </a:rPr>
-                        <a:t>Cr. 74.33</a:t>
+                        <a:t>Cr. -17.85</a:t>
                       </a:r>
                     </a:p>
                   </a:txBody>
@@ -10604,50 +10604,50 @@
                           </a:solidFill>
                           <a:latin typeface="Times New Roman"/>
                         </a:rPr>
-                        <a:t>119</a:t>
-                      </a:r>
-                    </a:p>
-                  </a:txBody>
-                  <a:tcPr marL="12000" marR="12000" marT="8000" marB="8000">
-                    <a:solidFill>
-                      <a:srgbClr val="FCE4E4"/>
-                    </a:solidFill>
-                    <a:lnL w="12700">
-                      <a:solidFill>
-                        <a:srgbClr val="000000"/>
-                      </a:solidFill>
-                    </a:lnL>
-                    <a:lnR w="12700">
-                      <a:solidFill>
-                        <a:srgbClr val="000000"/>
-                      </a:solidFill>
-                    </a:lnR>
-                    <a:lnT w="12700">
-                      <a:solidFill>
-                        <a:srgbClr val="000000"/>
-                      </a:solidFill>
-                    </a:lnT>
-                    <a:lnB w="12700">
-                      <a:solidFill>
-                        <a:srgbClr val="000000"/>
-                      </a:solidFill>
-                    </a:lnB>
-                  </a:tcPr>
-                </a:tc>
-                <a:tc>
-                  <a:txBody>
-                    <a:bodyPr wrap="square" anchor="ctr" lIns="18000" rIns="18000" tIns="10000" bIns="10000"/>
-                    <a:lstStyle/>
-                    <a:p>
-                      <a:pPr algn="ctr"/>
-                      <a:r>
-                        <a:rPr lang="en-US" sz="1000">
-                          <a:solidFill>
-                            <a:srgbClr val="000000"/>
-                          </a:solidFill>
-                          <a:latin typeface="Times New Roman"/>
-                        </a:rPr>
-                        <a:t>7,001,562</a:t>
+                        <a:t>96</a:t>
+                      </a:r>
+                    </a:p>
+                  </a:txBody>
+                  <a:tcPr marL="12000" marR="12000" marT="8000" marB="8000">
+                    <a:solidFill>
+                      <a:srgbClr val="FFF2CC"/>
+                    </a:solidFill>
+                    <a:lnL w="12700">
+                      <a:solidFill>
+                        <a:srgbClr val="000000"/>
+                      </a:solidFill>
+                    </a:lnL>
+                    <a:lnR w="12700">
+                      <a:solidFill>
+                        <a:srgbClr val="000000"/>
+                      </a:solidFill>
+                    </a:lnR>
+                    <a:lnT w="12700">
+                      <a:solidFill>
+                        <a:srgbClr val="000000"/>
+                      </a:solidFill>
+                    </a:lnT>
+                    <a:lnB w="12700">
+                      <a:solidFill>
+                        <a:srgbClr val="000000"/>
+                      </a:solidFill>
+                    </a:lnB>
+                  </a:tcPr>
+                </a:tc>
+                <a:tc>
+                  <a:txBody>
+                    <a:bodyPr wrap="square" anchor="ctr" lIns="18000" rIns="18000" tIns="10000" bIns="10000"/>
+                    <a:lstStyle/>
+                    <a:p>
+                      <a:pPr algn="ctr"/>
+                      <a:r>
+                        <a:rPr lang="en-US" sz="1000">
+                          <a:solidFill>
+                            <a:srgbClr val="000000"/>
+                          </a:solidFill>
+                          <a:latin typeface="Times New Roman"/>
+                        </a:rPr>
+                        <a:t>6,949,401</a:t>
                       </a:r>
                       <a:br/>
                       <a:r>
@@ -10657,7 +10657,7 @@
                           </a:solidFill>
                           <a:latin typeface="Times New Roman"/>
                         </a:rPr>
-                        <a:t>Cr. 700.16</a:t>
+                        <a:t>Cr. 694.94</a:t>
                       </a:r>
                     </a:p>
                   </a:txBody>
@@ -10937,7 +10937,7 @@
                           </a:solidFill>
                           <a:latin typeface="Times New Roman"/>
                         </a:rPr>
-                        <a:t>598,674</a:t>
+                        <a:t>580,347</a:t>
                       </a:r>
                       <a:br/>
                       <a:r>
@@ -10947,7 +10947,7 @@
                           </a:solidFill>
                           <a:latin typeface="Times New Roman"/>
                         </a:rPr>
-                        <a:t>Cr. 59.87</a:t>
+                        <a:t>Cr. 58.03</a:t>
                       </a:r>
                     </a:p>
                   </a:txBody>
@@ -10990,7 +10990,7 @@
                           </a:solidFill>
                           <a:latin typeface="Times New Roman"/>
                         </a:rPr>
-                        <a:t>810,746</a:t>
+                        <a:t>915,762</a:t>
                       </a:r>
                       <a:br/>
                       <a:r>
@@ -11000,7 +11000,7 @@
                           </a:solidFill>
                           <a:latin typeface="Times New Roman"/>
                         </a:rPr>
-                        <a:t>Cr. 81.07</a:t>
+                        <a:t>Cr. 91.58</a:t>
                       </a:r>
                     </a:p>
                   </a:txBody>
@@ -11043,7 +11043,7 @@
                           </a:solidFill>
                           <a:latin typeface="Times New Roman"/>
                         </a:rPr>
-                        <a:t>212,072</a:t>
+                        <a:t>335,415</a:t>
                       </a:r>
                       <a:br/>
                       <a:r>
@@ -11053,7 +11053,7 @@
                           </a:solidFill>
                           <a:latin typeface="Times New Roman"/>
                         </a:rPr>
-                        <a:t>Cr. 21.21</a:t>
+                        <a:t>Cr. 33.54</a:t>
                       </a:r>
                     </a:p>
                   </a:txBody>
@@ -11096,7 +11096,7 @@
                           </a:solidFill>
                           <a:latin typeface="Times New Roman"/>
                         </a:rPr>
-                        <a:t>135</a:t>
+                        <a:t>158</a:t>
                       </a:r>
                     </a:p>
                   </a:txBody>
@@ -11139,7 +11139,7 @@
                           </a:solidFill>
                           <a:latin typeface="Times New Roman"/>
                         </a:rPr>
-                        <a:t>582,086</a:t>
+                        <a:t>477,070</a:t>
                       </a:r>
                       <a:br/>
                       <a:r>
@@ -11149,7 +11149,7 @@
                           </a:solidFill>
                           <a:latin typeface="Times New Roman"/>
                         </a:rPr>
-                        <a:t>Cr. 58.21</a:t>
+                        <a:t>Cr. 47.71</a:t>
                       </a:r>
                     </a:p>
                   </a:txBody>
@@ -11192,7 +11192,7 @@
                           </a:solidFill>
                           <a:latin typeface="Times New Roman"/>
                         </a:rPr>
-                        <a:t>58</a:t>
+                        <a:t>66</a:t>
                       </a:r>
                     </a:p>
                   </a:txBody>
@@ -11429,7 +11429,7 @@
                           </a:solidFill>
                           <a:latin typeface="Times New Roman"/>
                         </a:rPr>
-                        <a:t>325,688</a:t>
+                        <a:t>414,432</a:t>
                       </a:r>
                       <a:br/>
                       <a:r>
@@ -11439,7 +11439,7 @@
                           </a:solidFill>
                           <a:latin typeface="Times New Roman"/>
                         </a:rPr>
-                        <a:t>Cr. 32.57</a:t>
+                        <a:t>Cr. 41.44</a:t>
                       </a:r>
                     </a:p>
                   </a:txBody>
@@ -11482,7 +11482,7 @@
                           </a:solidFill>
                           <a:latin typeface="Times New Roman"/>
                         </a:rPr>
-                        <a:t>356,768</a:t>
+                        <a:t>439,544</a:t>
                       </a:r>
                       <a:br/>
                       <a:r>
@@ -11492,7 +11492,7 @@
                           </a:solidFill>
                           <a:latin typeface="Times New Roman"/>
                         </a:rPr>
-                        <a:t>Cr. 35.68</a:t>
+                        <a:t>Cr. 43.95</a:t>
                       </a:r>
                     </a:p>
                   </a:txBody>
@@ -11535,7 +11535,7 @@
                           </a:solidFill>
                           <a:latin typeface="Times New Roman"/>
                         </a:rPr>
-                        <a:t>31,080</a:t>
+                        <a:t>25,112</a:t>
                       </a:r>
                       <a:br/>
                       <a:r>
@@ -11545,7 +11545,7 @@
                           </a:solidFill>
                           <a:latin typeface="Times New Roman"/>
                         </a:rPr>
-                        <a:t>Cr. 3.11</a:t>
+                        <a:t>Cr. 2.51</a:t>
                       </a:r>
                     </a:p>
                   </a:txBody>
@@ -11588,7 +11588,7 @@
                           </a:solidFill>
                           <a:latin typeface="Times New Roman"/>
                         </a:rPr>
-                        <a:t>110</a:t>
+                        <a:t>106</a:t>
                       </a:r>
                     </a:p>
                   </a:txBody>
@@ -11631,7 +11631,7 @@
                           </a:solidFill>
                           <a:latin typeface="Times New Roman"/>
                         </a:rPr>
-                        <a:t>637,870</a:t>
+                        <a:t>555,094</a:t>
                       </a:r>
                       <a:br/>
                       <a:r>
@@ -11641,7 +11641,7 @@
                           </a:solidFill>
                           <a:latin typeface="Times New Roman"/>
                         </a:rPr>
-                        <a:t>Cr. 63.79</a:t>
+                        <a:t>Cr. 55.51</a:t>
                       </a:r>
                     </a:p>
                   </a:txBody>
@@ -11684,7 +11684,7 @@
                           </a:solidFill>
                           <a:latin typeface="Times New Roman"/>
                         </a:rPr>
-                        <a:t>36</a:t>
+                        <a:t>44</a:t>
                       </a:r>
                     </a:p>
                   </a:txBody>
@@ -11921,7 +11921,7 @@
                           </a:solidFill>
                           <a:latin typeface="Times New Roman"/>
                         </a:rPr>
-                        <a:t>388,570</a:t>
+                        <a:t>537,945</a:t>
                       </a:r>
                       <a:br/>
                       <a:r>
@@ -11931,7 +11931,7 @@
                           </a:solidFill>
                           <a:latin typeface="Times New Roman"/>
                         </a:rPr>
-                        <a:t>Cr. 38.86</a:t>
+                        <a:t>Cr. 53.79</a:t>
                       </a:r>
                     </a:p>
                   </a:txBody>
@@ -11974,7 +11974,7 @@
                           </a:solidFill>
                           <a:latin typeface="Times New Roman"/>
                         </a:rPr>
-                        <a:t>425,678</a:t>
+                        <a:t>532,662</a:t>
                       </a:r>
                       <a:br/>
                       <a:r>
@@ -11984,7 +11984,7 @@
                           </a:solidFill>
                           <a:latin typeface="Times New Roman"/>
                         </a:rPr>
-                        <a:t>Cr. 42.57</a:t>
+                        <a:t>Cr. 53.27</a:t>
                       </a:r>
                     </a:p>
                   </a:txBody>
@@ -12027,7 +12027,7 @@
                           </a:solidFill>
                           <a:latin typeface="Times New Roman"/>
                         </a:rPr>
-                        <a:t>37,108</a:t>
+                        <a:t>-5,283</a:t>
                       </a:r>
                       <a:br/>
                       <a:r>
@@ -12037,7 +12037,7 @@
                           </a:solidFill>
                           <a:latin typeface="Times New Roman"/>
                         </a:rPr>
-                        <a:t>Cr. 3.71</a:t>
+                        <a:t>Cr. -0.53</a:t>
                       </a:r>
                     </a:p>
                   </a:txBody>
@@ -12080,50 +12080,50 @@
                           </a:solidFill>
                           <a:latin typeface="Times New Roman"/>
                         </a:rPr>
-                        <a:t>110</a:t>
-                      </a:r>
-                    </a:p>
-                  </a:txBody>
-                  <a:tcPr marL="12000" marR="12000" marT="8000" marB="8000">
-                    <a:solidFill>
-                      <a:srgbClr val="FCE4E4"/>
-                    </a:solidFill>
-                    <a:lnL w="12700">
-                      <a:solidFill>
-                        <a:srgbClr val="000000"/>
-                      </a:solidFill>
-                    </a:lnL>
-                    <a:lnR w="12700">
-                      <a:solidFill>
-                        <a:srgbClr val="000000"/>
-                      </a:solidFill>
-                    </a:lnR>
-                    <a:lnT w="12700">
-                      <a:solidFill>
-                        <a:srgbClr val="000000"/>
-                      </a:solidFill>
-                    </a:lnT>
-                    <a:lnB w="12700">
-                      <a:solidFill>
-                        <a:srgbClr val="000000"/>
-                      </a:solidFill>
-                    </a:lnB>
-                  </a:tcPr>
-                </a:tc>
-                <a:tc>
-                  <a:txBody>
-                    <a:bodyPr wrap="square" anchor="ctr" lIns="18000" rIns="18000" tIns="10000" bIns="10000"/>
-                    <a:lstStyle/>
-                    <a:p>
-                      <a:pPr algn="ctr"/>
-                      <a:r>
-                        <a:rPr lang="en-US" sz="1000">
-                          <a:solidFill>
-                            <a:srgbClr val="000000"/>
-                          </a:solidFill>
-                          <a:latin typeface="Times New Roman"/>
-                        </a:rPr>
-                        <a:t>865,389</a:t>
+                        <a:t>99</a:t>
+                      </a:r>
+                    </a:p>
+                  </a:txBody>
+                  <a:tcPr marL="12000" marR="12000" marT="8000" marB="8000">
+                    <a:solidFill>
+                      <a:srgbClr val="FFF2CC"/>
+                    </a:solidFill>
+                    <a:lnL w="12700">
+                      <a:solidFill>
+                        <a:srgbClr val="000000"/>
+                      </a:solidFill>
+                    </a:lnL>
+                    <a:lnR w="12700">
+                      <a:solidFill>
+                        <a:srgbClr val="000000"/>
+                      </a:solidFill>
+                    </a:lnR>
+                    <a:lnT w="12700">
+                      <a:solidFill>
+                        <a:srgbClr val="000000"/>
+                      </a:solidFill>
+                    </a:lnT>
+                    <a:lnB w="12700">
+                      <a:solidFill>
+                        <a:srgbClr val="000000"/>
+                      </a:solidFill>
+                    </a:lnB>
+                  </a:tcPr>
+                </a:tc>
+                <a:tc>
+                  <a:txBody>
+                    <a:bodyPr wrap="square" anchor="ctr" lIns="18000" rIns="18000" tIns="10000" bIns="10000"/>
+                    <a:lstStyle/>
+                    <a:p>
+                      <a:pPr algn="ctr"/>
+                      <a:r>
+                        <a:rPr lang="en-US" sz="1000">
+                          <a:solidFill>
+                            <a:srgbClr val="000000"/>
+                          </a:solidFill>
+                          <a:latin typeface="Times New Roman"/>
+                        </a:rPr>
+                        <a:t>758,405</a:t>
                       </a:r>
                       <a:br/>
                       <a:r>
@@ -12133,7 +12133,7 @@
                           </a:solidFill>
                           <a:latin typeface="Times New Roman"/>
                         </a:rPr>
-                        <a:t>Cr. 86.54</a:t>
+                        <a:t>Cr. 75.84</a:t>
                       </a:r>
                     </a:p>
                   </a:txBody>
@@ -12176,7 +12176,7 @@
                           </a:solidFill>
                           <a:latin typeface="Times New Roman"/>
                         </a:rPr>
-                        <a:t>33</a:t>
+                        <a:t>41</a:t>
                       </a:r>
                     </a:p>
                   </a:txBody>
@@ -12413,7 +12413,7 @@
                           </a:solidFill>
                           <a:latin typeface="Times New Roman"/>
                         </a:rPr>
-                        <a:t>11,353,556</a:t>
+                        <a:t>13,581,613</a:t>
                       </a:r>
                       <a:br/>
                       <a:r>
@@ -12423,7 +12423,7 @@
                           </a:solidFill>
                           <a:latin typeface="Times New Roman"/>
                         </a:rPr>
-                        <a:t>Cr. 1135.36</a:t>
+                        <a:t>Cr. 1358.16</a:t>
                       </a:r>
                     </a:p>
                   </a:txBody>
@@ -12466,7 +12466,7 @@
                           </a:solidFill>
                           <a:latin typeface="Times New Roman"/>
                         </a:rPr>
-                        <a:t>13,694,023</a:t>
+                        <a:t>15,417,243</a:t>
                       </a:r>
                       <a:br/>
                       <a:r>
@@ -12476,7 +12476,7 @@
                           </a:solidFill>
                           <a:latin typeface="Times New Roman"/>
                         </a:rPr>
-                        <a:t>Cr. 1369.40</a:t>
+                        <a:t>Cr. 1541.72</a:t>
                       </a:r>
                     </a:p>
                   </a:txBody>
@@ -12519,7 +12519,7 @@
                           </a:solidFill>
                           <a:latin typeface="Times New Roman"/>
                         </a:rPr>
-                        <a:t>2,340,467</a:t>
+                        <a:t>1,835,630</a:t>
                       </a:r>
                       <a:br/>
                       <a:r>
@@ -12529,7 +12529,7 @@
                           </a:solidFill>
                           <a:latin typeface="Times New Roman"/>
                         </a:rPr>
-                        <a:t>Cr. 234.05</a:t>
+                        <a:t>Cr. 183.56</a:t>
                       </a:r>
                     </a:p>
                   </a:txBody>
@@ -12572,7 +12572,7 @@
                           </a:solidFill>
                           <a:latin typeface="Times New Roman"/>
                         </a:rPr>
-                        <a:t>121</a:t>
+                        <a:t>114</a:t>
                       </a:r>
                     </a:p>
                   </a:txBody>
@@ -12615,7 +12615,7 @@
                           </a:solidFill>
                           <a:latin typeface="Times New Roman"/>
                         </a:rPr>
-                        <a:t>18,901,850</a:t>
+                        <a:t>17,178,630</a:t>
                       </a:r>
                       <a:br/>
                       <a:r>
@@ -12625,7 +12625,7 @@
                           </a:solidFill>
                           <a:latin typeface="Times New Roman"/>
                         </a:rPr>
-                        <a:t>Cr. 1890.18</a:t>
+                        <a:t>Cr. 1717.86</a:t>
                       </a:r>
                     </a:p>
                   </a:txBody>
@@ -12668,7 +12668,7 @@
                           </a:solidFill>
                           <a:latin typeface="Times New Roman"/>
                         </a:rPr>
-                        <a:t>42</a:t>
+                        <a:t>47</a:t>
                       </a:r>
                     </a:p>
                   </a:txBody>
@@ -12905,7 +12905,7 @@
                           </a:solidFill>
                           <a:latin typeface="Times New Roman"/>
                         </a:rPr>
-                        <a:t>1,362,799</a:t>
+                        <a:t>-5,435</a:t>
                       </a:r>
                       <a:br/>
                       <a:r>
@@ -12915,7 +12915,7 @@
                           </a:solidFill>
                           <a:latin typeface="Times New Roman"/>
                         </a:rPr>
-                        <a:t>Cr. 136.28</a:t>
+                        <a:t>Cr. -0.54</a:t>
                       </a:r>
                     </a:p>
                   </a:txBody>
@@ -12958,7 +12958,7 @@
                           </a:solidFill>
                           <a:latin typeface="Times New Roman"/>
                         </a:rPr>
-                        <a:t>1,569,443</a:t>
+                        <a:t>1,578,852</a:t>
                       </a:r>
                       <a:br/>
                       <a:r>
@@ -12968,7 +12968,7 @@
                           </a:solidFill>
                           <a:latin typeface="Times New Roman"/>
                         </a:rPr>
-                        <a:t>Cr. 156.94</a:t>
+                        <a:t>Cr. 157.89</a:t>
                       </a:r>
                     </a:p>
                   </a:txBody>
@@ -13011,7 +13011,7 @@
                           </a:solidFill>
                           <a:latin typeface="Times New Roman"/>
                         </a:rPr>
-                        <a:t>206,644</a:t>
+                        <a:t>1,584,287</a:t>
                       </a:r>
                       <a:br/>
                       <a:r>
@@ -13021,7 +13021,7 @@
                           </a:solidFill>
                           <a:latin typeface="Times New Roman"/>
                         </a:rPr>
-                        <a:t>Cr. 20.66</a:t>
+                        <a:t>Cr. 158.43</a:t>
                       </a:r>
                     </a:p>
                   </a:txBody>
@@ -13064,7 +13064,7 @@
                           </a:solidFill>
                           <a:latin typeface="Times New Roman"/>
                         </a:rPr>
-                        <a:t>115</a:t>
+                        <a:t>-29050</a:t>
                       </a:r>
                     </a:p>
                   </a:txBody>
@@ -13107,7 +13107,7 @@
                           </a:solidFill>
                           <a:latin typeface="Times New Roman"/>
                         </a:rPr>
-                        <a:t>-1,582,488</a:t>
+                        <a:t>-1,591,897</a:t>
                       </a:r>
                       <a:br/>
                       <a:r>
@@ -13117,7 +13117,7 @@
                           </a:solidFill>
                           <a:latin typeface="Times New Roman"/>
                         </a:rPr>
-                        <a:t>Cr. -158.25</a:t>
+                        <a:t>Cr. -159.19</a:t>
                       </a:r>
                     </a:p>
                   </a:txBody>
@@ -13160,7 +13160,7 @@
                           </a:solidFill>
                           <a:latin typeface="Times New Roman"/>
                         </a:rPr>
-                        <a:t>-12031</a:t>
+                        <a:t>-12103</a:t>
                       </a:r>
                     </a:p>
                   </a:txBody>
@@ -13304,7 +13304,7 @@
                 </a:solidFill>
                 <a:latin typeface="Times New Roman"/>
               </a:rPr>
-              <a:t>PU Wise - Staff - JUL 2026 | uploaded 2026-08-31T12:33:38+05:30</a:t>
+              <a:t>PU Wise - Staff - AUG 2026 | uploaded 2026-09-01T12:16:24+05:30</a:t>
             </a:r>
           </a:p>
         </p:txBody>
@@ -13514,7 +13514,7 @@
                           </a:solidFill>
                           <a:latin typeface="Times New Roman"/>
                         </a:rPr>
-                        <a:t>BP UPTO JUL 2026</a:t>
+                        <a:t>A / 12 * 5</a:t>
                       </a:r>
                     </a:p>
                   </a:txBody>
@@ -13577,7 +13577,7 @@
                           </a:solidFill>
                           <a:latin typeface="Times New Roman"/>
                         </a:rPr>
-                        <a:t>Actuals Upto JUL 2026</a:t>
+                        <a:t>Actuals up to AUG 2026</a:t>
                       </a:r>
                     </a:p>
                   </a:txBody>
@@ -14033,7 +14033,7 @@
                           </a:solidFill>
                           <a:latin typeface="Times New Roman"/>
                         </a:rPr>
-                        <a:t>2,249,064</a:t>
+                        <a:t>2,794,337</a:t>
                       </a:r>
                       <a:br/>
                       <a:r>
@@ -14043,7 +14043,7 @@
                           </a:solidFill>
                           <a:latin typeface="Times New Roman"/>
                         </a:rPr>
-                        <a:t>Cr. 224.91</a:t>
+                        <a:t>Cr. 279.43</a:t>
                       </a:r>
                     </a:p>
                   </a:txBody>
@@ -14086,7 +14086,7 @@
                           </a:solidFill>
                           <a:latin typeface="Times New Roman"/>
                         </a:rPr>
-                        <a:t>2,453,873</a:t>
+                        <a:t>3,073,272</a:t>
                       </a:r>
                       <a:br/>
                       <a:r>
@@ -14096,7 +14096,7 @@
                           </a:solidFill>
                           <a:latin typeface="Times New Roman"/>
                         </a:rPr>
-                        <a:t>Cr. 245.39</a:t>
+                        <a:t>Cr. 307.33</a:t>
                       </a:r>
                     </a:p>
                   </a:txBody>
@@ -14139,7 +14139,7 @@
                           </a:solidFill>
                           <a:latin typeface="Times New Roman"/>
                         </a:rPr>
-                        <a:t>204,809</a:t>
+                        <a:t>278,935</a:t>
                       </a:r>
                       <a:br/>
                       <a:r>
@@ -14149,7 +14149,7 @@
                           </a:solidFill>
                           <a:latin typeface="Times New Roman"/>
                         </a:rPr>
-                        <a:t>Cr. 20.48</a:t>
+                        <a:t>Cr. 27.89</a:t>
                       </a:r>
                     </a:p>
                   </a:txBody>
@@ -14192,7 +14192,7 @@
                           </a:solidFill>
                           <a:latin typeface="Times New Roman"/>
                         </a:rPr>
-                        <a:t>109</a:t>
+                        <a:t>110</a:t>
                       </a:r>
                     </a:p>
                   </a:txBody>
@@ -14235,7 +14235,7 @@
                           </a:solidFill>
                           <a:latin typeface="Times New Roman"/>
                         </a:rPr>
-                        <a:t>4,252,536</a:t>
+                        <a:t>3,633,137</a:t>
                       </a:r>
                       <a:br/>
                       <a:r>
@@ -14245,7 +14245,7 @@
                           </a:solidFill>
                           <a:latin typeface="Times New Roman"/>
                         </a:rPr>
-                        <a:t>Cr. 425.25</a:t>
+                        <a:t>Cr. 363.31</a:t>
                       </a:r>
                     </a:p>
                   </a:txBody>
@@ -14288,7 +14288,7 @@
                           </a:solidFill>
                           <a:latin typeface="Times New Roman"/>
                         </a:rPr>
-                        <a:t>37</a:t>
+                        <a:t>46</a:t>
                       </a:r>
                     </a:p>
                   </a:txBody>
@@ -14482,7 +14482,7 @@
                           </a:solidFill>
                           <a:latin typeface="Times New Roman"/>
                         </a:rPr>
-                        <a:t>1,359,404</a:t>
+                        <a:t>1,708,522</a:t>
                       </a:r>
                       <a:br/>
                       <a:r>
@@ -14492,7 +14492,7 @@
                           </a:solidFill>
                           <a:latin typeface="Times New Roman"/>
                         </a:rPr>
-                        <a:t>Cr. 135.94</a:t>
+                        <a:t>Cr. 170.85</a:t>
                       </a:r>
                     </a:p>
                   </a:txBody>
@@ -14535,7 +14535,7 @@
                           </a:solidFill>
                           <a:latin typeface="Times New Roman"/>
                         </a:rPr>
-                        <a:t>1,579,536</a:t>
+                        <a:t>1,968,578</a:t>
                       </a:r>
                       <a:br/>
                       <a:r>
@@ -14545,7 +14545,7 @@
                           </a:solidFill>
                           <a:latin typeface="Times New Roman"/>
                         </a:rPr>
-                        <a:t>Cr. 157.95</a:t>
+                        <a:t>Cr. 196.86</a:t>
                       </a:r>
                     </a:p>
                   </a:txBody>
@@ -14588,7 +14588,7 @@
                           </a:solidFill>
                           <a:latin typeface="Times New Roman"/>
                         </a:rPr>
-                        <a:t>220,132</a:t>
+                        <a:t>260,056</a:t>
                       </a:r>
                       <a:br/>
                       <a:r>
@@ -14598,7 +14598,7 @@
                           </a:solidFill>
                           <a:latin typeface="Times New Roman"/>
                         </a:rPr>
-                        <a:t>Cr. 22.01</a:t>
+                        <a:t>Cr. 26.01</a:t>
                       </a:r>
                     </a:p>
                   </a:txBody>
@@ -14641,7 +14641,7 @@
                           </a:solidFill>
                           <a:latin typeface="Times New Roman"/>
                         </a:rPr>
-                        <a:t>116</a:t>
+                        <a:t>115</a:t>
                       </a:r>
                     </a:p>
                   </a:txBody>
@@ -14684,7 +14684,7 @@
                           </a:solidFill>
                           <a:latin typeface="Times New Roman"/>
                         </a:rPr>
-                        <a:t>2,520,917</a:t>
+                        <a:t>2,131,875</a:t>
                       </a:r>
                       <a:br/>
                       <a:r>
@@ -14694,7 +14694,7 @@
                           </a:solidFill>
                           <a:latin typeface="Times New Roman"/>
                         </a:rPr>
-                        <a:t>Cr. 252.09</a:t>
+                        <a:t>Cr. 213.19</a:t>
                       </a:r>
                     </a:p>
                   </a:txBody>
@@ -14737,7 +14737,7 @@
                           </a:solidFill>
                           <a:latin typeface="Times New Roman"/>
                         </a:rPr>
-                        <a:t>39</a:t>
+                        <a:t>48</a:t>
                       </a:r>
                     </a:p>
                   </a:txBody>
@@ -14931,7 +14931,7 @@
                           </a:solidFill>
                           <a:latin typeface="Times New Roman"/>
                         </a:rPr>
-                        <a:t>0</a:t>
+                        <a:t>118,787</a:t>
                       </a:r>
                       <a:br/>
                       <a:r>
@@ -14941,7 +14941,7 @@
                           </a:solidFill>
                           <a:latin typeface="Times New Roman"/>
                         </a:rPr>
-                        <a:t>Cr. 0.00</a:t>
+                        <a:t>Cr. 11.88</a:t>
                       </a:r>
                     </a:p>
                   </a:txBody>
@@ -15037,7 +15037,7 @@
                           </a:solidFill>
                           <a:latin typeface="Times New Roman"/>
                         </a:rPr>
-                        <a:t>81</a:t>
+                        <a:t>-118,706</a:t>
                       </a:r>
                       <a:br/>
                       <a:r>
@@ -15047,7 +15047,7 @@
                           </a:solidFill>
                           <a:latin typeface="Times New Roman"/>
                         </a:rPr>
-                        <a:t>Cr. 0.01</a:t>
+                        <a:t>Cr. -11.87</a:t>
                       </a:r>
                     </a:p>
                   </a:txBody>
@@ -15380,7 +15380,7 @@
                           </a:solidFill>
                           <a:latin typeface="Times New Roman"/>
                         </a:rPr>
-                        <a:t>268,852</a:t>
+                        <a:t>323,416</a:t>
                       </a:r>
                       <a:br/>
                       <a:r>
@@ -15390,7 +15390,7 @@
                           </a:solidFill>
                           <a:latin typeface="Times New Roman"/>
                         </a:rPr>
-                        <a:t>Cr. 26.89</a:t>
+                        <a:t>Cr. 32.34</a:t>
                       </a:r>
                     </a:p>
                   </a:txBody>
@@ -15433,7 +15433,7 @@
                           </a:solidFill>
                           <a:latin typeface="Times New Roman"/>
                         </a:rPr>
-                        <a:t>269,887</a:t>
+                        <a:t>337,922</a:t>
                       </a:r>
                       <a:br/>
                       <a:r>
@@ -15443,7 +15443,7 @@
                           </a:solidFill>
                           <a:latin typeface="Times New Roman"/>
                         </a:rPr>
-                        <a:t>Cr. 26.99</a:t>
+                        <a:t>Cr. 33.79</a:t>
                       </a:r>
                     </a:p>
                   </a:txBody>
@@ -15486,7 +15486,7 @@
                           </a:solidFill>
                           <a:latin typeface="Times New Roman"/>
                         </a:rPr>
-                        <a:t>1,035</a:t>
+                        <a:t>14,506</a:t>
                       </a:r>
                       <a:br/>
                       <a:r>
@@ -15496,7 +15496,7 @@
                           </a:solidFill>
                           <a:latin typeface="Times New Roman"/>
                         </a:rPr>
-                        <a:t>Cr. 0.10</a:t>
+                        <a:t>Cr. 1.45</a:t>
                       </a:r>
                     </a:p>
                   </a:txBody>
@@ -15539,50 +15539,50 @@
                           </a:solidFill>
                           <a:latin typeface="Times New Roman"/>
                         </a:rPr>
-                        <a:t>100</a:t>
-                      </a:r>
-                    </a:p>
-                  </a:txBody>
-                  <a:tcPr marL="12000" marR="12000" marT="8000" marB="8000">
-                    <a:solidFill>
-                      <a:srgbClr val="FFF2CC"/>
-                    </a:solidFill>
-                    <a:lnL w="12700">
-                      <a:solidFill>
-                        <a:srgbClr val="000000"/>
-                      </a:solidFill>
-                    </a:lnL>
-                    <a:lnR w="12700">
-                      <a:solidFill>
-                        <a:srgbClr val="000000"/>
-                      </a:solidFill>
-                    </a:lnR>
-                    <a:lnT w="12700">
-                      <a:solidFill>
-                        <a:srgbClr val="000000"/>
-                      </a:solidFill>
-                    </a:lnT>
-                    <a:lnB w="12700">
-                      <a:solidFill>
-                        <a:srgbClr val="000000"/>
-                      </a:solidFill>
-                    </a:lnB>
-                  </a:tcPr>
-                </a:tc>
-                <a:tc>
-                  <a:txBody>
-                    <a:bodyPr wrap="square" anchor="ctr" lIns="18000" rIns="18000" tIns="10000" bIns="10000"/>
-                    <a:lstStyle/>
-                    <a:p>
-                      <a:pPr algn="ctr"/>
-                      <a:r>
-                        <a:rPr lang="en-US" sz="1000">
-                          <a:solidFill>
-                            <a:srgbClr val="000000"/>
-                          </a:solidFill>
-                          <a:latin typeface="Times New Roman"/>
-                        </a:rPr>
-                        <a:t>506,311</a:t>
+                        <a:t>104</a:t>
+                      </a:r>
+                    </a:p>
+                  </a:txBody>
+                  <a:tcPr marL="12000" marR="12000" marT="8000" marB="8000">
+                    <a:solidFill>
+                      <a:srgbClr val="FCE4E4"/>
+                    </a:solidFill>
+                    <a:lnL w="12700">
+                      <a:solidFill>
+                        <a:srgbClr val="000000"/>
+                      </a:solidFill>
+                    </a:lnL>
+                    <a:lnR w="12700">
+                      <a:solidFill>
+                        <a:srgbClr val="000000"/>
+                      </a:solidFill>
+                    </a:lnR>
+                    <a:lnT w="12700">
+                      <a:solidFill>
+                        <a:srgbClr val="000000"/>
+                      </a:solidFill>
+                    </a:lnT>
+                    <a:lnB w="12700">
+                      <a:solidFill>
+                        <a:srgbClr val="000000"/>
+                      </a:solidFill>
+                    </a:lnB>
+                  </a:tcPr>
+                </a:tc>
+                <a:tc>
+                  <a:txBody>
+                    <a:bodyPr wrap="square" anchor="ctr" lIns="18000" rIns="18000" tIns="10000" bIns="10000"/>
+                    <a:lstStyle/>
+                    <a:p>
+                      <a:pPr algn="ctr"/>
+                      <a:r>
+                        <a:rPr lang="en-US" sz="1000">
+                          <a:solidFill>
+                            <a:srgbClr val="000000"/>
+                          </a:solidFill>
+                          <a:latin typeface="Times New Roman"/>
+                        </a:rPr>
+                        <a:t>438,276</a:t>
                       </a:r>
                       <a:br/>
                       <a:r>
@@ -15592,7 +15592,7 @@
                           </a:solidFill>
                           <a:latin typeface="Times New Roman"/>
                         </a:rPr>
-                        <a:t>Cr. 50.63</a:t>
+                        <a:t>Cr. 43.83</a:t>
                       </a:r>
                     </a:p>
                   </a:txBody>
@@ -15635,7 +15635,7 @@
                           </a:solidFill>
                           <a:latin typeface="Times New Roman"/>
                         </a:rPr>
-                        <a:t>35</a:t>
+                        <a:t>44</a:t>
                       </a:r>
                     </a:p>
                   </a:txBody>
@@ -15829,7 +15829,7 @@
                           </a:solidFill>
                           <a:latin typeface="Times New Roman"/>
                         </a:rPr>
-                        <a:t>167,312</a:t>
+                        <a:t>206,920</a:t>
                       </a:r>
                       <a:br/>
                       <a:r>
@@ -15839,7 +15839,7 @@
                           </a:solidFill>
                           <a:latin typeface="Times New Roman"/>
                         </a:rPr>
-                        <a:t>Cr. 16.73</a:t>
+                        <a:t>Cr. 20.69</a:t>
                       </a:r>
                     </a:p>
                   </a:txBody>
@@ -15882,7 +15882,7 @@
                           </a:solidFill>
                           <a:latin typeface="Times New Roman"/>
                         </a:rPr>
-                        <a:t>173,467</a:t>
+                        <a:t>216,618</a:t>
                       </a:r>
                       <a:br/>
                       <a:r>
@@ -15892,7 +15892,7 @@
                           </a:solidFill>
                           <a:latin typeface="Times New Roman"/>
                         </a:rPr>
-                        <a:t>Cr. 17.35</a:t>
+                        <a:t>Cr. 21.66</a:t>
                       </a:r>
                     </a:p>
                   </a:txBody>
@@ -15935,7 +15935,7 @@
                           </a:solidFill>
                           <a:latin typeface="Times New Roman"/>
                         </a:rPr>
-                        <a:t>6,155</a:t>
+                        <a:t>9,698</a:t>
                       </a:r>
                       <a:br/>
                       <a:r>
@@ -15945,7 +15945,7 @@
                           </a:solidFill>
                           <a:latin typeface="Times New Roman"/>
                         </a:rPr>
-                        <a:t>Cr. 0.62</a:t>
+                        <a:t>Cr. 0.97</a:t>
                       </a:r>
                     </a:p>
                   </a:txBody>
@@ -15988,7 +15988,7 @@
                           </a:solidFill>
                           <a:latin typeface="Times New Roman"/>
                         </a:rPr>
-                        <a:t>104</a:t>
+                        <a:t>105</a:t>
                       </a:r>
                     </a:p>
                   </a:txBody>
@@ -16031,7 +16031,7 @@
                           </a:solidFill>
                           <a:latin typeface="Times New Roman"/>
                         </a:rPr>
-                        <a:t>323,142</a:t>
+                        <a:t>279,991</a:t>
                       </a:r>
                       <a:br/>
                       <a:r>
@@ -16041,7 +16041,7 @@
                           </a:solidFill>
                           <a:latin typeface="Times New Roman"/>
                         </a:rPr>
-                        <a:t>Cr. 32.31</a:t>
+                        <a:t>Cr. 28.00</a:t>
                       </a:r>
                     </a:p>
                   </a:txBody>
@@ -16084,7 +16084,7 @@
                           </a:solidFill>
                           <a:latin typeface="Times New Roman"/>
                         </a:rPr>
-                        <a:t>35</a:t>
+                        <a:t>44</a:t>
                       </a:r>
                     </a:p>
                   </a:txBody>
@@ -16278,7 +16278,7 @@
                           </a:solidFill>
                           <a:latin typeface="Times New Roman"/>
                         </a:rPr>
-                        <a:t>255,207</a:t>
+                        <a:t>283,415</a:t>
                       </a:r>
                       <a:br/>
                       <a:r>
@@ -16288,7 +16288,7 @@
                           </a:solidFill>
                           <a:latin typeface="Times New Roman"/>
                         </a:rPr>
-                        <a:t>Cr. 25.52</a:t>
+                        <a:t>Cr. 28.34</a:t>
                       </a:r>
                     </a:p>
                   </a:txBody>
@@ -16331,7 +16331,7 @@
                           </a:solidFill>
                           <a:latin typeface="Times New Roman"/>
                         </a:rPr>
-                        <a:t>290,482</a:t>
+                        <a:t>364,653</a:t>
                       </a:r>
                       <a:br/>
                       <a:r>
@@ -16341,7 +16341,7 @@
                           </a:solidFill>
                           <a:latin typeface="Times New Roman"/>
                         </a:rPr>
-                        <a:t>Cr. 29.05</a:t>
+                        <a:t>Cr. 36.47</a:t>
                       </a:r>
                     </a:p>
                   </a:txBody>
@@ -16384,7 +16384,7 @@
                           </a:solidFill>
                           <a:latin typeface="Times New Roman"/>
                         </a:rPr>
-                        <a:t>35,275</a:t>
+                        <a:t>81,238</a:t>
                       </a:r>
                       <a:br/>
                       <a:r>
@@ -16394,7 +16394,7 @@
                           </a:solidFill>
                           <a:latin typeface="Times New Roman"/>
                         </a:rPr>
-                        <a:t>Cr. 3.53</a:t>
+                        <a:t>Cr. 8.12</a:t>
                       </a:r>
                     </a:p>
                   </a:txBody>
@@ -16437,7 +16437,7 @@
                           </a:solidFill>
                           <a:latin typeface="Times New Roman"/>
                         </a:rPr>
-                        <a:t>114</a:t>
+                        <a:t>129</a:t>
                       </a:r>
                     </a:p>
                   </a:txBody>
@@ -16480,7 +16480,7 @@
                           </a:solidFill>
                           <a:latin typeface="Times New Roman"/>
                         </a:rPr>
-                        <a:t>389,715</a:t>
+                        <a:t>315,544</a:t>
                       </a:r>
                       <a:br/>
                       <a:r>
@@ -16490,7 +16490,7 @@
                           </a:solidFill>
                           <a:latin typeface="Times New Roman"/>
                         </a:rPr>
-                        <a:t>Cr. 38.97</a:t>
+                        <a:t>Cr. 31.55</a:t>
                       </a:r>
                     </a:p>
                   </a:txBody>
@@ -16533,7 +16533,7 @@
                           </a:solidFill>
                           <a:latin typeface="Times New Roman"/>
                         </a:rPr>
-                        <a:t>43</a:t>
+                        <a:t>54</a:t>
                       </a:r>
                     </a:p>
                   </a:txBody>
@@ -16727,7 +16727,7 @@
                           </a:solidFill>
                           <a:latin typeface="Times New Roman"/>
                         </a:rPr>
-                        <a:t>26,924</a:t>
+                        <a:t>32,208</a:t>
                       </a:r>
                       <a:br/>
                       <a:r>
@@ -16737,7 +16737,7 @@
                           </a:solidFill>
                           <a:latin typeface="Times New Roman"/>
                         </a:rPr>
-                        <a:t>Cr. 2.69</a:t>
+                        <a:t>Cr. 3.22</a:t>
                       </a:r>
                     </a:p>
                   </a:txBody>
@@ -16780,7 +16780,7 @@
                           </a:solidFill>
                           <a:latin typeface="Times New Roman"/>
                         </a:rPr>
-                        <a:t>54,782</a:t>
+                        <a:t>59,582</a:t>
                       </a:r>
                       <a:br/>
                       <a:r>
@@ -16790,7 +16790,7 @@
                           </a:solidFill>
                           <a:latin typeface="Times New Roman"/>
                         </a:rPr>
-                        <a:t>Cr. 5.48</a:t>
+                        <a:t>Cr. 5.96</a:t>
                       </a:r>
                     </a:p>
                   </a:txBody>
@@ -16833,7 +16833,7 @@
                           </a:solidFill>
                           <a:latin typeface="Times New Roman"/>
                         </a:rPr>
-                        <a:t>27,858</a:t>
+                        <a:t>27,374</a:t>
                       </a:r>
                       <a:br/>
                       <a:r>
@@ -16843,7 +16843,7 @@
                           </a:solidFill>
                           <a:latin typeface="Times New Roman"/>
                         </a:rPr>
-                        <a:t>Cr. 2.79</a:t>
+                        <a:t>Cr. 2.74</a:t>
                       </a:r>
                     </a:p>
                   </a:txBody>
@@ -16886,7 +16886,7 @@
                           </a:solidFill>
                           <a:latin typeface="Times New Roman"/>
                         </a:rPr>
-                        <a:t>203</a:t>
+                        <a:t>185</a:t>
                       </a:r>
                     </a:p>
                   </a:txBody>
@@ -16929,7 +16929,7 @@
                           </a:solidFill>
                           <a:latin typeface="Times New Roman"/>
                         </a:rPr>
-                        <a:t>22,518</a:t>
+                        <a:t>17,718</a:t>
                       </a:r>
                       <a:br/>
                       <a:r>
@@ -16939,7 +16939,7 @@
                           </a:solidFill>
                           <a:latin typeface="Times New Roman"/>
                         </a:rPr>
-                        <a:t>Cr. 2.25</a:t>
+                        <a:t>Cr. 1.77</a:t>
                       </a:r>
                     </a:p>
                   </a:txBody>
@@ -16982,13 +16982,13 @@
                           </a:solidFill>
                           <a:latin typeface="Times New Roman"/>
                         </a:rPr>
-                        <a:t>71</a:t>
-                      </a:r>
-                    </a:p>
-                  </a:txBody>
-                  <a:tcPr marL="12000" marR="12000" marT="8000" marB="8000">
-                    <a:solidFill>
-                      <a:srgbClr val="DFF3E7"/>
+                        <a:t>77</a:t>
+                      </a:r>
+                    </a:p>
+                  </a:txBody>
+                  <a:tcPr marL="12000" marR="12000" marT="8000" marB="8000">
+                    <a:solidFill>
+                      <a:srgbClr val="FFF2CC"/>
                     </a:solidFill>
                     <a:lnL w="12700">
                       <a:solidFill>
@@ -17176,7 +17176,7 @@
                           </a:solidFill>
                           <a:latin typeface="Times New Roman"/>
                         </a:rPr>
-                        <a:t>69,543</a:t>
+                        <a:t>87,464</a:t>
                       </a:r>
                       <a:br/>
                       <a:r>
@@ -17186,7 +17186,7 @@
                           </a:solidFill>
                           <a:latin typeface="Times New Roman"/>
                         </a:rPr>
-                        <a:t>Cr. 6.95</a:t>
+                        <a:t>Cr. 8.75</a:t>
                       </a:r>
                     </a:p>
                   </a:txBody>
@@ -17229,7 +17229,7 @@
                           </a:solidFill>
                           <a:latin typeface="Times New Roman"/>
                         </a:rPr>
-                        <a:t>98,022</a:t>
+                        <a:t>122,506</a:t>
                       </a:r>
                       <a:br/>
                       <a:r>
@@ -17239,7 +17239,7 @@
                           </a:solidFill>
                           <a:latin typeface="Times New Roman"/>
                         </a:rPr>
-                        <a:t>Cr. 9.80</a:t>
+                        <a:t>Cr. 12.25</a:t>
                       </a:r>
                     </a:p>
                   </a:txBody>
@@ -17282,7 +17282,7 @@
                           </a:solidFill>
                           <a:latin typeface="Times New Roman"/>
                         </a:rPr>
-                        <a:t>28,479</a:t>
+                        <a:t>35,042</a:t>
                       </a:r>
                       <a:br/>
                       <a:r>
@@ -17292,7 +17292,7 @@
                           </a:solidFill>
                           <a:latin typeface="Times New Roman"/>
                         </a:rPr>
-                        <a:t>Cr. 2.85</a:t>
+                        <a:t>Cr. 3.50</a:t>
                       </a:r>
                     </a:p>
                   </a:txBody>
@@ -17335,7 +17335,7 @@
                           </a:solidFill>
                           <a:latin typeface="Times New Roman"/>
                         </a:rPr>
-                        <a:t>141</a:t>
+                        <a:t>140</a:t>
                       </a:r>
                     </a:p>
                   </a:txBody>
@@ -17378,7 +17378,7 @@
                           </a:solidFill>
                           <a:latin typeface="Times New Roman"/>
                         </a:rPr>
-                        <a:t>111,891</a:t>
+                        <a:t>87,407</a:t>
                       </a:r>
                       <a:br/>
                       <a:r>
@@ -17388,7 +17388,7 @@
                           </a:solidFill>
                           <a:latin typeface="Times New Roman"/>
                         </a:rPr>
-                        <a:t>Cr. 11.19</a:t>
+                        <a:t>Cr. 8.74</a:t>
                       </a:r>
                     </a:p>
                   </a:txBody>
@@ -17431,7 +17431,7 @@
                           </a:solidFill>
                           <a:latin typeface="Times New Roman"/>
                         </a:rPr>
-                        <a:t>47</a:t>
+                        <a:t>58</a:t>
                       </a:r>
                     </a:p>
                   </a:txBody>
@@ -17625,7 +17625,7 @@
                           </a:solidFill>
                           <a:latin typeface="Times New Roman"/>
                         </a:rPr>
-                        <a:t>273,477</a:t>
+                        <a:t>219,930</a:t>
                       </a:r>
                       <a:br/>
                       <a:r>
@@ -17635,7 +17635,7 @@
                           </a:solidFill>
                           <a:latin typeface="Times New Roman"/>
                         </a:rPr>
-                        <a:t>Cr. 27.35</a:t>
+                        <a:t>Cr. 21.99</a:t>
                       </a:r>
                     </a:p>
                   </a:txBody>
@@ -17678,7 +17678,7 @@
                           </a:solidFill>
                           <a:latin typeface="Times New Roman"/>
                         </a:rPr>
-                        <a:t>250,736</a:t>
+                        <a:t>279,175</a:t>
                       </a:r>
                       <a:br/>
                       <a:r>
@@ -17688,7 +17688,7 @@
                           </a:solidFill>
                           <a:latin typeface="Times New Roman"/>
                         </a:rPr>
-                        <a:t>Cr. 25.07</a:t>
+                        <a:t>Cr. 27.92</a:t>
                       </a:r>
                     </a:p>
                   </a:txBody>
@@ -17731,7 +17731,7 @@
                           </a:solidFill>
                           <a:latin typeface="Times New Roman"/>
                         </a:rPr>
-                        <a:t>-22,741</a:t>
+                        <a:t>59,245</a:t>
                       </a:r>
                       <a:br/>
                       <a:r>
@@ -17741,7 +17741,7 @@
                           </a:solidFill>
                           <a:latin typeface="Times New Roman"/>
                         </a:rPr>
-                        <a:t>Cr. -2.27</a:t>
+                        <a:t>Cr. 5.92</a:t>
                       </a:r>
                     </a:p>
                   </a:txBody>
@@ -17784,50 +17784,50 @@
                           </a:solidFill>
                           <a:latin typeface="Times New Roman"/>
                         </a:rPr>
-                        <a:t>92</a:t>
-                      </a:r>
-                    </a:p>
-                  </a:txBody>
-                  <a:tcPr marL="12000" marR="12000" marT="8000" marB="8000">
-                    <a:solidFill>
-                      <a:srgbClr val="FFF2CC"/>
-                    </a:solidFill>
-                    <a:lnL w="12700">
-                      <a:solidFill>
-                        <a:srgbClr val="000000"/>
-                      </a:solidFill>
-                    </a:lnL>
-                    <a:lnR w="12700">
-                      <a:solidFill>
-                        <a:srgbClr val="000000"/>
-                      </a:solidFill>
-                    </a:lnR>
-                    <a:lnT w="12700">
-                      <a:solidFill>
-                        <a:srgbClr val="000000"/>
-                      </a:solidFill>
-                    </a:lnT>
-                    <a:lnB w="12700">
-                      <a:solidFill>
-                        <a:srgbClr val="000000"/>
-                      </a:solidFill>
-                    </a:lnB>
-                  </a:tcPr>
-                </a:tc>
-                <a:tc>
-                  <a:txBody>
-                    <a:bodyPr wrap="square" anchor="ctr" lIns="18000" rIns="18000" tIns="10000" bIns="10000"/>
-                    <a:lstStyle/>
-                    <a:p>
-                      <a:pPr algn="ctr"/>
-                      <a:r>
-                        <a:rPr lang="en-US" sz="1000">
-                          <a:solidFill>
-                            <a:srgbClr val="000000"/>
-                          </a:solidFill>
-                          <a:latin typeface="Times New Roman"/>
-                        </a:rPr>
-                        <a:t>277,096</a:t>
+                        <a:t>127</a:t>
+                      </a:r>
+                    </a:p>
+                  </a:txBody>
+                  <a:tcPr marL="12000" marR="12000" marT="8000" marB="8000">
+                    <a:solidFill>
+                      <a:srgbClr val="FCE4E4"/>
+                    </a:solidFill>
+                    <a:lnL w="12700">
+                      <a:solidFill>
+                        <a:srgbClr val="000000"/>
+                      </a:solidFill>
+                    </a:lnL>
+                    <a:lnR w="12700">
+                      <a:solidFill>
+                        <a:srgbClr val="000000"/>
+                      </a:solidFill>
+                    </a:lnR>
+                    <a:lnT w="12700">
+                      <a:solidFill>
+                        <a:srgbClr val="000000"/>
+                      </a:solidFill>
+                    </a:lnT>
+                    <a:lnB w="12700">
+                      <a:solidFill>
+                        <a:srgbClr val="000000"/>
+                      </a:solidFill>
+                    </a:lnB>
+                  </a:tcPr>
+                </a:tc>
+                <a:tc>
+                  <a:txBody>
+                    <a:bodyPr wrap="square" anchor="ctr" lIns="18000" rIns="18000" tIns="10000" bIns="10000"/>
+                    <a:lstStyle/>
+                    <a:p>
+                      <a:pPr algn="ctr"/>
+                      <a:r>
+                        <a:rPr lang="en-US" sz="1000">
+                          <a:solidFill>
+                            <a:srgbClr val="000000"/>
+                          </a:solidFill>
+                          <a:latin typeface="Times New Roman"/>
+                        </a:rPr>
+                        <a:t>248,657</a:t>
                       </a:r>
                       <a:br/>
                       <a:r>
@@ -17837,7 +17837,7 @@
                           </a:solidFill>
                           <a:latin typeface="Times New Roman"/>
                         </a:rPr>
-                        <a:t>Cr. 27.71</a:t>
+                        <a:t>Cr. 24.87</a:t>
                       </a:r>
                     </a:p>
                   </a:txBody>
@@ -17880,7 +17880,7 @@
                           </a:solidFill>
                           <a:latin typeface="Times New Roman"/>
                         </a:rPr>
-                        <a:t>48</a:t>
+                        <a:t>53</a:t>
                       </a:r>
                     </a:p>
                   </a:txBody>
@@ -18074,7 +18074,7 @@
                           </a:solidFill>
                           <a:latin typeface="Times New Roman"/>
                         </a:rPr>
-                        <a:t>5,665</a:t>
+                        <a:t>6,687</a:t>
                       </a:r>
                       <a:br/>
                       <a:r>
@@ -18084,7 +18084,7 @@
                           </a:solidFill>
                           <a:latin typeface="Times New Roman"/>
                         </a:rPr>
-                        <a:t>Cr. 0.57</a:t>
+                        <a:t>Cr. 0.67</a:t>
                       </a:r>
                     </a:p>
                   </a:txBody>
@@ -18127,7 +18127,7 @@
                           </a:solidFill>
                           <a:latin typeface="Times New Roman"/>
                         </a:rPr>
-                        <a:t>9,177</a:t>
+                        <a:t>11,132</a:t>
                       </a:r>
                       <a:br/>
                       <a:r>
@@ -18137,7 +18137,7 @@
                           </a:solidFill>
                           <a:latin typeface="Times New Roman"/>
                         </a:rPr>
-                        <a:t>Cr. 0.92</a:t>
+                        <a:t>Cr. 1.11</a:t>
                       </a:r>
                     </a:p>
                   </a:txBody>
@@ -18180,7 +18180,7 @@
                           </a:solidFill>
                           <a:latin typeface="Times New Roman"/>
                         </a:rPr>
-                        <a:t>3,512</a:t>
+                        <a:t>4,445</a:t>
                       </a:r>
                       <a:br/>
                       <a:r>
@@ -18190,7 +18190,7 @@
                           </a:solidFill>
                           <a:latin typeface="Times New Roman"/>
                         </a:rPr>
-                        <a:t>Cr. 0.35</a:t>
+                        <a:t>Cr. 0.44</a:t>
                       </a:r>
                     </a:p>
                   </a:txBody>
@@ -18233,7 +18233,7 @@
                           </a:solidFill>
                           <a:latin typeface="Times New Roman"/>
                         </a:rPr>
-                        <a:t>162</a:t>
+                        <a:t>166</a:t>
                       </a:r>
                     </a:p>
                   </a:txBody>
@@ -18276,7 +18276,7 @@
                           </a:solidFill>
                           <a:latin typeface="Times New Roman"/>
                         </a:rPr>
-                        <a:t>6,871</a:t>
+                        <a:t>4,916</a:t>
                       </a:r>
                       <a:br/>
                       <a:r>
@@ -18286,7 +18286,7 @@
                           </a:solidFill>
                           <a:latin typeface="Times New Roman"/>
                         </a:rPr>
-                        <a:t>Cr. 0.69</a:t>
+                        <a:t>Cr. 0.49</a:t>
                       </a:r>
                     </a:p>
                   </a:txBody>
@@ -18329,7 +18329,7 @@
                           </a:solidFill>
                           <a:latin typeface="Times New Roman"/>
                         </a:rPr>
-                        <a:t>57</a:t>
+                        <a:t>69</a:t>
                       </a:r>
                     </a:p>
                   </a:txBody>
@@ -18523,7 +18523,7 @@
                           </a:solidFill>
                           <a:latin typeface="Times New Roman"/>
                         </a:rPr>
-                        <a:t>100,083</a:t>
+                        <a:t>128,367</a:t>
                       </a:r>
                       <a:br/>
                       <a:r>
@@ -18533,7 +18533,7 @@
                           </a:solidFill>
                           <a:latin typeface="Times New Roman"/>
                         </a:rPr>
-                        <a:t>Cr. 10.01</a:t>
+                        <a:t>Cr. 12.84</a:t>
                       </a:r>
                     </a:p>
                   </a:txBody>
@@ -18576,7 +18576,7 @@
                           </a:solidFill>
                           <a:latin typeface="Times New Roman"/>
                         </a:rPr>
-                        <a:t>176,120</a:t>
+                        <a:t>217,182</a:t>
                       </a:r>
                       <a:br/>
                       <a:r>
@@ -18586,7 +18586,7 @@
                           </a:solidFill>
                           <a:latin typeface="Times New Roman"/>
                         </a:rPr>
-                        <a:t>Cr. 17.61</a:t>
+                        <a:t>Cr. 21.72</a:t>
                       </a:r>
                     </a:p>
                   </a:txBody>
@@ -18629,7 +18629,7 @@
                           </a:solidFill>
                           <a:latin typeface="Times New Roman"/>
                         </a:rPr>
-                        <a:t>76,037</a:t>
+                        <a:t>88,815</a:t>
                       </a:r>
                       <a:br/>
                       <a:r>
@@ -18639,7 +18639,7 @@
                           </a:solidFill>
                           <a:latin typeface="Times New Roman"/>
                         </a:rPr>
-                        <a:t>Cr. 7.60</a:t>
+                        <a:t>Cr. 8.88</a:t>
                       </a:r>
                     </a:p>
                   </a:txBody>
@@ -18682,7 +18682,7 @@
                           </a:solidFill>
                           <a:latin typeface="Times New Roman"/>
                         </a:rPr>
-                        <a:t>176</a:t>
+                        <a:t>169</a:t>
                       </a:r>
                     </a:p>
                   </a:txBody>
@@ -18725,7 +18725,7 @@
                           </a:solidFill>
                           <a:latin typeface="Times New Roman"/>
                         </a:rPr>
-                        <a:t>131,961</a:t>
+                        <a:t>90,899</a:t>
                       </a:r>
                       <a:br/>
                       <a:r>
@@ -18735,7 +18735,7 @@
                           </a:solidFill>
                           <a:latin typeface="Times New Roman"/>
                         </a:rPr>
-                        <a:t>Cr. 13.20</a:t>
+                        <a:t>Cr. 9.09</a:t>
                       </a:r>
                     </a:p>
                   </a:txBody>
@@ -18778,7 +18778,7 @@
                           </a:solidFill>
                           <a:latin typeface="Times New Roman"/>
                         </a:rPr>
-                        <a:t>57</a:t>
+                        <a:t>70</a:t>
                       </a:r>
                     </a:p>
                   </a:txBody>
@@ -18972,7 +18972,7 @@
                           </a:solidFill>
                           <a:latin typeface="Times New Roman"/>
                         </a:rPr>
-                        <a:t>320,448</a:t>
+                        <a:t>158,091</a:t>
                       </a:r>
                       <a:br/>
                       <a:r>
@@ -18982,7 +18982,7 @@
                           </a:solidFill>
                           <a:latin typeface="Times New Roman"/>
                         </a:rPr>
-                        <a:t>Cr. 32.04</a:t>
+                        <a:t>Cr. 15.81</a:t>
                       </a:r>
                     </a:p>
                   </a:txBody>
@@ -19025,7 +19025,7 @@
                           </a:solidFill>
                           <a:latin typeface="Times New Roman"/>
                         </a:rPr>
-                        <a:t>358,455</a:t>
+                        <a:t>374,892</a:t>
                       </a:r>
                       <a:br/>
                       <a:r>
@@ -19035,7 +19035,7 @@
                           </a:solidFill>
                           <a:latin typeface="Times New Roman"/>
                         </a:rPr>
-                        <a:t>Cr. 35.85</a:t>
+                        <a:t>Cr. 37.49</a:t>
                       </a:r>
                     </a:p>
                   </a:txBody>
@@ -19078,7 +19078,7 @@
                           </a:solidFill>
                           <a:latin typeface="Times New Roman"/>
                         </a:rPr>
-                        <a:t>38,007</a:t>
+                        <a:t>216,801</a:t>
                       </a:r>
                       <a:br/>
                       <a:r>
@@ -19088,7 +19088,7 @@
                           </a:solidFill>
                           <a:latin typeface="Times New Roman"/>
                         </a:rPr>
-                        <a:t>Cr. 3.80</a:t>
+                        <a:t>Cr. 21.68</a:t>
                       </a:r>
                     </a:p>
                   </a:txBody>
@@ -19131,7 +19131,7 @@
                           </a:solidFill>
                           <a:latin typeface="Times New Roman"/>
                         </a:rPr>
-                        <a:t>112</a:t>
+                        <a:t>237</a:t>
                       </a:r>
                     </a:p>
                   </a:txBody>
@@ -19174,7 +19174,7 @@
                           </a:solidFill>
                           <a:latin typeface="Times New Roman"/>
                         </a:rPr>
-                        <a:t>20,963</a:t>
+                        <a:t>4,526</a:t>
                       </a:r>
                       <a:br/>
                       <a:r>
@@ -19184,7 +19184,7 @@
                           </a:solidFill>
                           <a:latin typeface="Times New Roman"/>
                         </a:rPr>
-                        <a:t>Cr. 2.10</a:t>
+                        <a:t>Cr. 0.45</a:t>
                       </a:r>
                     </a:p>
                   </a:txBody>
@@ -19227,7 +19227,7 @@
                           </a:solidFill>
                           <a:latin typeface="Times New Roman"/>
                         </a:rPr>
-                        <a:t>94</a:t>
+                        <a:t>99</a:t>
                       </a:r>
                     </a:p>
                   </a:txBody>
@@ -19421,7 +19421,7 @@
                           </a:solidFill>
                           <a:latin typeface="Times New Roman"/>
                         </a:rPr>
-                        <a:t>5,095,979</a:t>
+                        <a:t>6,068,144</a:t>
                       </a:r>
                       <a:br/>
                       <a:r>
@@ -19431,7 +19431,7 @@
                           </a:solidFill>
                           <a:latin typeface="Times New Roman"/>
                         </a:rPr>
-                        <a:t>Cr. 509.60</a:t>
+                        <a:t>Cr. 606.81</a:t>
                       </a:r>
                     </a:p>
                   </a:txBody>
@@ -19474,7 +19474,7 @@
                           </a:solidFill>
                           <a:latin typeface="Times New Roman"/>
                         </a:rPr>
-                        <a:t>5,714,618</a:t>
+                        <a:t>7,025,593</a:t>
                       </a:r>
                       <a:br/>
                       <a:r>
@@ -19484,7 +19484,7 @@
                           </a:solidFill>
                           <a:latin typeface="Times New Roman"/>
                         </a:rPr>
-                        <a:t>Cr. 571.46</a:t>
+                        <a:t>Cr. 702.56</a:t>
                       </a:r>
                     </a:p>
                   </a:txBody>
@@ -19527,7 +19527,7 @@
                           </a:solidFill>
                           <a:latin typeface="Times New Roman"/>
                         </a:rPr>
-                        <a:t>618,639</a:t>
+                        <a:t>957,449</a:t>
                       </a:r>
                       <a:br/>
                       <a:r>
@@ -19537,7 +19537,7 @@
                           </a:solidFill>
                           <a:latin typeface="Times New Roman"/>
                         </a:rPr>
-                        <a:t>Cr. 61.86</a:t>
+                        <a:t>Cr. 95.74</a:t>
                       </a:r>
                     </a:p>
                   </a:txBody>
@@ -19580,7 +19580,7 @@
                           </a:solidFill>
                           <a:latin typeface="Times New Roman"/>
                         </a:rPr>
-                        <a:t>112</a:t>
+                        <a:t>116</a:t>
                       </a:r>
                     </a:p>
                   </a:txBody>
@@ -19623,7 +19623,7 @@
                           </a:solidFill>
                           <a:latin typeface="Times New Roman"/>
                         </a:rPr>
-                        <a:t>8,848,929</a:t>
+                        <a:t>7,537,954</a:t>
                       </a:r>
                       <a:br/>
                       <a:r>
@@ -19633,7 +19633,7 @@
                           </a:solidFill>
                           <a:latin typeface="Times New Roman"/>
                         </a:rPr>
-                        <a:t>Cr. 884.89</a:t>
+                        <a:t>Cr. 753.80</a:t>
                       </a:r>
                     </a:p>
                   </a:txBody>
@@ -19676,7 +19676,7 @@
                           </a:solidFill>
                           <a:latin typeface="Times New Roman"/>
                         </a:rPr>
-                        <a:t>39</a:t>
+                        <a:t>48</a:t>
                       </a:r>
                     </a:p>
                   </a:txBody>
@@ -19820,7 +19820,7 @@
                 </a:solidFill>
                 <a:latin typeface="Times New Roman"/>
               </a:rPr>
-              <a:t>PU Wise - Non-Staff Part 1 - JUL 2026 | uploaded 2026-08-31T12:33:38+05:30</a:t>
+              <a:t>PU Wise - Non-Staff Part 1 - AUG 2026 | uploaded 2026-09-01T12:16:24+05:30</a:t>
             </a:r>
           </a:p>
         </p:txBody>
@@ -20030,7 +20030,7 @@
                           </a:solidFill>
                           <a:latin typeface="Times New Roman"/>
                         </a:rPr>
-                        <a:t>BP UPTO JUL 2026</a:t>
+                        <a:t>A / 12 * 5</a:t>
                       </a:r>
                     </a:p>
                   </a:txBody>
@@ -20093,7 +20093,7 @@
                           </a:solidFill>
                           <a:latin typeface="Times New Roman"/>
                         </a:rPr>
-                        <a:t>Actuals Upto JUL 2026</a:t>
+                        <a:t>Actuals up to AUG 2026</a:t>
                       </a:r>
                     </a:p>
                   </a:txBody>
@@ -20549,7 +20549,7 @@
                           </a:solidFill>
                           <a:latin typeface="Times New Roman"/>
                         </a:rPr>
-                        <a:t>350,722</a:t>
+                        <a:t>445,313</a:t>
                       </a:r>
                       <a:br/>
                       <a:r>
@@ -20559,7 +20559,7 @@
                           </a:solidFill>
                           <a:latin typeface="Times New Roman"/>
                         </a:rPr>
-                        <a:t>Cr. 35.07</a:t>
+                        <a:t>Cr. 44.53</a:t>
                       </a:r>
                     </a:p>
                   </a:txBody>
@@ -20602,7 +20602,7 @@
                           </a:solidFill>
                           <a:latin typeface="Times New Roman"/>
                         </a:rPr>
-                        <a:t>737,391</a:t>
+                        <a:t>746,612</a:t>
                       </a:r>
                       <a:br/>
                       <a:r>
@@ -20612,7 +20612,7 @@
                           </a:solidFill>
                           <a:latin typeface="Times New Roman"/>
                         </a:rPr>
-                        <a:t>Cr. 73.74</a:t>
+                        <a:t>Cr. 74.66</a:t>
                       </a:r>
                     </a:p>
                   </a:txBody>
@@ -20655,7 +20655,7 @@
                           </a:solidFill>
                           <a:latin typeface="Times New Roman"/>
                         </a:rPr>
-                        <a:t>386,669</a:t>
+                        <a:t>301,299</a:t>
                       </a:r>
                       <a:br/>
                       <a:r>
@@ -20665,7 +20665,7 @@
                           </a:solidFill>
                           <a:latin typeface="Times New Roman"/>
                         </a:rPr>
-                        <a:t>Cr. 38.67</a:t>
+                        <a:t>Cr. 30.13</a:t>
                       </a:r>
                     </a:p>
                   </a:txBody>
@@ -20708,7 +20708,7 @@
                           </a:solidFill>
                           <a:latin typeface="Times New Roman"/>
                         </a:rPr>
-                        <a:t>210</a:t>
+                        <a:t>168</a:t>
                       </a:r>
                     </a:p>
                   </a:txBody>
@@ -20751,7 +20751,7 @@
                           </a:solidFill>
                           <a:latin typeface="Times New Roman"/>
                         </a:rPr>
-                        <a:t>331,361</a:t>
+                        <a:t>322,140</a:t>
                       </a:r>
                       <a:br/>
                       <a:r>
@@ -20761,7 +20761,7 @@
                           </a:solidFill>
                           <a:latin typeface="Times New Roman"/>
                         </a:rPr>
-                        <a:t>Cr. 33.14</a:t>
+                        <a:t>Cr. 32.21</a:t>
                       </a:r>
                     </a:p>
                   </a:txBody>
@@ -20804,7 +20804,7 @@
                           </a:solidFill>
                           <a:latin typeface="Times New Roman"/>
                         </a:rPr>
-                        <a:t>69</a:t>
+                        <a:t>70</a:t>
                       </a:r>
                     </a:p>
                   </a:txBody>
@@ -20998,7 +20998,7 @@
                           </a:solidFill>
                           <a:latin typeface="Times New Roman"/>
                         </a:rPr>
-                        <a:t>52,719</a:t>
+                        <a:t>62,478</a:t>
                       </a:r>
                       <a:br/>
                       <a:r>
@@ -21008,7 +21008,7 @@
                           </a:solidFill>
                           <a:latin typeface="Times New Roman"/>
                         </a:rPr>
-                        <a:t>Cr. 5.27</a:t>
+                        <a:t>Cr. 6.25</a:t>
                       </a:r>
                     </a:p>
                   </a:txBody>
@@ -21051,7 +21051,7 @@
                           </a:solidFill>
                           <a:latin typeface="Times New Roman"/>
                         </a:rPr>
-                        <a:t>63,087</a:t>
+                        <a:t>70,596</a:t>
                       </a:r>
                       <a:br/>
                       <a:r>
@@ -21061,7 +21061,7 @@
                           </a:solidFill>
                           <a:latin typeface="Times New Roman"/>
                         </a:rPr>
-                        <a:t>Cr. 6.31</a:t>
+                        <a:t>Cr. 7.06</a:t>
                       </a:r>
                     </a:p>
                   </a:txBody>
@@ -21104,7 +21104,7 @@
                           </a:solidFill>
                           <a:latin typeface="Times New Roman"/>
                         </a:rPr>
-                        <a:t>10,368</a:t>
+                        <a:t>8,118</a:t>
                       </a:r>
                       <a:br/>
                       <a:r>
@@ -21114,7 +21114,7 @@
                           </a:solidFill>
                           <a:latin typeface="Times New Roman"/>
                         </a:rPr>
-                        <a:t>Cr. 1.04</a:t>
+                        <a:t>Cr. 0.81</a:t>
                       </a:r>
                     </a:p>
                   </a:txBody>
@@ -21157,7 +21157,7 @@
                           </a:solidFill>
                           <a:latin typeface="Times New Roman"/>
                         </a:rPr>
-                        <a:t>120</a:t>
+                        <a:t>113</a:t>
                       </a:r>
                     </a:p>
                   </a:txBody>
@@ -21200,7 +21200,7 @@
                           </a:solidFill>
                           <a:latin typeface="Times New Roman"/>
                         </a:rPr>
-                        <a:t>86,860</a:t>
+                        <a:t>79,351</a:t>
                       </a:r>
                       <a:br/>
                       <a:r>
@@ -21210,7 +21210,7 @@
                           </a:solidFill>
                           <a:latin typeface="Times New Roman"/>
                         </a:rPr>
-                        <a:t>Cr. 8.69</a:t>
+                        <a:t>Cr. 7.94</a:t>
                       </a:r>
                     </a:p>
                   </a:txBody>
@@ -21253,7 +21253,7 @@
                           </a:solidFill>
                           <a:latin typeface="Times New Roman"/>
                         </a:rPr>
-                        <a:t>42</a:t>
+                        <a:t>47</a:t>
                       </a:r>
                     </a:p>
                   </a:txBody>
@@ -21447,7 +21447,7 @@
                           </a:solidFill>
                           <a:latin typeface="Times New Roman"/>
                         </a:rPr>
-                        <a:t>1,330,274</a:t>
+                        <a:t>1,616,135</a:t>
                       </a:r>
                       <a:br/>
                       <a:r>
@@ -21457,7 +21457,7 @@
                           </a:solidFill>
                           <a:latin typeface="Times New Roman"/>
                         </a:rPr>
-                        <a:t>Cr. 133.03</a:t>
+                        <a:t>Cr. 161.61</a:t>
                       </a:r>
                     </a:p>
                   </a:txBody>
@@ -21500,7 +21500,7 @@
                           </a:solidFill>
                           <a:latin typeface="Times New Roman"/>
                         </a:rPr>
-                        <a:t>1,415,221</a:t>
+                        <a:t>1,504,722</a:t>
                       </a:r>
                       <a:br/>
                       <a:r>
@@ -21510,7 +21510,7 @@
                           </a:solidFill>
                           <a:latin typeface="Times New Roman"/>
                         </a:rPr>
-                        <a:t>Cr. 141.52</a:t>
+                        <a:t>Cr. 150.47</a:t>
                       </a:r>
                     </a:p>
                   </a:txBody>
@@ -21553,7 +21553,7 @@
                           </a:solidFill>
                           <a:latin typeface="Times New Roman"/>
                         </a:rPr>
-                        <a:t>84,947</a:t>
+                        <a:t>-111,413</a:t>
                       </a:r>
                       <a:br/>
                       <a:r>
@@ -21563,7 +21563,7 @@
                           </a:solidFill>
                           <a:latin typeface="Times New Roman"/>
                         </a:rPr>
-                        <a:t>Cr. 8.49</a:t>
+                        <a:t>Cr. -11.14</a:t>
                       </a:r>
                     </a:p>
                   </a:txBody>
@@ -21606,50 +21606,50 @@
                           </a:solidFill>
                           <a:latin typeface="Times New Roman"/>
                         </a:rPr>
-                        <a:t>106</a:t>
-                      </a:r>
-                    </a:p>
-                  </a:txBody>
-                  <a:tcPr marL="12000" marR="12000" marT="8000" marB="8000">
-                    <a:solidFill>
-                      <a:srgbClr val="FCE4E4"/>
-                    </a:solidFill>
-                    <a:lnL w="12700">
-                      <a:solidFill>
-                        <a:srgbClr val="000000"/>
-                      </a:solidFill>
-                    </a:lnL>
-                    <a:lnR w="12700">
-                      <a:solidFill>
-                        <a:srgbClr val="000000"/>
-                      </a:solidFill>
-                    </a:lnR>
-                    <a:lnT w="12700">
-                      <a:solidFill>
-                        <a:srgbClr val="000000"/>
-                      </a:solidFill>
-                    </a:lnT>
-                    <a:lnB w="12700">
-                      <a:solidFill>
-                        <a:srgbClr val="000000"/>
-                      </a:solidFill>
-                    </a:lnB>
-                  </a:tcPr>
-                </a:tc>
-                <a:tc>
-                  <a:txBody>
-                    <a:bodyPr wrap="square" anchor="ctr" lIns="18000" rIns="18000" tIns="10000" bIns="10000"/>
-                    <a:lstStyle/>
-                    <a:p>
-                      <a:pPr algn="ctr"/>
-                      <a:r>
-                        <a:rPr lang="en-US" sz="1000">
-                          <a:solidFill>
-                            <a:srgbClr val="000000"/>
-                          </a:solidFill>
-                          <a:latin typeface="Times New Roman"/>
-                        </a:rPr>
-                        <a:t>2,463,503</a:t>
+                        <a:t>93</a:t>
+                      </a:r>
+                    </a:p>
+                  </a:txBody>
+                  <a:tcPr marL="12000" marR="12000" marT="8000" marB="8000">
+                    <a:solidFill>
+                      <a:srgbClr val="FFF2CC"/>
+                    </a:solidFill>
+                    <a:lnL w="12700">
+                      <a:solidFill>
+                        <a:srgbClr val="000000"/>
+                      </a:solidFill>
+                    </a:lnL>
+                    <a:lnR w="12700">
+                      <a:solidFill>
+                        <a:srgbClr val="000000"/>
+                      </a:solidFill>
+                    </a:lnR>
+                    <a:lnT w="12700">
+                      <a:solidFill>
+                        <a:srgbClr val="000000"/>
+                      </a:solidFill>
+                    </a:lnT>
+                    <a:lnB w="12700">
+                      <a:solidFill>
+                        <a:srgbClr val="000000"/>
+                      </a:solidFill>
+                    </a:lnB>
+                  </a:tcPr>
+                </a:tc>
+                <a:tc>
+                  <a:txBody>
+                    <a:bodyPr wrap="square" anchor="ctr" lIns="18000" rIns="18000" tIns="10000" bIns="10000"/>
+                    <a:lstStyle/>
+                    <a:p>
+                      <a:pPr algn="ctr"/>
+                      <a:r>
+                        <a:rPr lang="en-US" sz="1000">
+                          <a:solidFill>
+                            <a:srgbClr val="000000"/>
+                          </a:solidFill>
+                          <a:latin typeface="Times New Roman"/>
+                        </a:rPr>
+                        <a:t>2,374,002</a:t>
                       </a:r>
                       <a:br/>
                       <a:r>
@@ -21659,7 +21659,7 @@
                           </a:solidFill>
                           <a:latin typeface="Times New Roman"/>
                         </a:rPr>
-                        <a:t>Cr. 246.35</a:t>
+                        <a:t>Cr. 237.40</a:t>
                       </a:r>
                     </a:p>
                   </a:txBody>
@@ -21702,7 +21702,7 @@
                           </a:solidFill>
                           <a:latin typeface="Times New Roman"/>
                         </a:rPr>
-                        <a:t>36</a:t>
+                        <a:t>39</a:t>
                       </a:r>
                     </a:p>
                   </a:txBody>
@@ -21896,7 +21896,7 @@
                           </a:solidFill>
                           <a:latin typeface="Times New Roman"/>
                         </a:rPr>
-                        <a:t>1,396,328</a:t>
+                        <a:t>1,355,962</a:t>
                       </a:r>
                       <a:br/>
                       <a:r>
@@ -21906,7 +21906,7 @@
                           </a:solidFill>
                           <a:latin typeface="Times New Roman"/>
                         </a:rPr>
-                        <a:t>Cr. 139.63</a:t>
+                        <a:t>Cr. 135.60</a:t>
                       </a:r>
                     </a:p>
                   </a:txBody>
@@ -21949,7 +21949,7 @@
                           </a:solidFill>
                           <a:latin typeface="Times New Roman"/>
                         </a:rPr>
-                        <a:t>1,686,250</a:t>
+                        <a:t>1,822,493</a:t>
                       </a:r>
                       <a:br/>
                       <a:r>
@@ -21959,7 +21959,7 @@
                           </a:solidFill>
                           <a:latin typeface="Times New Roman"/>
                         </a:rPr>
-                        <a:t>Cr. 168.62</a:t>
+                        <a:t>Cr. 182.25</a:t>
                       </a:r>
                     </a:p>
                   </a:txBody>
@@ -22002,7 +22002,7 @@
                           </a:solidFill>
                           <a:latin typeface="Times New Roman"/>
                         </a:rPr>
-                        <a:t>289,922</a:t>
+                        <a:t>466,531</a:t>
                       </a:r>
                       <a:br/>
                       <a:r>
@@ -22012,7 +22012,7 @@
                           </a:solidFill>
                           <a:latin typeface="Times New Roman"/>
                         </a:rPr>
-                        <a:t>Cr. 28.99</a:t>
+                        <a:t>Cr. 46.65</a:t>
                       </a:r>
                     </a:p>
                   </a:txBody>
@@ -22055,7 +22055,7 @@
                           </a:solidFill>
                           <a:latin typeface="Times New Roman"/>
                         </a:rPr>
-                        <a:t>121</a:t>
+                        <a:t>134</a:t>
                       </a:r>
                     </a:p>
                   </a:txBody>
@@ -22098,7 +22098,7 @@
                           </a:solidFill>
                           <a:latin typeface="Times New Roman"/>
                         </a:rPr>
-                        <a:t>1,568,060</a:t>
+                        <a:t>1,431,817</a:t>
                       </a:r>
                       <a:br/>
                       <a:r>
@@ -22108,7 +22108,7 @@
                           </a:solidFill>
                           <a:latin typeface="Times New Roman"/>
                         </a:rPr>
-                        <a:t>Cr. 156.81</a:t>
+                        <a:t>Cr. 143.18</a:t>
                       </a:r>
                     </a:p>
                   </a:txBody>
@@ -22151,7 +22151,7 @@
                           </a:solidFill>
                           <a:latin typeface="Times New Roman"/>
                         </a:rPr>
-                        <a:t>52</a:t>
+                        <a:t>56</a:t>
                       </a:r>
                     </a:p>
                   </a:txBody>
@@ -22345,7 +22345,7 @@
                           </a:solidFill>
                           <a:latin typeface="Times New Roman"/>
                         </a:rPr>
-                        <a:t>1,538,432</a:t>
+                        <a:t>1,959,732</a:t>
                       </a:r>
                       <a:br/>
                       <a:r>
@@ -22355,7 +22355,7 @@
                           </a:solidFill>
                           <a:latin typeface="Times New Roman"/>
                         </a:rPr>
-                        <a:t>Cr. 153.84</a:t>
+                        <a:t>Cr. 195.97</a:t>
                       </a:r>
                     </a:p>
                   </a:txBody>
@@ -22451,7 +22451,7 @@
                           </a:solidFill>
                           <a:latin typeface="Times New Roman"/>
                         </a:rPr>
-                        <a:t>764,774</a:t>
+                        <a:t>343,474</a:t>
                       </a:r>
                       <a:br/>
                       <a:r>
@@ -22461,7 +22461,7 @@
                           </a:solidFill>
                           <a:latin typeface="Times New Roman"/>
                         </a:rPr>
-                        <a:t>Cr. 76.48</a:t>
+                        <a:t>Cr. 34.35</a:t>
                       </a:r>
                     </a:p>
                   </a:txBody>
@@ -22504,7 +22504,7 @@
                           </a:solidFill>
                           <a:latin typeface="Times New Roman"/>
                         </a:rPr>
-                        <a:t>150</a:t>
+                        <a:t>118</a:t>
                       </a:r>
                     </a:p>
                   </a:txBody>
@@ -22794,7 +22794,7 @@
                           </a:solidFill>
                           <a:latin typeface="Times New Roman"/>
                         </a:rPr>
-                        <a:t>4,668,475</a:t>
+                        <a:t>5,439,620</a:t>
                       </a:r>
                       <a:br/>
                       <a:r>
@@ -22804,7 +22804,7 @@
                           </a:solidFill>
                           <a:latin typeface="Times New Roman"/>
                         </a:rPr>
-                        <a:t>Cr. 466.85</a:t>
+                        <a:t>Cr. 543.96</a:t>
                       </a:r>
                     </a:p>
                   </a:txBody>
@@ -22847,7 +22847,7 @@
                           </a:solidFill>
                           <a:latin typeface="Times New Roman"/>
                         </a:rPr>
-                        <a:t>6,205,155</a:t>
+                        <a:t>6,447,629</a:t>
                       </a:r>
                       <a:br/>
                       <a:r>
@@ -22857,7 +22857,7 @@
                           </a:solidFill>
                           <a:latin typeface="Times New Roman"/>
                         </a:rPr>
-                        <a:t>Cr. 620.52</a:t>
+                        <a:t>Cr. 644.76</a:t>
                       </a:r>
                     </a:p>
                   </a:txBody>
@@ -22900,7 +22900,7 @@
                           </a:solidFill>
                           <a:latin typeface="Times New Roman"/>
                         </a:rPr>
-                        <a:t>1,536,680</a:t>
+                        <a:t>1,008,009</a:t>
                       </a:r>
                       <a:br/>
                       <a:r>
@@ -22910,7 +22910,7 @@
                           </a:solidFill>
                           <a:latin typeface="Times New Roman"/>
                         </a:rPr>
-                        <a:t>Cr. 153.67</a:t>
+                        <a:t>Cr. 100.80</a:t>
                       </a:r>
                     </a:p>
                   </a:txBody>
@@ -22953,7 +22953,7 @@
                           </a:solidFill>
                           <a:latin typeface="Times New Roman"/>
                         </a:rPr>
-                        <a:t>133</a:t>
+                        <a:t>119</a:t>
                       </a:r>
                     </a:p>
                   </a:txBody>
@@ -22996,7 +22996,7 @@
                           </a:solidFill>
                           <a:latin typeface="Times New Roman"/>
                         </a:rPr>
-                        <a:t>6,849,934</a:t>
+                        <a:t>6,607,460</a:t>
                       </a:r>
                       <a:br/>
                       <a:r>
@@ -23006,7 +23006,7 @@
                           </a:solidFill>
                           <a:latin typeface="Times New Roman"/>
                         </a:rPr>
-                        <a:t>Cr. 684.99</a:t>
+                        <a:t>Cr. 660.75</a:t>
                       </a:r>
                     </a:p>
                   </a:txBody>
@@ -23049,7 +23049,7 @@
                           </a:solidFill>
                           <a:latin typeface="Times New Roman"/>
                         </a:rPr>
-                        <a:t>48</a:t>
+                        <a:t>49</a:t>
                       </a:r>
                     </a:p>
                   </a:txBody>

--- a/exports/Moradabad_Division_DRM_Budget_FR_Analysis_H_Full_FY_2025_26_Actual.pptx
+++ b/exports/Moradabad_Division_DRM_Budget_FR_Analysis_H_Full_FY_2025_26_Actual.pptx
@@ -6185,7 +6185,7 @@
                 </a:solidFill>
                 <a:latin typeface="Times New Roman"/>
               </a:rPr>
-              <a:t>Demand SMH Wise - AUG 2026 | uploaded 2026-09-01T12:16:24+05:30</a:t>
+              <a:t>Demand SMH Wise - AUG 2026 | uploaded 2026-09-01T16:12:23+05:30</a:t>
             </a:r>
           </a:p>
         </p:txBody>
@@ -13304,7 +13304,7 @@
                 </a:solidFill>
                 <a:latin typeface="Times New Roman"/>
               </a:rPr>
-              <a:t>PU Wise - Staff - AUG 2026 | uploaded 2026-09-01T12:16:24+05:30</a:t>
+              <a:t>PU Wise - Staff - AUG 2026 | uploaded 2026-09-01T16:12:23+05:30</a:t>
             </a:r>
           </a:p>
         </p:txBody>
@@ -19820,7 +19820,7 @@
                 </a:solidFill>
                 <a:latin typeface="Times New Roman"/>
               </a:rPr>
-              <a:t>PU Wise - Non-Staff Part 1 - AUG 2026 | uploaded 2026-09-01T12:16:24+05:30</a:t>
+              <a:t>PU Wise - Non-Staff Part 1 - AUG 2026 | uploaded 2026-09-01T16:12:23+05:30</a:t>
             </a:r>
           </a:p>
         </p:txBody>

--- a/exports/Moradabad_Division_DRM_Budget_FR_Analysis_H_Full_FY_2025_26_Actual.pptx
+++ b/exports/Moradabad_Division_DRM_Budget_FR_Analysis_H_Full_FY_2025_26_Actual.pptx
@@ -6185,7 +6185,7 @@
                 </a:solidFill>
                 <a:latin typeface="Times New Roman"/>
               </a:rPr>
-              <a:t>Demand SMH Wise - AUG 2026 | uploaded 2026-09-01T16:12:23+05:30</a:t>
+              <a:t>Demand SMH Wise - AUG 2026 | uploaded 2026-09-03T13:15:58+05:30</a:t>
             </a:r>
           </a:p>
         </p:txBody>
@@ -13304,7 +13304,7 @@
                 </a:solidFill>
                 <a:latin typeface="Times New Roman"/>
               </a:rPr>
-              <a:t>PU Wise - Staff - AUG 2026 | uploaded 2026-09-01T16:12:23+05:30</a:t>
+              <a:t>PU Wise - Staff - AUG 2026 | uploaded 2026-09-03T13:15:58+05:30</a:t>
             </a:r>
           </a:p>
         </p:txBody>
@@ -19820,7 +19820,7 @@
                 </a:solidFill>
                 <a:latin typeface="Times New Roman"/>
               </a:rPr>
-              <a:t>PU Wise - Non-Staff Part 1 - AUG 2026 | uploaded 2026-09-01T16:12:23+05:30</a:t>
+              <a:t>PU Wise - Non-Staff Part 1 - AUG 2026 | uploaded 2026-09-03T13:15:58+05:30</a:t>
             </a:r>
           </a:p>
         </p:txBody>

--- a/exports/Moradabad_Division_DRM_Budget_FR_Analysis_H_Full_FY_2025_26_Actual.pptx
+++ b/exports/Moradabad_Division_DRM_Budget_FR_Analysis_H_Full_FY_2025_26_Actual.pptx
@@ -5,13 +5,13 @@
     <p:sldMasterId id="2147483743" r:id="rId1"/>
   </p:sldMasterIdLst>
   <p:sldIdLst>
-    <p:sldId id="256" r:id="rId2"/>
-    <p:sldId id="257" r:id="rId3"/>
-    <p:sldId id="258" r:id="rId4"/>
-    <p:sldId id="259" r:id="rId5"/>
-    <p:sldId id="260" r:id="rId6"/>
-    <p:sldId id="261" r:id="rId7"/>
-    <p:sldId id="262" r:id="rId8"/>
+    <p:sldId id="256" r:id="rIdSlide1"/>
+    <p:sldId id="257" r:id="rIdSlide2"/>
+    <p:sldId id="258" r:id="rIdSlide3"/>
+    <p:sldId id="259" r:id="rIdSlide4"/>
+    <p:sldId id="260" r:id="rIdSlide5"/>
+    <p:sldId id="261" r:id="rIdSlide6"/>
+    <p:sldId id="262" r:id="rIdSlide7"/>
   </p:sldIdLst>
   <p:sldSz cx="12192000" cy="6858000"/>
   <p:notesSz cx="6858000" cy="9144000"/>
@@ -6185,7 +6185,7 @@
                 </a:solidFill>
                 <a:latin typeface="Times New Roman"/>
               </a:rPr>
-              <a:t>Demand SMH Wise - AUG 2026 | uploaded 2026-09-03T13:15:58+05:30</a:t>
+              <a:t>Demand SMH Wise - AUG 2026 | uploaded 2026-09-05T18:02:11+05:30</a:t>
             </a:r>
           </a:p>
         </p:txBody>
@@ -6251,10 +6251,10 @@
                 <a:gridCol w="1118625"/>
                 <a:gridCol w="1118625"/>
                 <a:gridCol w="1222201"/>
-                <a:gridCol w="745749"/>
+                <a:gridCol w="745750"/>
                 <a:gridCol w="1222201"/>
-                <a:gridCol w="745749"/>
-                <a:gridCol w="1118629"/>
+                <a:gridCol w="745750"/>
+                <a:gridCol w="1118627"/>
               </a:tblGrid>
               <a:tr h="432714">
                 <a:tc>
@@ -7054,7 +7054,7 @@
                           </a:solidFill>
                           <a:latin typeface="Times New Roman"/>
                         </a:rPr>
-                        <a:t>294,025</a:t>
+                        <a:t>294,135</a:t>
                       </a:r>
                       <a:br/>
                       <a:r>
@@ -7064,7 +7064,7 @@
                           </a:solidFill>
                           <a:latin typeface="Times New Roman"/>
                         </a:rPr>
-                        <a:t>Cr. 29.40</a:t>
+                        <a:t>Cr. 29.41</a:t>
                       </a:r>
                     </a:p>
                   </a:txBody>
@@ -7107,7 +7107,7 @@
                           </a:solidFill>
                           <a:latin typeface="Times New Roman"/>
                         </a:rPr>
-                        <a:t>26,724</a:t>
+                        <a:t>26,834</a:t>
                       </a:r>
                       <a:br/>
                       <a:r>
@@ -7117,7 +7117,7 @@
                           </a:solidFill>
                           <a:latin typeface="Times New Roman"/>
                         </a:rPr>
-                        <a:t>Cr. 2.67</a:t>
+                        <a:t>Cr. 2.68</a:t>
                       </a:r>
                     </a:p>
                   </a:txBody>
@@ -7203,7 +7203,7 @@
                           </a:solidFill>
                           <a:latin typeface="Times New Roman"/>
                         </a:rPr>
-                        <a:t>347,497</a:t>
+                        <a:t>347,387</a:t>
                       </a:r>
                       <a:br/>
                       <a:r>
@@ -7213,7 +7213,7 @@
                           </a:solidFill>
                           <a:latin typeface="Times New Roman"/>
                         </a:rPr>
-                        <a:t>Cr. 34.75</a:t>
+                        <a:t>Cr. 34.74</a:t>
                       </a:r>
                     </a:p>
                   </a:txBody>
@@ -7546,7 +7546,7 @@
                           </a:solidFill>
                           <a:latin typeface="Times New Roman"/>
                         </a:rPr>
-                        <a:t>1,779,391</a:t>
+                        <a:t>1,781,320</a:t>
                       </a:r>
                       <a:br/>
                       <a:r>
@@ -7556,7 +7556,7 @@
                           </a:solidFill>
                           <a:latin typeface="Times New Roman"/>
                         </a:rPr>
-                        <a:t>Cr. 177.94</a:t>
+                        <a:t>Cr. 178.13</a:t>
                       </a:r>
                     </a:p>
                   </a:txBody>
@@ -7599,7 +7599,7 @@
                           </a:solidFill>
                           <a:latin typeface="Times New Roman"/>
                         </a:rPr>
-                        <a:t>275,682</a:t>
+                        <a:t>277,611</a:t>
                       </a:r>
                       <a:br/>
                       <a:r>
@@ -7609,7 +7609,7 @@
                           </a:solidFill>
                           <a:latin typeface="Times New Roman"/>
                         </a:rPr>
-                        <a:t>Cr. 27.57</a:t>
+                        <a:t>Cr. 27.76</a:t>
                       </a:r>
                     </a:p>
                   </a:txBody>
@@ -7695,7 +7695,7 @@
                           </a:solidFill>
                           <a:latin typeface="Times New Roman"/>
                         </a:rPr>
-                        <a:t>1,829,511</a:t>
+                        <a:t>1,827,582</a:t>
                       </a:r>
                       <a:br/>
                       <a:r>
@@ -7705,7 +7705,7 @@
                           </a:solidFill>
                           <a:latin typeface="Times New Roman"/>
                         </a:rPr>
-                        <a:t>Cr. 182.95</a:t>
+                        <a:t>Cr. 182.76</a:t>
                       </a:r>
                     </a:p>
                   </a:txBody>
@@ -8530,7 +8530,7 @@
                           </a:solidFill>
                           <a:latin typeface="Times New Roman"/>
                         </a:rPr>
-                        <a:t>882,060</a:t>
+                        <a:t>911,131</a:t>
                       </a:r>
                       <a:br/>
                       <a:r>
@@ -8540,7 +8540,7 @@
                           </a:solidFill>
                           <a:latin typeface="Times New Roman"/>
                         </a:rPr>
-                        <a:t>Cr. 88.21</a:t>
+                        <a:t>Cr. 91.11</a:t>
                       </a:r>
                     </a:p>
                   </a:txBody>
@@ -8583,7 +8583,7 @@
                           </a:solidFill>
                           <a:latin typeface="Times New Roman"/>
                         </a:rPr>
-                        <a:t>318,068</a:t>
+                        <a:t>347,139</a:t>
                       </a:r>
                       <a:br/>
                       <a:r>
@@ -8593,7 +8593,7 @@
                           </a:solidFill>
                           <a:latin typeface="Times New Roman"/>
                         </a:rPr>
-                        <a:t>Cr. 31.81</a:t>
+                        <a:t>Cr. 34.71</a:t>
                       </a:r>
                     </a:p>
                   </a:txBody>
@@ -8636,7 +8636,7 @@
                           </a:solidFill>
                           <a:latin typeface="Times New Roman"/>
                         </a:rPr>
-                        <a:t>156</a:t>
+                        <a:t>162</a:t>
                       </a:r>
                     </a:p>
                   </a:txBody>
@@ -8679,7 +8679,7 @@
                           </a:solidFill>
                           <a:latin typeface="Times New Roman"/>
                         </a:rPr>
-                        <a:t>471,521</a:t>
+                        <a:t>442,450</a:t>
                       </a:r>
                       <a:br/>
                       <a:r>
@@ -8689,7 +8689,7 @@
                           </a:solidFill>
                           <a:latin typeface="Times New Roman"/>
                         </a:rPr>
-                        <a:t>Cr. 47.15</a:t>
+                        <a:t>Cr. 44.24</a:t>
                       </a:r>
                     </a:p>
                   </a:txBody>
@@ -8732,7 +8732,7 @@
                           </a:solidFill>
                           <a:latin typeface="Times New Roman"/>
                         </a:rPr>
-                        <a:t>65</a:t>
+                        <a:t>67</a:t>
                       </a:r>
                     </a:p>
                   </a:txBody>
@@ -9022,7 +9022,7 @@
                           </a:solidFill>
                           <a:latin typeface="Times New Roman"/>
                         </a:rPr>
-                        <a:t>987,240</a:t>
+                        <a:t>995,022</a:t>
                       </a:r>
                       <a:br/>
                       <a:r>
@@ -9032,7 +9032,7 @@
                           </a:solidFill>
                           <a:latin typeface="Times New Roman"/>
                         </a:rPr>
-                        <a:t>Cr. 98.72</a:t>
+                        <a:t>Cr. 99.50</a:t>
                       </a:r>
                     </a:p>
                   </a:txBody>
@@ -9075,7 +9075,7 @@
                           </a:solidFill>
                           <a:latin typeface="Times New Roman"/>
                         </a:rPr>
-                        <a:t>128,928</a:t>
+                        <a:t>136,710</a:t>
                       </a:r>
                       <a:br/>
                       <a:r>
@@ -9085,7 +9085,7 @@
                           </a:solidFill>
                           <a:latin typeface="Times New Roman"/>
                         </a:rPr>
-                        <a:t>Cr. 12.89</a:t>
+                        <a:t>Cr. 13.67</a:t>
                       </a:r>
                     </a:p>
                   </a:txBody>
@@ -9128,7 +9128,7 @@
                           </a:solidFill>
                           <a:latin typeface="Times New Roman"/>
                         </a:rPr>
-                        <a:t>115</a:t>
+                        <a:t>116</a:t>
                       </a:r>
                     </a:p>
                   </a:txBody>
@@ -9171,7 +9171,7 @@
                           </a:solidFill>
                           <a:latin typeface="Times New Roman"/>
                         </a:rPr>
-                        <a:t>1,072,710</a:t>
+                        <a:t>1,064,928</a:t>
                       </a:r>
                       <a:br/>
                       <a:r>
@@ -9181,7 +9181,7 @@
                           </a:solidFill>
                           <a:latin typeface="Times New Roman"/>
                         </a:rPr>
-                        <a:t>Cr. 107.27</a:t>
+                        <a:t>Cr. 106.49</a:t>
                       </a:r>
                     </a:p>
                   </a:txBody>
@@ -9514,7 +9514,7 @@
                           </a:solidFill>
                           <a:latin typeface="Times New Roman"/>
                         </a:rPr>
-                        <a:t>1,953,133</a:t>
+                        <a:t>1,978,638</a:t>
                       </a:r>
                       <a:br/>
                       <a:r>
@@ -9524,7 +9524,7 @@
                           </a:solidFill>
                           <a:latin typeface="Times New Roman"/>
                         </a:rPr>
-                        <a:t>Cr. 195.31</a:t>
+                        <a:t>Cr. 197.86</a:t>
                       </a:r>
                     </a:p>
                   </a:txBody>
@@ -9567,7 +9567,7 @@
                           </a:solidFill>
                           <a:latin typeface="Times New Roman"/>
                         </a:rPr>
-                        <a:t>556,231</a:t>
+                        <a:t>581,736</a:t>
                       </a:r>
                       <a:br/>
                       <a:r>
@@ -9577,7 +9577,7 @@
                           </a:solidFill>
                           <a:latin typeface="Times New Roman"/>
                         </a:rPr>
-                        <a:t>Cr. 55.62</a:t>
+                        <a:t>Cr. 58.17</a:t>
                       </a:r>
                     </a:p>
                   </a:txBody>
@@ -9620,7 +9620,7 @@
                           </a:solidFill>
                           <a:latin typeface="Times New Roman"/>
                         </a:rPr>
-                        <a:t>140</a:t>
+                        <a:t>142</a:t>
                       </a:r>
                     </a:p>
                   </a:txBody>
@@ -9663,7 +9663,7 @@
                           </a:solidFill>
                           <a:latin typeface="Times New Roman"/>
                         </a:rPr>
-                        <a:t>1,399,433</a:t>
+                        <a:t>1,373,928</a:t>
                       </a:r>
                       <a:br/>
                       <a:r>
@@ -9673,7 +9673,7 @@
                           </a:solidFill>
                           <a:latin typeface="Times New Roman"/>
                         </a:rPr>
-                        <a:t>Cr. 139.94</a:t>
+                        <a:t>Cr. 137.39</a:t>
                       </a:r>
                     </a:p>
                   </a:txBody>
@@ -9716,7 +9716,7 @@
                           </a:solidFill>
                           <a:latin typeface="Times New Roman"/>
                         </a:rPr>
-                        <a:t>58</a:t>
+                        <a:t>59</a:t>
                       </a:r>
                     </a:p>
                   </a:txBody>
@@ -10006,7 +10006,7 @@
                           </a:solidFill>
                           <a:latin typeface="Times New Roman"/>
                         </a:rPr>
-                        <a:t>2,193,589</a:t>
+                        <a:t>2,192,865</a:t>
                       </a:r>
                       <a:br/>
                       <a:r>
@@ -10016,7 +10016,7 @@
                           </a:solidFill>
                           <a:latin typeface="Times New Roman"/>
                         </a:rPr>
-                        <a:t>Cr. 219.36</a:t>
+                        <a:t>Cr. 219.29</a:t>
                       </a:r>
                     </a:p>
                   </a:txBody>
@@ -10059,7 +10059,7 @@
                           </a:solidFill>
                           <a:latin typeface="Times New Roman"/>
                         </a:rPr>
-                        <a:t>348,270</a:t>
+                        <a:t>347,546</a:t>
                       </a:r>
                       <a:br/>
                       <a:r>
@@ -10069,7 +10069,7 @@
                           </a:solidFill>
                           <a:latin typeface="Times New Roman"/>
                         </a:rPr>
-                        <a:t>Cr. 34.83</a:t>
+                        <a:t>Cr. 34.75</a:t>
                       </a:r>
                     </a:p>
                   </a:txBody>
@@ -10155,7 +10155,7 @@
                           </a:solidFill>
                           <a:latin typeface="Times New Roman"/>
                         </a:rPr>
-                        <a:t>2,235,177</a:t>
+                        <a:t>2,235,901</a:t>
                       </a:r>
                       <a:br/>
                       <a:r>
@@ -10165,7 +10165,7 @@
                           </a:solidFill>
                           <a:latin typeface="Times New Roman"/>
                         </a:rPr>
-                        <a:t>Cr. 223.52</a:t>
+                        <a:t>Cr. 223.59</a:t>
                       </a:r>
                     </a:p>
                   </a:txBody>
@@ -10498,7 +10498,7 @@
                           </a:solidFill>
                           <a:latin typeface="Times New Roman"/>
                         </a:rPr>
-                        <a:t>4,657,805</a:t>
+                        <a:t>5,702,475</a:t>
                       </a:r>
                       <a:br/>
                       <a:r>
@@ -10508,7 +10508,7 @@
                           </a:solidFill>
                           <a:latin typeface="Times New Roman"/>
                         </a:rPr>
-                        <a:t>Cr. 465.78</a:t>
+                        <a:t>Cr. 570.25</a:t>
                       </a:r>
                     </a:p>
                   </a:txBody>
@@ -10551,7 +10551,7 @@
                           </a:solidFill>
                           <a:latin typeface="Times New Roman"/>
                         </a:rPr>
-                        <a:t>-178,531</a:t>
+                        <a:t>866,139</a:t>
                       </a:r>
                       <a:br/>
                       <a:r>
@@ -10561,7 +10561,7 @@
                           </a:solidFill>
                           <a:latin typeface="Times New Roman"/>
                         </a:rPr>
-                        <a:t>Cr. -17.85</a:t>
+                        <a:t>Cr. 86.61</a:t>
                       </a:r>
                     </a:p>
                   </a:txBody>
@@ -10604,50 +10604,50 @@
                           </a:solidFill>
                           <a:latin typeface="Times New Roman"/>
                         </a:rPr>
-                        <a:t>96</a:t>
-                      </a:r>
-                    </a:p>
-                  </a:txBody>
-                  <a:tcPr marL="12000" marR="12000" marT="8000" marB="8000">
-                    <a:solidFill>
-                      <a:srgbClr val="FFF2CC"/>
-                    </a:solidFill>
-                    <a:lnL w="12700">
-                      <a:solidFill>
-                        <a:srgbClr val="000000"/>
-                      </a:solidFill>
-                    </a:lnL>
-                    <a:lnR w="12700">
-                      <a:solidFill>
-                        <a:srgbClr val="000000"/>
-                      </a:solidFill>
-                    </a:lnR>
-                    <a:lnT w="12700">
-                      <a:solidFill>
-                        <a:srgbClr val="000000"/>
-                      </a:solidFill>
-                    </a:lnT>
-                    <a:lnB w="12700">
-                      <a:solidFill>
-                        <a:srgbClr val="000000"/>
-                      </a:solidFill>
-                    </a:lnB>
-                  </a:tcPr>
-                </a:tc>
-                <a:tc>
-                  <a:txBody>
-                    <a:bodyPr wrap="square" anchor="ctr" lIns="18000" rIns="18000" tIns="10000" bIns="10000"/>
-                    <a:lstStyle/>
-                    <a:p>
-                      <a:pPr algn="ctr"/>
-                      <a:r>
-                        <a:rPr lang="en-US" sz="1000">
-                          <a:solidFill>
-                            <a:srgbClr val="000000"/>
-                          </a:solidFill>
-                          <a:latin typeface="Times New Roman"/>
-                        </a:rPr>
-                        <a:t>6,949,401</a:t>
+                        <a:t>118</a:t>
+                      </a:r>
+                    </a:p>
+                  </a:txBody>
+                  <a:tcPr marL="12000" marR="12000" marT="8000" marB="8000">
+                    <a:solidFill>
+                      <a:srgbClr val="FCE4E4"/>
+                    </a:solidFill>
+                    <a:lnL w="12700">
+                      <a:solidFill>
+                        <a:srgbClr val="000000"/>
+                      </a:solidFill>
+                    </a:lnL>
+                    <a:lnR w="12700">
+                      <a:solidFill>
+                        <a:srgbClr val="000000"/>
+                      </a:solidFill>
+                    </a:lnR>
+                    <a:lnT w="12700">
+                      <a:solidFill>
+                        <a:srgbClr val="000000"/>
+                      </a:solidFill>
+                    </a:lnT>
+                    <a:lnB w="12700">
+                      <a:solidFill>
+                        <a:srgbClr val="000000"/>
+                      </a:solidFill>
+                    </a:lnB>
+                  </a:tcPr>
+                </a:tc>
+                <a:tc>
+                  <a:txBody>
+                    <a:bodyPr wrap="square" anchor="ctr" lIns="18000" rIns="18000" tIns="10000" bIns="10000"/>
+                    <a:lstStyle/>
+                    <a:p>
+                      <a:pPr algn="ctr"/>
+                      <a:r>
+                        <a:rPr lang="en-US" sz="1000">
+                          <a:solidFill>
+                            <a:srgbClr val="000000"/>
+                          </a:solidFill>
+                          <a:latin typeface="Times New Roman"/>
+                        </a:rPr>
+                        <a:t>5,904,731</a:t>
                       </a:r>
                       <a:br/>
                       <a:r>
@@ -10657,7 +10657,7 @@
                           </a:solidFill>
                           <a:latin typeface="Times New Roman"/>
                         </a:rPr>
-                        <a:t>Cr. 694.94</a:t>
+                        <a:t>Cr. 590.47</a:t>
                       </a:r>
                     </a:p>
                   </a:txBody>
@@ -10700,7 +10700,7 @@
                           </a:solidFill>
                           <a:latin typeface="Times New Roman"/>
                         </a:rPr>
-                        <a:t>40</a:t>
+                        <a:t>49</a:t>
                       </a:r>
                     </a:p>
                   </a:txBody>
@@ -10990,7 +10990,7 @@
                           </a:solidFill>
                           <a:latin typeface="Times New Roman"/>
                         </a:rPr>
-                        <a:t>915,762</a:t>
+                        <a:t>916,954</a:t>
                       </a:r>
                       <a:br/>
                       <a:r>
@@ -11000,7 +11000,7 @@
                           </a:solidFill>
                           <a:latin typeface="Times New Roman"/>
                         </a:rPr>
-                        <a:t>Cr. 91.58</a:t>
+                        <a:t>Cr. 91.70</a:t>
                       </a:r>
                     </a:p>
                   </a:txBody>
@@ -11043,7 +11043,7 @@
                           </a:solidFill>
                           <a:latin typeface="Times New Roman"/>
                         </a:rPr>
-                        <a:t>335,415</a:t>
+                        <a:t>336,607</a:t>
                       </a:r>
                       <a:br/>
                       <a:r>
@@ -11053,7 +11053,7 @@
                           </a:solidFill>
                           <a:latin typeface="Times New Roman"/>
                         </a:rPr>
-                        <a:t>Cr. 33.54</a:t>
+                        <a:t>Cr. 33.66</a:t>
                       </a:r>
                     </a:p>
                   </a:txBody>
@@ -11139,7 +11139,7 @@
                           </a:solidFill>
                           <a:latin typeface="Times New Roman"/>
                         </a:rPr>
-                        <a:t>477,070</a:t>
+                        <a:t>475,878</a:t>
                       </a:r>
                       <a:br/>
                       <a:r>
@@ -11149,7 +11149,7 @@
                           </a:solidFill>
                           <a:latin typeface="Times New Roman"/>
                         </a:rPr>
-                        <a:t>Cr. 47.71</a:t>
+                        <a:t>Cr. 47.59</a:t>
                       </a:r>
                     </a:p>
                   </a:txBody>
@@ -11482,7 +11482,7 @@
                           </a:solidFill>
                           <a:latin typeface="Times New Roman"/>
                         </a:rPr>
-                        <a:t>439,544</a:t>
+                        <a:t>441,761</a:t>
                       </a:r>
                       <a:br/>
                       <a:r>
@@ -11492,7 +11492,7 @@
                           </a:solidFill>
                           <a:latin typeface="Times New Roman"/>
                         </a:rPr>
-                        <a:t>Cr. 43.95</a:t>
+                        <a:t>Cr. 44.18</a:t>
                       </a:r>
                     </a:p>
                   </a:txBody>
@@ -11535,7 +11535,7 @@
                           </a:solidFill>
                           <a:latin typeface="Times New Roman"/>
                         </a:rPr>
-                        <a:t>25,112</a:t>
+                        <a:t>27,328</a:t>
                       </a:r>
                       <a:br/>
                       <a:r>
@@ -11545,7 +11545,7 @@
                           </a:solidFill>
                           <a:latin typeface="Times New Roman"/>
                         </a:rPr>
-                        <a:t>Cr. 2.51</a:t>
+                        <a:t>Cr. 2.73</a:t>
                       </a:r>
                     </a:p>
                   </a:txBody>
@@ -11588,7 +11588,7 @@
                           </a:solidFill>
                           <a:latin typeface="Times New Roman"/>
                         </a:rPr>
-                        <a:t>106</a:t>
+                        <a:t>107</a:t>
                       </a:r>
                     </a:p>
                   </a:txBody>
@@ -11631,7 +11631,7 @@
                           </a:solidFill>
                           <a:latin typeface="Times New Roman"/>
                         </a:rPr>
-                        <a:t>555,094</a:t>
+                        <a:t>552,877</a:t>
                       </a:r>
                       <a:br/>
                       <a:r>
@@ -11641,7 +11641,7 @@
                           </a:solidFill>
                           <a:latin typeface="Times New Roman"/>
                         </a:rPr>
-                        <a:t>Cr. 55.51</a:t>
+                        <a:t>Cr. 55.29</a:t>
                       </a:r>
                     </a:p>
                   </a:txBody>
@@ -12413,7 +12413,7 @@
                           </a:solidFill>
                           <a:latin typeface="Times New Roman"/>
                         </a:rPr>
-                        <a:t>13,581,613</a:t>
+                        <a:t>13,581,614</a:t>
                       </a:r>
                       <a:br/>
                       <a:r>
@@ -12466,7 +12466,7 @@
                           </a:solidFill>
                           <a:latin typeface="Times New Roman"/>
                         </a:rPr>
-                        <a:t>15,417,243</a:t>
+                        <a:t>16,528,995</a:t>
                       </a:r>
                       <a:br/>
                       <a:r>
@@ -12476,7 +12476,7 @@
                           </a:solidFill>
                           <a:latin typeface="Times New Roman"/>
                         </a:rPr>
-                        <a:t>Cr. 1541.72</a:t>
+                        <a:t>Cr. 1652.90</a:t>
                       </a:r>
                     </a:p>
                   </a:txBody>
@@ -12519,7 +12519,7 @@
                           </a:solidFill>
                           <a:latin typeface="Times New Roman"/>
                         </a:rPr>
-                        <a:t>1,835,630</a:t>
+                        <a:t>2,947,381</a:t>
                       </a:r>
                       <a:br/>
                       <a:r>
@@ -12529,7 +12529,7 @@
                           </a:solidFill>
                           <a:latin typeface="Times New Roman"/>
                         </a:rPr>
-                        <a:t>Cr. 183.56</a:t>
+                        <a:t>Cr. 294.74</a:t>
                       </a:r>
                     </a:p>
                   </a:txBody>
@@ -12572,7 +12572,7 @@
                           </a:solidFill>
                           <a:latin typeface="Times New Roman"/>
                         </a:rPr>
-                        <a:t>114</a:t>
+                        <a:t>122</a:t>
                       </a:r>
                     </a:p>
                   </a:txBody>
@@ -12615,7 +12615,7 @@
                           </a:solidFill>
                           <a:latin typeface="Times New Roman"/>
                         </a:rPr>
-                        <a:t>17,178,630</a:t>
+                        <a:t>16,066,878</a:t>
                       </a:r>
                       <a:br/>
                       <a:r>
@@ -12625,7 +12625,7 @@
                           </a:solidFill>
                           <a:latin typeface="Times New Roman"/>
                         </a:rPr>
-                        <a:t>Cr. 1717.86</a:t>
+                        <a:t>Cr. 1606.69</a:t>
                       </a:r>
                     </a:p>
                   </a:txBody>
@@ -12668,7 +12668,7 @@
                           </a:solidFill>
                           <a:latin typeface="Times New Roman"/>
                         </a:rPr>
-                        <a:t>47</a:t>
+                        <a:t>51</a:t>
                       </a:r>
                     </a:p>
                   </a:txBody>
@@ -12958,7 +12958,7 @@
                           </a:solidFill>
                           <a:latin typeface="Times New Roman"/>
                         </a:rPr>
-                        <a:t>1,578,852</a:t>
+                        <a:t>1,578,052</a:t>
                       </a:r>
                       <a:br/>
                       <a:r>
@@ -12968,7 +12968,7 @@
                           </a:solidFill>
                           <a:latin typeface="Times New Roman"/>
                         </a:rPr>
-                        <a:t>Cr. 157.89</a:t>
+                        <a:t>Cr. 157.81</a:t>
                       </a:r>
                     </a:p>
                   </a:txBody>
@@ -13011,7 +13011,7 @@
                           </a:solidFill>
                           <a:latin typeface="Times New Roman"/>
                         </a:rPr>
-                        <a:t>1,584,287</a:t>
+                        <a:t>1,583,487</a:t>
                       </a:r>
                       <a:br/>
                       <a:r>
@@ -13021,7 +13021,7 @@
                           </a:solidFill>
                           <a:latin typeface="Times New Roman"/>
                         </a:rPr>
-                        <a:t>Cr. 158.43</a:t>
+                        <a:t>Cr. 158.35</a:t>
                       </a:r>
                     </a:p>
                   </a:txBody>
@@ -13064,7 +13064,7 @@
                           </a:solidFill>
                           <a:latin typeface="Times New Roman"/>
                         </a:rPr>
-                        <a:t>-29050</a:t>
+                        <a:t>-29033</a:t>
                       </a:r>
                     </a:p>
                   </a:txBody>
@@ -13107,7 +13107,7 @@
                           </a:solidFill>
                           <a:latin typeface="Times New Roman"/>
                         </a:rPr>
-                        <a:t>-1,591,897</a:t>
+                        <a:t>-1,591,097</a:t>
                       </a:r>
                       <a:br/>
                       <a:r>
@@ -13117,7 +13117,7 @@
                           </a:solidFill>
                           <a:latin typeface="Times New Roman"/>
                         </a:rPr>
-                        <a:t>Cr. -159.19</a:t>
+                        <a:t>Cr. -159.11</a:t>
                       </a:r>
                     </a:p>
                   </a:txBody>
@@ -13160,7 +13160,7 @@
                           </a:solidFill>
                           <a:latin typeface="Times New Roman"/>
                         </a:rPr>
-                        <a:t>-12103</a:t>
+                        <a:t>-12097</a:t>
                       </a:r>
                     </a:p>
                   </a:txBody>
@@ -13304,7 +13304,7 @@
                 </a:solidFill>
                 <a:latin typeface="Times New Roman"/>
               </a:rPr>
-              <a:t>PU Wise - Staff - AUG 2026 | uploaded 2026-09-03T13:15:58+05:30</a:t>
+              <a:t>PU Wise - Staff - AUG 2026 | uploaded 2026-09-05T18:02:11+05:30</a:t>
             </a:r>
           </a:p>
         </p:txBody>
@@ -14086,7 +14086,7 @@
                           </a:solidFill>
                           <a:latin typeface="Times New Roman"/>
                         </a:rPr>
-                        <a:t>3,073,272</a:t>
+                        <a:t>3,071,823</a:t>
                       </a:r>
                       <a:br/>
                       <a:r>
@@ -14096,7 +14096,7 @@
                           </a:solidFill>
                           <a:latin typeface="Times New Roman"/>
                         </a:rPr>
-                        <a:t>Cr. 307.33</a:t>
+                        <a:t>Cr. 307.18</a:t>
                       </a:r>
                     </a:p>
                   </a:txBody>
@@ -14139,7 +14139,7 @@
                           </a:solidFill>
                           <a:latin typeface="Times New Roman"/>
                         </a:rPr>
-                        <a:t>278,935</a:t>
+                        <a:t>277,486</a:t>
                       </a:r>
                       <a:br/>
                       <a:r>
@@ -14149,7 +14149,7 @@
                           </a:solidFill>
                           <a:latin typeface="Times New Roman"/>
                         </a:rPr>
-                        <a:t>Cr. 27.89</a:t>
+                        <a:t>Cr. 27.75</a:t>
                       </a:r>
                     </a:p>
                   </a:txBody>
@@ -14235,7 +14235,7 @@
                           </a:solidFill>
                           <a:latin typeface="Times New Roman"/>
                         </a:rPr>
-                        <a:t>3,633,137</a:t>
+                        <a:t>3,634,586</a:t>
                       </a:r>
                       <a:br/>
                       <a:r>
@@ -14245,7 +14245,7 @@
                           </a:solidFill>
                           <a:latin typeface="Times New Roman"/>
                         </a:rPr>
-                        <a:t>Cr. 363.31</a:t>
+                        <a:t>Cr. 363.46</a:t>
                       </a:r>
                     </a:p>
                   </a:txBody>
@@ -14535,7 +14535,7 @@
                           </a:solidFill>
                           <a:latin typeface="Times New Roman"/>
                         </a:rPr>
-                        <a:t>1,968,578</a:t>
+                        <a:t>1,966,618</a:t>
                       </a:r>
                       <a:br/>
                       <a:r>
@@ -14545,7 +14545,7 @@
                           </a:solidFill>
                           <a:latin typeface="Times New Roman"/>
                         </a:rPr>
-                        <a:t>Cr. 196.86</a:t>
+                        <a:t>Cr. 196.66</a:t>
                       </a:r>
                     </a:p>
                   </a:txBody>
@@ -14588,7 +14588,7 @@
                           </a:solidFill>
                           <a:latin typeface="Times New Roman"/>
                         </a:rPr>
-                        <a:t>260,056</a:t>
+                        <a:t>258,096</a:t>
                       </a:r>
                       <a:br/>
                       <a:r>
@@ -14598,7 +14598,7 @@
                           </a:solidFill>
                           <a:latin typeface="Times New Roman"/>
                         </a:rPr>
-                        <a:t>Cr. 26.01</a:t>
+                        <a:t>Cr. 25.81</a:t>
                       </a:r>
                     </a:p>
                   </a:txBody>
@@ -14684,7 +14684,7 @@
                           </a:solidFill>
                           <a:latin typeface="Times New Roman"/>
                         </a:rPr>
-                        <a:t>2,131,875</a:t>
+                        <a:t>2,133,835</a:t>
                       </a:r>
                       <a:br/>
                       <a:r>
@@ -14694,7 +14694,7 @@
                           </a:solidFill>
                           <a:latin typeface="Times New Roman"/>
                         </a:rPr>
-                        <a:t>Cr. 213.19</a:t>
+                        <a:t>Cr. 213.38</a:t>
                       </a:r>
                     </a:p>
                   </a:txBody>
@@ -14984,7 +14984,7 @@
                           </a:solidFill>
                           <a:latin typeface="Times New Roman"/>
                         </a:rPr>
-                        <a:t>81</a:t>
+                        <a:t>72</a:t>
                       </a:r>
                       <a:br/>
                       <a:r>
@@ -15037,7 +15037,7 @@
                           </a:solidFill>
                           <a:latin typeface="Times New Roman"/>
                         </a:rPr>
-                        <a:t>-118,706</a:t>
+                        <a:t>-118,715</a:t>
                       </a:r>
                       <a:br/>
                       <a:r>
@@ -15133,7 +15133,7 @@
                           </a:solidFill>
                           <a:latin typeface="Times New Roman"/>
                         </a:rPr>
-                        <a:t>285,008</a:t>
+                        <a:t>285,017</a:t>
                       </a:r>
                       <a:br/>
                       <a:r>
@@ -15433,7 +15433,7 @@
                           </a:solidFill>
                           <a:latin typeface="Times New Roman"/>
                         </a:rPr>
-                        <a:t>337,922</a:t>
+                        <a:t>337,362</a:t>
                       </a:r>
                       <a:br/>
                       <a:r>
@@ -15443,7 +15443,7 @@
                           </a:solidFill>
                           <a:latin typeface="Times New Roman"/>
                         </a:rPr>
-                        <a:t>Cr. 33.79</a:t>
+                        <a:t>Cr. 33.74</a:t>
                       </a:r>
                     </a:p>
                   </a:txBody>
@@ -15486,7 +15486,7 @@
                           </a:solidFill>
                           <a:latin typeface="Times New Roman"/>
                         </a:rPr>
-                        <a:t>14,506</a:t>
+                        <a:t>13,946</a:t>
                       </a:r>
                       <a:br/>
                       <a:r>
@@ -15496,7 +15496,7 @@
                           </a:solidFill>
                           <a:latin typeface="Times New Roman"/>
                         </a:rPr>
-                        <a:t>Cr. 1.45</a:t>
+                        <a:t>Cr. 1.39</a:t>
                       </a:r>
                     </a:p>
                   </a:txBody>
@@ -15582,7 +15582,7 @@
                           </a:solidFill>
                           <a:latin typeface="Times New Roman"/>
                         </a:rPr>
-                        <a:t>438,276</a:t>
+                        <a:t>438,836</a:t>
                       </a:r>
                       <a:br/>
                       <a:r>
@@ -15592,7 +15592,7 @@
                           </a:solidFill>
                           <a:latin typeface="Times New Roman"/>
                         </a:rPr>
-                        <a:t>Cr. 43.83</a:t>
+                        <a:t>Cr. 43.88</a:t>
                       </a:r>
                     </a:p>
                   </a:txBody>
@@ -15635,7 +15635,7 @@
                           </a:solidFill>
                           <a:latin typeface="Times New Roman"/>
                         </a:rPr>
-                        <a:t>44</a:t>
+                        <a:t>43</a:t>
                       </a:r>
                     </a:p>
                   </a:txBody>
@@ -15882,7 +15882,7 @@
                           </a:solidFill>
                           <a:latin typeface="Times New Roman"/>
                         </a:rPr>
-                        <a:t>216,618</a:t>
+                        <a:t>216,397</a:t>
                       </a:r>
                       <a:br/>
                       <a:r>
@@ -15892,7 +15892,7 @@
                           </a:solidFill>
                           <a:latin typeface="Times New Roman"/>
                         </a:rPr>
-                        <a:t>Cr. 21.66</a:t>
+                        <a:t>Cr. 21.64</a:t>
                       </a:r>
                     </a:p>
                   </a:txBody>
@@ -15935,7 +15935,7 @@
                           </a:solidFill>
                           <a:latin typeface="Times New Roman"/>
                         </a:rPr>
-                        <a:t>9,698</a:t>
+                        <a:t>9,477</a:t>
                       </a:r>
                       <a:br/>
                       <a:r>
@@ -15945,7 +15945,7 @@
                           </a:solidFill>
                           <a:latin typeface="Times New Roman"/>
                         </a:rPr>
-                        <a:t>Cr. 0.97</a:t>
+                        <a:t>Cr. 0.95</a:t>
                       </a:r>
                     </a:p>
                   </a:txBody>
@@ -16031,7 +16031,7 @@
                           </a:solidFill>
                           <a:latin typeface="Times New Roman"/>
                         </a:rPr>
-                        <a:t>279,991</a:t>
+                        <a:t>280,212</a:t>
                       </a:r>
                       <a:br/>
                       <a:r>
@@ -16041,7 +16041,7 @@
                           </a:solidFill>
                           <a:latin typeface="Times New Roman"/>
                         </a:rPr>
-                        <a:t>Cr. 28.00</a:t>
+                        <a:t>Cr. 28.02</a:t>
                       </a:r>
                     </a:p>
                   </a:txBody>
@@ -17229,7 +17229,7 @@
                           </a:solidFill>
                           <a:latin typeface="Times New Roman"/>
                         </a:rPr>
-                        <a:t>122,506</a:t>
+                        <a:t>122,492</a:t>
                       </a:r>
                       <a:br/>
                       <a:r>
@@ -17282,7 +17282,7 @@
                           </a:solidFill>
                           <a:latin typeface="Times New Roman"/>
                         </a:rPr>
-                        <a:t>35,042</a:t>
+                        <a:t>35,028</a:t>
                       </a:r>
                       <a:br/>
                       <a:r>
@@ -17378,7 +17378,7 @@
                           </a:solidFill>
                           <a:latin typeface="Times New Roman"/>
                         </a:rPr>
-                        <a:t>87,407</a:t>
+                        <a:t>87,421</a:t>
                       </a:r>
                       <a:br/>
                       <a:r>
@@ -17678,7 +17678,7 @@
                           </a:solidFill>
                           <a:latin typeface="Times New Roman"/>
                         </a:rPr>
-                        <a:t>279,175</a:t>
+                        <a:t>278,899</a:t>
                       </a:r>
                       <a:br/>
                       <a:r>
@@ -17688,7 +17688,7 @@
                           </a:solidFill>
                           <a:latin typeface="Times New Roman"/>
                         </a:rPr>
-                        <a:t>Cr. 27.92</a:t>
+                        <a:t>Cr. 27.89</a:t>
                       </a:r>
                     </a:p>
                   </a:txBody>
@@ -17731,7 +17731,7 @@
                           </a:solidFill>
                           <a:latin typeface="Times New Roman"/>
                         </a:rPr>
-                        <a:t>59,245</a:t>
+                        <a:t>58,969</a:t>
                       </a:r>
                       <a:br/>
                       <a:r>
@@ -17741,7 +17741,7 @@
                           </a:solidFill>
                           <a:latin typeface="Times New Roman"/>
                         </a:rPr>
-                        <a:t>Cr. 5.92</a:t>
+                        <a:t>Cr. 5.90</a:t>
                       </a:r>
                     </a:p>
                   </a:txBody>
@@ -17827,7 +17827,7 @@
                           </a:solidFill>
                           <a:latin typeface="Times New Roman"/>
                         </a:rPr>
-                        <a:t>248,657</a:t>
+                        <a:t>248,933</a:t>
                       </a:r>
                       <a:br/>
                       <a:r>
@@ -17837,7 +17837,7 @@
                           </a:solidFill>
                           <a:latin typeface="Times New Roman"/>
                         </a:rPr>
-                        <a:t>Cr. 24.87</a:t>
+                        <a:t>Cr. 24.89</a:t>
                       </a:r>
                     </a:p>
                   </a:txBody>
@@ -18576,7 +18576,7 @@
                           </a:solidFill>
                           <a:latin typeface="Times New Roman"/>
                         </a:rPr>
-                        <a:t>217,182</a:t>
+                        <a:t>217,100</a:t>
                       </a:r>
                       <a:br/>
                       <a:r>
@@ -18586,7 +18586,7 @@
                           </a:solidFill>
                           <a:latin typeface="Times New Roman"/>
                         </a:rPr>
-                        <a:t>Cr. 21.72</a:t>
+                        <a:t>Cr. 21.71</a:t>
                       </a:r>
                     </a:p>
                   </a:txBody>
@@ -18629,7 +18629,7 @@
                           </a:solidFill>
                           <a:latin typeface="Times New Roman"/>
                         </a:rPr>
-                        <a:t>88,815</a:t>
+                        <a:t>88,733</a:t>
                       </a:r>
                       <a:br/>
                       <a:r>
@@ -18639,7 +18639,7 @@
                           </a:solidFill>
                           <a:latin typeface="Times New Roman"/>
                         </a:rPr>
-                        <a:t>Cr. 8.88</a:t>
+                        <a:t>Cr. 8.87</a:t>
                       </a:r>
                     </a:p>
                   </a:txBody>
@@ -18725,7 +18725,7 @@
                           </a:solidFill>
                           <a:latin typeface="Times New Roman"/>
                         </a:rPr>
-                        <a:t>90,899</a:t>
+                        <a:t>90,981</a:t>
                       </a:r>
                       <a:br/>
                       <a:r>
@@ -18735,7 +18735,7 @@
                           </a:solidFill>
                           <a:latin typeface="Times New Roman"/>
                         </a:rPr>
-                        <a:t>Cr. 9.09</a:t>
+                        <a:t>Cr. 9.10</a:t>
                       </a:r>
                     </a:p>
                   </a:txBody>
@@ -19025,7 +19025,7 @@
                           </a:solidFill>
                           <a:latin typeface="Times New Roman"/>
                         </a:rPr>
-                        <a:t>374,892</a:t>
+                        <a:t>375,011</a:t>
                       </a:r>
                       <a:br/>
                       <a:r>
@@ -19035,7 +19035,7 @@
                           </a:solidFill>
                           <a:latin typeface="Times New Roman"/>
                         </a:rPr>
-                        <a:t>Cr. 37.49</a:t>
+                        <a:t>Cr. 37.50</a:t>
                       </a:r>
                     </a:p>
                   </a:txBody>
@@ -19078,7 +19078,7 @@
                           </a:solidFill>
                           <a:latin typeface="Times New Roman"/>
                         </a:rPr>
-                        <a:t>216,801</a:t>
+                        <a:t>216,920</a:t>
                       </a:r>
                       <a:br/>
                       <a:r>
@@ -19088,7 +19088,7 @@
                           </a:solidFill>
                           <a:latin typeface="Times New Roman"/>
                         </a:rPr>
-                        <a:t>Cr. 21.68</a:t>
+                        <a:t>Cr. 21.69</a:t>
                       </a:r>
                     </a:p>
                   </a:txBody>
@@ -19174,7 +19174,7 @@
                           </a:solidFill>
                           <a:latin typeface="Times New Roman"/>
                         </a:rPr>
-                        <a:t>4,526</a:t>
+                        <a:t>4,407</a:t>
                       </a:r>
                       <a:br/>
                       <a:r>
@@ -19184,7 +19184,7 @@
                           </a:solidFill>
                           <a:latin typeface="Times New Roman"/>
                         </a:rPr>
-                        <a:t>Cr. 0.45</a:t>
+                        <a:t>Cr. 0.44</a:t>
                       </a:r>
                     </a:p>
                   </a:txBody>
@@ -19421,7 +19421,7 @@
                           </a:solidFill>
                           <a:latin typeface="Times New Roman"/>
                         </a:rPr>
-                        <a:t>6,068,144</a:t>
+                        <a:t>6,068,145</a:t>
                       </a:r>
                       <a:br/>
                       <a:r>
@@ -19474,7 +19474,7 @@
                           </a:solidFill>
                           <a:latin typeface="Times New Roman"/>
                         </a:rPr>
-                        <a:t>7,025,593</a:t>
+                        <a:t>7,021,141</a:t>
                       </a:r>
                       <a:br/>
                       <a:r>
@@ -19484,7 +19484,7 @@
                           </a:solidFill>
                           <a:latin typeface="Times New Roman"/>
                         </a:rPr>
-                        <a:t>Cr. 702.56</a:t>
+                        <a:t>Cr. 702.11</a:t>
                       </a:r>
                     </a:p>
                   </a:txBody>
@@ -19527,7 +19527,7 @@
                           </a:solidFill>
                           <a:latin typeface="Times New Roman"/>
                         </a:rPr>
-                        <a:t>957,449</a:t>
+                        <a:t>952,996</a:t>
                       </a:r>
                       <a:br/>
                       <a:r>
@@ -19537,7 +19537,7 @@
                           </a:solidFill>
                           <a:latin typeface="Times New Roman"/>
                         </a:rPr>
-                        <a:t>Cr. 95.74</a:t>
+                        <a:t>Cr. 95.30</a:t>
                       </a:r>
                     </a:p>
                   </a:txBody>
@@ -19623,7 +19623,7 @@
                           </a:solidFill>
                           <a:latin typeface="Times New Roman"/>
                         </a:rPr>
-                        <a:t>7,537,954</a:t>
+                        <a:t>7,542,406</a:t>
                       </a:r>
                       <a:br/>
                       <a:r>
@@ -19633,7 +19633,7 @@
                           </a:solidFill>
                           <a:latin typeface="Times New Roman"/>
                         </a:rPr>
-                        <a:t>Cr. 753.80</a:t>
+                        <a:t>Cr. 754.24</a:t>
                       </a:r>
                     </a:p>
                   </a:txBody>
@@ -19820,7 +19820,7 @@
                 </a:solidFill>
                 <a:latin typeface="Times New Roman"/>
               </a:rPr>
-              <a:t>PU Wise - Non-Staff Part 1 - AUG 2026 | uploaded 2026-09-03T13:15:58+05:30</a:t>
+              <a:t>PU Wise - Non-Staff Part 1 - AUG 2026 | uploaded 2026-09-05T18:02:11+05:30</a:t>
             </a:r>
           </a:p>
         </p:txBody>
@@ -20602,7 +20602,7 @@
                           </a:solidFill>
                           <a:latin typeface="Times New Roman"/>
                         </a:rPr>
-                        <a:t>746,612</a:t>
+                        <a:t>860,139</a:t>
                       </a:r>
                       <a:br/>
                       <a:r>
@@ -20612,7 +20612,7 @@
                           </a:solidFill>
                           <a:latin typeface="Times New Roman"/>
                         </a:rPr>
-                        <a:t>Cr. 74.66</a:t>
+                        <a:t>Cr. 86.01</a:t>
                       </a:r>
                     </a:p>
                   </a:txBody>
@@ -20655,7 +20655,7 @@
                           </a:solidFill>
                           <a:latin typeface="Times New Roman"/>
                         </a:rPr>
-                        <a:t>301,299</a:t>
+                        <a:t>414,826</a:t>
                       </a:r>
                       <a:br/>
                       <a:r>
@@ -20665,7 +20665,7 @@
                           </a:solidFill>
                           <a:latin typeface="Times New Roman"/>
                         </a:rPr>
-                        <a:t>Cr. 30.13</a:t>
+                        <a:t>Cr. 41.48</a:t>
                       </a:r>
                     </a:p>
                   </a:txBody>
@@ -20708,7 +20708,7 @@
                           </a:solidFill>
                           <a:latin typeface="Times New Roman"/>
                         </a:rPr>
-                        <a:t>168</a:t>
+                        <a:t>193</a:t>
                       </a:r>
                     </a:p>
                   </a:txBody>
@@ -20751,7 +20751,7 @@
                           </a:solidFill>
                           <a:latin typeface="Times New Roman"/>
                         </a:rPr>
-                        <a:t>322,140</a:t>
+                        <a:t>208,613</a:t>
                       </a:r>
                       <a:br/>
                       <a:r>
@@ -20761,7 +20761,7 @@
                           </a:solidFill>
                           <a:latin typeface="Times New Roman"/>
                         </a:rPr>
-                        <a:t>Cr. 32.21</a:t>
+                        <a:t>Cr. 20.86</a:t>
                       </a:r>
                     </a:p>
                   </a:txBody>
@@ -20804,13 +20804,13 @@
                           </a:solidFill>
                           <a:latin typeface="Times New Roman"/>
                         </a:rPr>
-                        <a:t>70</a:t>
-                      </a:r>
-                    </a:p>
-                  </a:txBody>
-                  <a:tcPr marL="12000" marR="12000" marT="8000" marB="8000">
-                    <a:solidFill>
-                      <a:srgbClr val="DFF3E7"/>
+                        <a:t>80</a:t>
+                      </a:r>
+                    </a:p>
+                  </a:txBody>
+                  <a:tcPr marL="12000" marR="12000" marT="8000" marB="8000">
+                    <a:solidFill>
+                      <a:srgbClr val="FFF2CC"/>
                     </a:solidFill>
                     <a:lnL w="12700">
                       <a:solidFill>
@@ -21051,7 +21051,7 @@
                           </a:solidFill>
                           <a:latin typeface="Times New Roman"/>
                         </a:rPr>
-                        <a:t>70,596</a:t>
+                        <a:t>70,608</a:t>
                       </a:r>
                       <a:br/>
                       <a:r>
@@ -21104,7 +21104,7 @@
                           </a:solidFill>
                           <a:latin typeface="Times New Roman"/>
                         </a:rPr>
-                        <a:t>8,118</a:t>
+                        <a:t>8,130</a:t>
                       </a:r>
                       <a:br/>
                       <a:r>
@@ -21200,7 +21200,7 @@
                           </a:solidFill>
                           <a:latin typeface="Times New Roman"/>
                         </a:rPr>
-                        <a:t>79,351</a:t>
+                        <a:t>79,339</a:t>
                       </a:r>
                       <a:br/>
                       <a:r>
@@ -21210,7 +21210,7 @@
                           </a:solidFill>
                           <a:latin typeface="Times New Roman"/>
                         </a:rPr>
-                        <a:t>Cr. 7.94</a:t>
+                        <a:t>Cr. 7.93</a:t>
                       </a:r>
                     </a:p>
                   </a:txBody>
@@ -21500,7 +21500,7 @@
                           </a:solidFill>
                           <a:latin typeface="Times New Roman"/>
                         </a:rPr>
-                        <a:t>1,504,722</a:t>
+                        <a:t>1,916,509</a:t>
                       </a:r>
                       <a:br/>
                       <a:r>
@@ -21510,7 +21510,7 @@
                           </a:solidFill>
                           <a:latin typeface="Times New Roman"/>
                         </a:rPr>
-                        <a:t>Cr. 150.47</a:t>
+                        <a:t>Cr. 191.65</a:t>
                       </a:r>
                     </a:p>
                   </a:txBody>
@@ -21553,7 +21553,7 @@
                           </a:solidFill>
                           <a:latin typeface="Times New Roman"/>
                         </a:rPr>
-                        <a:t>-111,413</a:t>
+                        <a:t>300,374</a:t>
                       </a:r>
                       <a:br/>
                       <a:r>
@@ -21563,7 +21563,7 @@
                           </a:solidFill>
                           <a:latin typeface="Times New Roman"/>
                         </a:rPr>
-                        <a:t>Cr. -11.14</a:t>
+                        <a:t>Cr. 30.04</a:t>
                       </a:r>
                     </a:p>
                   </a:txBody>
@@ -21606,50 +21606,50 @@
                           </a:solidFill>
                           <a:latin typeface="Times New Roman"/>
                         </a:rPr>
-                        <a:t>93</a:t>
-                      </a:r>
-                    </a:p>
-                  </a:txBody>
-                  <a:tcPr marL="12000" marR="12000" marT="8000" marB="8000">
-                    <a:solidFill>
-                      <a:srgbClr val="FFF2CC"/>
-                    </a:solidFill>
-                    <a:lnL w="12700">
-                      <a:solidFill>
-                        <a:srgbClr val="000000"/>
-                      </a:solidFill>
-                    </a:lnL>
-                    <a:lnR w="12700">
-                      <a:solidFill>
-                        <a:srgbClr val="000000"/>
-                      </a:solidFill>
-                    </a:lnR>
-                    <a:lnT w="12700">
-                      <a:solidFill>
-                        <a:srgbClr val="000000"/>
-                      </a:solidFill>
-                    </a:lnT>
-                    <a:lnB w="12700">
-                      <a:solidFill>
-                        <a:srgbClr val="000000"/>
-                      </a:solidFill>
-                    </a:lnB>
-                  </a:tcPr>
-                </a:tc>
-                <a:tc>
-                  <a:txBody>
-                    <a:bodyPr wrap="square" anchor="ctr" lIns="18000" rIns="18000" tIns="10000" bIns="10000"/>
-                    <a:lstStyle/>
-                    <a:p>
-                      <a:pPr algn="ctr"/>
-                      <a:r>
-                        <a:rPr lang="en-US" sz="1000">
-                          <a:solidFill>
-                            <a:srgbClr val="000000"/>
-                          </a:solidFill>
-                          <a:latin typeface="Times New Roman"/>
-                        </a:rPr>
-                        <a:t>2,374,002</a:t>
+                        <a:t>119</a:t>
+                      </a:r>
+                    </a:p>
+                  </a:txBody>
+                  <a:tcPr marL="12000" marR="12000" marT="8000" marB="8000">
+                    <a:solidFill>
+                      <a:srgbClr val="FCE4E4"/>
+                    </a:solidFill>
+                    <a:lnL w="12700">
+                      <a:solidFill>
+                        <a:srgbClr val="000000"/>
+                      </a:solidFill>
+                    </a:lnL>
+                    <a:lnR w="12700">
+                      <a:solidFill>
+                        <a:srgbClr val="000000"/>
+                      </a:solidFill>
+                    </a:lnR>
+                    <a:lnT w="12700">
+                      <a:solidFill>
+                        <a:srgbClr val="000000"/>
+                      </a:solidFill>
+                    </a:lnT>
+                    <a:lnB w="12700">
+                      <a:solidFill>
+                        <a:srgbClr val="000000"/>
+                      </a:solidFill>
+                    </a:lnB>
+                  </a:tcPr>
+                </a:tc>
+                <a:tc>
+                  <a:txBody>
+                    <a:bodyPr wrap="square" anchor="ctr" lIns="18000" rIns="18000" tIns="10000" bIns="10000"/>
+                    <a:lstStyle/>
+                    <a:p>
+                      <a:pPr algn="ctr"/>
+                      <a:r>
+                        <a:rPr lang="en-US" sz="1000">
+                          <a:solidFill>
+                            <a:srgbClr val="000000"/>
+                          </a:solidFill>
+                          <a:latin typeface="Times New Roman"/>
+                        </a:rPr>
+                        <a:t>1,962,215</a:t>
                       </a:r>
                       <a:br/>
                       <a:r>
@@ -21659,7 +21659,7 @@
                           </a:solidFill>
                           <a:latin typeface="Times New Roman"/>
                         </a:rPr>
-                        <a:t>Cr. 237.40</a:t>
+                        <a:t>Cr. 196.22</a:t>
                       </a:r>
                     </a:p>
                   </a:txBody>
@@ -21702,7 +21702,7 @@
                           </a:solidFill>
                           <a:latin typeface="Times New Roman"/>
                         </a:rPr>
-                        <a:t>39</a:t>
+                        <a:t>49</a:t>
                       </a:r>
                     </a:p>
                   </a:txBody>
@@ -21949,7 +21949,7 @@
                           </a:solidFill>
                           <a:latin typeface="Times New Roman"/>
                         </a:rPr>
-                        <a:t>1,822,493</a:t>
+                        <a:t>1,824,117</a:t>
                       </a:r>
                       <a:br/>
                       <a:r>
@@ -21959,7 +21959,7 @@
                           </a:solidFill>
                           <a:latin typeface="Times New Roman"/>
                         </a:rPr>
-                        <a:t>Cr. 182.25</a:t>
+                        <a:t>Cr. 182.41</a:t>
                       </a:r>
                     </a:p>
                   </a:txBody>
@@ -22002,7 +22002,7 @@
                           </a:solidFill>
                           <a:latin typeface="Times New Roman"/>
                         </a:rPr>
-                        <a:t>466,531</a:t>
+                        <a:t>468,154</a:t>
                       </a:r>
                       <a:br/>
                       <a:r>
@@ -22012,7 +22012,7 @@
                           </a:solidFill>
                           <a:latin typeface="Times New Roman"/>
                         </a:rPr>
-                        <a:t>Cr. 46.65</a:t>
+                        <a:t>Cr. 46.82</a:t>
                       </a:r>
                     </a:p>
                   </a:txBody>
@@ -22055,7 +22055,7 @@
                           </a:solidFill>
                           <a:latin typeface="Times New Roman"/>
                         </a:rPr>
-                        <a:t>134</a:t>
+                        <a:t>135</a:t>
                       </a:r>
                     </a:p>
                   </a:txBody>
@@ -22098,7 +22098,7 @@
                           </a:solidFill>
                           <a:latin typeface="Times New Roman"/>
                         </a:rPr>
-                        <a:t>1,431,817</a:t>
+                        <a:t>1,430,193</a:t>
                       </a:r>
                       <a:br/>
                       <a:r>
@@ -22108,7 +22108,7 @@
                           </a:solidFill>
                           <a:latin typeface="Times New Roman"/>
                         </a:rPr>
-                        <a:t>Cr. 143.18</a:t>
+                        <a:t>Cr. 143.02</a:t>
                       </a:r>
                     </a:p>
                   </a:txBody>
@@ -22398,7 +22398,7 @@
                           </a:solidFill>
                           <a:latin typeface="Times New Roman"/>
                         </a:rPr>
-                        <a:t>2,303,206</a:t>
+                        <a:t>2,715,415</a:t>
                       </a:r>
                       <a:br/>
                       <a:r>
@@ -22408,7 +22408,7 @@
                           </a:solidFill>
                           <a:latin typeface="Times New Roman"/>
                         </a:rPr>
-                        <a:t>Cr. 230.32</a:t>
+                        <a:t>Cr. 271.54</a:t>
                       </a:r>
                     </a:p>
                   </a:txBody>
@@ -22451,7 +22451,7 @@
                           </a:solidFill>
                           <a:latin typeface="Times New Roman"/>
                         </a:rPr>
-                        <a:t>343,474</a:t>
+                        <a:t>755,683</a:t>
                       </a:r>
                       <a:br/>
                       <a:r>
@@ -22461,7 +22461,7 @@
                           </a:solidFill>
                           <a:latin typeface="Times New Roman"/>
                         </a:rPr>
-                        <a:t>Cr. 34.35</a:t>
+                        <a:t>Cr. 75.57</a:t>
                       </a:r>
                     </a:p>
                   </a:txBody>
@@ -22504,7 +22504,7 @@
                           </a:solidFill>
                           <a:latin typeface="Times New Roman"/>
                         </a:rPr>
-                        <a:t>118</a:t>
+                        <a:t>139</a:t>
                       </a:r>
                     </a:p>
                   </a:txBody>
@@ -22547,7 +22547,7 @@
                           </a:solidFill>
                           <a:latin typeface="Times New Roman"/>
                         </a:rPr>
-                        <a:t>2,400,150</a:t>
+                        <a:t>1,987,941</a:t>
                       </a:r>
                       <a:br/>
                       <a:r>
@@ -22557,7 +22557,7 @@
                           </a:solidFill>
                           <a:latin typeface="Times New Roman"/>
                         </a:rPr>
-                        <a:t>Cr. 240.01</a:t>
+                        <a:t>Cr. 198.79</a:t>
                       </a:r>
                     </a:p>
                   </a:txBody>
@@ -22600,7 +22600,7 @@
                           </a:solidFill>
                           <a:latin typeface="Times New Roman"/>
                         </a:rPr>
-                        <a:t>49</a:t>
+                        <a:t>58</a:t>
                       </a:r>
                     </a:p>
                   </a:txBody>
@@ -22847,7 +22847,7 @@
                           </a:solidFill>
                           <a:latin typeface="Times New Roman"/>
                         </a:rPr>
-                        <a:t>6,447,629</a:t>
+                        <a:t>7,386,788</a:t>
                       </a:r>
                       <a:br/>
                       <a:r>
@@ -22857,7 +22857,7 @@
                           </a:solidFill>
                           <a:latin typeface="Times New Roman"/>
                         </a:rPr>
-                        <a:t>Cr. 644.76</a:t>
+                        <a:t>Cr. 738.68</a:t>
                       </a:r>
                     </a:p>
                   </a:txBody>
@@ -22900,7 +22900,7 @@
                           </a:solidFill>
                           <a:latin typeface="Times New Roman"/>
                         </a:rPr>
-                        <a:t>1,008,009</a:t>
+                        <a:t>1,947,168</a:t>
                       </a:r>
                       <a:br/>
                       <a:r>
@@ -22910,7 +22910,7 @@
                           </a:solidFill>
                           <a:latin typeface="Times New Roman"/>
                         </a:rPr>
-                        <a:t>Cr. 100.80</a:t>
+                        <a:t>Cr. 194.72</a:t>
                       </a:r>
                     </a:p>
                   </a:txBody>
@@ -22953,7 +22953,7 @@
                           </a:solidFill>
                           <a:latin typeface="Times New Roman"/>
                         </a:rPr>
-                        <a:t>119</a:t>
+                        <a:t>136</a:t>
                       </a:r>
                     </a:p>
                   </a:txBody>
@@ -22996,7 +22996,7 @@
                           </a:solidFill>
                           <a:latin typeface="Times New Roman"/>
                         </a:rPr>
-                        <a:t>6,607,460</a:t>
+                        <a:t>5,668,301</a:t>
                       </a:r>
                       <a:br/>
                       <a:r>
@@ -23006,7 +23006,7 @@
                           </a:solidFill>
                           <a:latin typeface="Times New Roman"/>
                         </a:rPr>
-                        <a:t>Cr. 660.75</a:t>
+                        <a:t>Cr. 566.83</a:t>
                       </a:r>
                     </a:p>
                   </a:txBody>
@@ -23049,7 +23049,7 @@
                           </a:solidFill>
                           <a:latin typeface="Times New Roman"/>
                         </a:rPr>
-                        <a:t>49</a:t>
+                        <a:t>57</a:t>
                       </a:r>
                     </a:p>
                   </a:txBody>
@@ -23193,7 +23193,7 @@
                 </a:solidFill>
                 <a:latin typeface="Times New Roman"/>
               </a:rPr>
-              <a:t>Open Line FR Report - As On 27.08.2026 (Rows 1-13)</a:t>
+              <a:t>Open Line FR Report - As On 05.09.2026 (Rows 1-13)</a:t>
             </a:r>
           </a:p>
         </p:txBody>
@@ -23737,7 +23737,7 @@
                           </a:solidFill>
                           <a:latin typeface="Times New Roman"/>
                         </a:rPr>
-                        <a:t>77,175</a:t>
+                        <a:t>77,992</a:t>
                       </a:r>
                       <a:br/>
                       <a:r>
@@ -23747,7 +23747,7 @@
                           </a:solidFill>
                           <a:latin typeface="Times New Roman"/>
                         </a:rPr>
-                        <a:t>Cr. 7.72</a:t>
+                        <a:t>Cr. 7.80</a:t>
                       </a:r>
                     </a:p>
                   </a:txBody>
@@ -23790,7 +23790,7 @@
                           </a:solidFill>
                           <a:latin typeface="Times New Roman"/>
                         </a:rPr>
-                        <a:t>-83,728</a:t>
+                        <a:t>-82,911</a:t>
                       </a:r>
                       <a:br/>
                       <a:r>
@@ -23800,7 +23800,7 @@
                           </a:solidFill>
                           <a:latin typeface="Times New Roman"/>
                         </a:rPr>
-                        <a:t>Cr. -8.37</a:t>
+                        <a:t>Cr. -8.29</a:t>
                       </a:r>
                     </a:p>
                   </a:txBody>
@@ -23843,7 +23843,7 @@
                           </a:solidFill>
                           <a:latin typeface="Times New Roman"/>
                         </a:rPr>
-                        <a:t>47.96</a:t>
+                        <a:t>48.47</a:t>
                       </a:r>
                     </a:p>
                   </a:txBody>
@@ -24070,7 +24070,7 @@
                           </a:solidFill>
                           <a:latin typeface="Times New Roman"/>
                         </a:rPr>
-                        <a:t>10,761</a:t>
+                        <a:t>11,801</a:t>
                       </a:r>
                       <a:br/>
                       <a:r>
@@ -24080,7 +24080,7 @@
                           </a:solidFill>
                           <a:latin typeface="Times New Roman"/>
                         </a:rPr>
-                        <a:t>Cr. 1.08</a:t>
+                        <a:t>Cr. 1.18</a:t>
                       </a:r>
                     </a:p>
                   </a:txBody>
@@ -24123,7 +24123,7 @@
                           </a:solidFill>
                           <a:latin typeface="Times New Roman"/>
                         </a:rPr>
-                        <a:t>-21,466</a:t>
+                        <a:t>-20,426</a:t>
                       </a:r>
                       <a:br/>
                       <a:r>
@@ -24133,7 +24133,7 @@
                           </a:solidFill>
                           <a:latin typeface="Times New Roman"/>
                         </a:rPr>
-                        <a:t>Cr. -2.15</a:t>
+                        <a:t>Cr. -2.04</a:t>
                       </a:r>
                     </a:p>
                   </a:txBody>
@@ -24176,7 +24176,7 @@
                           </a:solidFill>
                           <a:latin typeface="Times New Roman"/>
                         </a:rPr>
-                        <a:t>33.39</a:t>
+                        <a:t>36.62</a:t>
                       </a:r>
                     </a:p>
                   </a:txBody>
@@ -24403,7 +24403,7 @@
                           </a:solidFill>
                           <a:latin typeface="Times New Roman"/>
                         </a:rPr>
-                        <a:t>57,023</a:t>
+                        <a:t>57,289</a:t>
                       </a:r>
                       <a:br/>
                       <a:r>
@@ -24413,7 +24413,7 @@
                           </a:solidFill>
                           <a:latin typeface="Times New Roman"/>
                         </a:rPr>
-                        <a:t>Cr. 5.70</a:t>
+                        <a:t>Cr. 5.73</a:t>
                       </a:r>
                     </a:p>
                   </a:txBody>
@@ -24456,7 +24456,7 @@
                           </a:solidFill>
                           <a:latin typeface="Times New Roman"/>
                         </a:rPr>
-                        <a:t>-63,295</a:t>
+                        <a:t>-63,029</a:t>
                       </a:r>
                       <a:br/>
                       <a:r>
@@ -24466,7 +24466,7 @@
                           </a:solidFill>
                           <a:latin typeface="Times New Roman"/>
                         </a:rPr>
-                        <a:t>Cr. -6.33</a:t>
+                        <a:t>Cr. -6.30</a:t>
                       </a:r>
                     </a:p>
                   </a:txBody>
@@ -24509,7 +24509,7 @@
                           </a:solidFill>
                           <a:latin typeface="Times New Roman"/>
                         </a:rPr>
-                        <a:t>47.39</a:t>
+                        <a:t>47.61</a:t>
                       </a:r>
                     </a:p>
                   </a:txBody>
@@ -24736,7 +24736,7 @@
                           </a:solidFill>
                           <a:latin typeface="Times New Roman"/>
                         </a:rPr>
-                        <a:t>337,625</a:t>
+                        <a:t>363,937</a:t>
                       </a:r>
                       <a:br/>
                       <a:r>
@@ -24746,7 +24746,7 @@
                           </a:solidFill>
                           <a:latin typeface="Times New Roman"/>
                         </a:rPr>
-                        <a:t>Cr. 33.76</a:t>
+                        <a:t>Cr. 36.39</a:t>
                       </a:r>
                     </a:p>
                   </a:txBody>
@@ -24789,7 +24789,7 @@
                           </a:solidFill>
                           <a:latin typeface="Times New Roman"/>
                         </a:rPr>
-                        <a:t>-169,795</a:t>
+                        <a:t>-143,483</a:t>
                       </a:r>
                       <a:br/>
                       <a:r>
@@ -24799,7 +24799,7 @@
                           </a:solidFill>
                           <a:latin typeface="Times New Roman"/>
                         </a:rPr>
-                        <a:t>Cr. -16.98</a:t>
+                        <a:t>Cr. -14.35</a:t>
                       </a:r>
                     </a:p>
                   </a:txBody>
@@ -24842,7 +24842,7 @@
                           </a:solidFill>
                           <a:latin typeface="Times New Roman"/>
                         </a:rPr>
-                        <a:t>66.54</a:t>
+                        <a:t>71.72</a:t>
                       </a:r>
                     </a:p>
                   </a:txBody>
@@ -25069,7 +25069,7 @@
                           </a:solidFill>
                           <a:latin typeface="Times New Roman"/>
                         </a:rPr>
-                        <a:t>3,110,796</a:t>
+                        <a:t>3,692,699</a:t>
                       </a:r>
                       <a:br/>
                       <a:r>
@@ -25079,7 +25079,7 @@
                           </a:solidFill>
                           <a:latin typeface="Times New Roman"/>
                         </a:rPr>
-                        <a:t>Cr. 311.08</a:t>
+                        <a:t>Cr. 369.27</a:t>
                       </a:r>
                     </a:p>
                   </a:txBody>
@@ -25122,7 +25122,7 @@
                           </a:solidFill>
                           <a:latin typeface="Times New Roman"/>
                         </a:rPr>
-                        <a:t>148,001</a:t>
+                        <a:t>729,904</a:t>
                       </a:r>
                       <a:br/>
                       <a:r>
@@ -25132,7 +25132,7 @@
                           </a:solidFill>
                           <a:latin typeface="Times New Roman"/>
                         </a:rPr>
-                        <a:t>Cr. 14.80</a:t>
+                        <a:t>Cr. 72.99</a:t>
                       </a:r>
                     </a:p>
                   </a:txBody>
@@ -25175,7 +25175,7 @@
                           </a:solidFill>
                           <a:latin typeface="Times New Roman"/>
                         </a:rPr>
-                        <a:t>105.00</a:t>
+                        <a:t>124.64</a:t>
                       </a:r>
                     </a:p>
                   </a:txBody>
@@ -25402,7 +25402,7 @@
                           </a:solidFill>
                           <a:latin typeface="Times New Roman"/>
                         </a:rPr>
-                        <a:t>150,620</a:t>
+                        <a:t>151,197</a:t>
                       </a:r>
                       <a:br/>
                       <a:r>
@@ -25412,7 +25412,7 @@
                           </a:solidFill>
                           <a:latin typeface="Times New Roman"/>
                         </a:rPr>
-                        <a:t>Cr. 15.06</a:t>
+                        <a:t>Cr. 15.12</a:t>
                       </a:r>
                     </a:p>
                   </a:txBody>
@@ -25455,7 +25455,7 @@
                           </a:solidFill>
                           <a:latin typeface="Times New Roman"/>
                         </a:rPr>
-                        <a:t>18,353</a:t>
+                        <a:t>18,930</a:t>
                       </a:r>
                       <a:br/>
                       <a:r>
@@ -25465,7 +25465,7 @@
                           </a:solidFill>
                           <a:latin typeface="Times New Roman"/>
                         </a:rPr>
-                        <a:t>Cr. 1.84</a:t>
+                        <a:t>Cr. 1.89</a:t>
                       </a:r>
                     </a:p>
                   </a:txBody>
@@ -25508,7 +25508,7 @@
                           </a:solidFill>
                           <a:latin typeface="Times New Roman"/>
                         </a:rPr>
-                        <a:t>113.88</a:t>
+                        <a:t>114.31</a:t>
                       </a:r>
                     </a:p>
                   </a:txBody>
@@ -25735,7 +25735,7 @@
                           </a:solidFill>
                           <a:latin typeface="Times New Roman"/>
                         </a:rPr>
-                        <a:t>120,775</a:t>
+                        <a:t>123,038</a:t>
                       </a:r>
                       <a:br/>
                       <a:r>
@@ -25745,7 +25745,7 @@
                           </a:solidFill>
                           <a:latin typeface="Times New Roman"/>
                         </a:rPr>
-                        <a:t>Cr. 12.08</a:t>
+                        <a:t>Cr. 12.30</a:t>
                       </a:r>
                     </a:p>
                   </a:txBody>
@@ -25788,7 +25788,7 @@
                           </a:solidFill>
                           <a:latin typeface="Times New Roman"/>
                         </a:rPr>
-                        <a:t>-402,068</a:t>
+                        <a:t>-399,805</a:t>
                       </a:r>
                       <a:br/>
                       <a:r>
@@ -25798,7 +25798,7 @@
                           </a:solidFill>
                           <a:latin typeface="Times New Roman"/>
                         </a:rPr>
-                        <a:t>Cr. -40.21</a:t>
+                        <a:t>Cr. -39.98</a:t>
                       </a:r>
                     </a:p>
                   </a:txBody>
@@ -25841,7 +25841,7 @@
                           </a:solidFill>
                           <a:latin typeface="Times New Roman"/>
                         </a:rPr>
-                        <a:t>23.10</a:t>
+                        <a:t>23.53</a:t>
                       </a:r>
                     </a:p>
                   </a:txBody>
@@ -26068,7 +26068,7 @@
                           </a:solidFill>
                           <a:latin typeface="Times New Roman"/>
                         </a:rPr>
-                        <a:t>94,918</a:t>
+                        <a:t>94,924</a:t>
                       </a:r>
                       <a:br/>
                       <a:r>
@@ -26121,7 +26121,7 @@
                           </a:solidFill>
                           <a:latin typeface="Times New Roman"/>
                         </a:rPr>
-                        <a:t>-212,925</a:t>
+                        <a:t>-212,919</a:t>
                       </a:r>
                       <a:br/>
                       <a:r>
@@ -26174,7 +26174,7 @@
                           </a:solidFill>
                           <a:latin typeface="Times New Roman"/>
                         </a:rPr>
-                        <a:t>30.83</a:t>
+                        <a:t>30.84</a:t>
                       </a:r>
                     </a:p>
                   </a:txBody>
@@ -26734,7 +26734,7 @@
                           </a:solidFill>
                           <a:latin typeface="Times New Roman"/>
                         </a:rPr>
-                        <a:t>10,501</a:t>
+                        <a:t>24,273</a:t>
                       </a:r>
                       <a:br/>
                       <a:r>
@@ -26744,7 +26744,7 @@
                           </a:solidFill>
                           <a:latin typeface="Times New Roman"/>
                         </a:rPr>
-                        <a:t>Cr. 1.05</a:t>
+                        <a:t>Cr. 2.43</a:t>
                       </a:r>
                     </a:p>
                   </a:txBody>
@@ -26787,7 +26787,7 @@
                           </a:solidFill>
                           <a:latin typeface="Times New Roman"/>
                         </a:rPr>
-                        <a:t>-2,693</a:t>
+                        <a:t>11,079</a:t>
                       </a:r>
                       <a:br/>
                       <a:r>
@@ -26797,7 +26797,7 @@
                           </a:solidFill>
                           <a:latin typeface="Times New Roman"/>
                         </a:rPr>
-                        <a:t>Cr. -0.27</a:t>
+                        <a:t>Cr. 1.11</a:t>
                       </a:r>
                     </a:p>
                   </a:txBody>
@@ -26840,13 +26840,13 @@
                           </a:solidFill>
                           <a:latin typeface="Times New Roman"/>
                         </a:rPr>
-                        <a:t>79.59</a:t>
-                      </a:r>
-                    </a:p>
-                  </a:txBody>
-                  <a:tcPr marL="12000" marR="12000" marT="8000" marB="8000">
-                    <a:solidFill>
-                      <a:srgbClr val="FFF2CC"/>
+                        <a:t>183.97</a:t>
+                      </a:r>
+                    </a:p>
+                  </a:txBody>
+                  <a:tcPr marL="12000" marR="12000" marT="8000" marB="8000">
+                    <a:solidFill>
+                      <a:srgbClr val="FCE4E4"/>
                     </a:solidFill>
                     <a:lnL w="12700">
                       <a:solidFill>
@@ -27067,7 +27067,7 @@
                           </a:solidFill>
                           <a:latin typeface="Times New Roman"/>
                         </a:rPr>
-                        <a:t>4,327</a:t>
+                        <a:t>5,129</a:t>
                       </a:r>
                       <a:br/>
                       <a:r>
@@ -27077,7 +27077,7 @@
                           </a:solidFill>
                           <a:latin typeface="Times New Roman"/>
                         </a:rPr>
-                        <a:t>Cr. 0.43</a:t>
+                        <a:t>Cr. 0.51</a:t>
                       </a:r>
                     </a:p>
                   </a:txBody>
@@ -27120,7 +27120,7 @@
                           </a:solidFill>
                           <a:latin typeface="Times New Roman"/>
                         </a:rPr>
-                        <a:t>-49,375</a:t>
+                        <a:t>-48,573</a:t>
                       </a:r>
                       <a:br/>
                       <a:r>
@@ -27130,7 +27130,7 @@
                           </a:solidFill>
                           <a:latin typeface="Times New Roman"/>
                         </a:rPr>
-                        <a:t>Cr. -4.94</a:t>
+                        <a:t>Cr. -4.86</a:t>
                       </a:r>
                     </a:p>
                   </a:txBody>
@@ -27173,7 +27173,7 @@
                           </a:solidFill>
                           <a:latin typeface="Times New Roman"/>
                         </a:rPr>
-                        <a:t>8.06</a:t>
+                        <a:t>9.55</a:t>
                       </a:r>
                     </a:p>
                   </a:txBody>
@@ -27400,7 +27400,7 @@
                           </a:solidFill>
                           <a:latin typeface="Times New Roman"/>
                         </a:rPr>
-                        <a:t>52,019</a:t>
+                        <a:t>59,852</a:t>
                       </a:r>
                       <a:br/>
                       <a:r>
@@ -27410,7 +27410,7 @@
                           </a:solidFill>
                           <a:latin typeface="Times New Roman"/>
                         </a:rPr>
-                        <a:t>Cr. 5.20</a:t>
+                        <a:t>Cr. 5.99</a:t>
                       </a:r>
                     </a:p>
                   </a:txBody>
@@ -27453,7 +27453,7 @@
                           </a:solidFill>
                           <a:latin typeface="Times New Roman"/>
                         </a:rPr>
-                        <a:t>-45,481</a:t>
+                        <a:t>-37,648</a:t>
                       </a:r>
                       <a:br/>
                       <a:r>
@@ -27463,7 +27463,7 @@
                           </a:solidFill>
                           <a:latin typeface="Times New Roman"/>
                         </a:rPr>
-                        <a:t>Cr. -4.55</a:t>
+                        <a:t>Cr. -3.76</a:t>
                       </a:r>
                     </a:p>
                   </a:txBody>
@@ -27506,7 +27506,7 @@
                           </a:solidFill>
                           <a:latin typeface="Times New Roman"/>
                         </a:rPr>
-                        <a:t>53.35</a:t>
+                        <a:t>61.39</a:t>
                       </a:r>
                     </a:p>
                   </a:txBody>
@@ -27733,7 +27733,7 @@
                           </a:solidFill>
                           <a:latin typeface="Times New Roman"/>
                         </a:rPr>
-                        <a:t>125,269</a:t>
+                        <a:t>131,048</a:t>
                       </a:r>
                       <a:br/>
                       <a:r>
@@ -27743,7 +27743,7 @@
                           </a:solidFill>
                           <a:latin typeface="Times New Roman"/>
                         </a:rPr>
-                        <a:t>Cr. 12.53</a:t>
+                        <a:t>Cr. 13.10</a:t>
                       </a:r>
                     </a:p>
                   </a:txBody>
@@ -27786,7 +27786,7 @@
                           </a:solidFill>
                           <a:latin typeface="Times New Roman"/>
                         </a:rPr>
-                        <a:t>-185,643</a:t>
+                        <a:t>-179,864</a:t>
                       </a:r>
                       <a:br/>
                       <a:r>
@@ -27796,7 +27796,7 @@
                           </a:solidFill>
                           <a:latin typeface="Times New Roman"/>
                         </a:rPr>
-                        <a:t>Cr. -18.56</a:t>
+                        <a:t>Cr. -17.99</a:t>
                       </a:r>
                     </a:p>
                   </a:txBody>
@@ -27839,7 +27839,7 @@
                           </a:solidFill>
                           <a:latin typeface="Times New Roman"/>
                         </a:rPr>
-                        <a:t>40.29</a:t>
+                        <a:t>42.15</a:t>
                       </a:r>
                     </a:p>
                   </a:txBody>
@@ -27973,7 +27973,7 @@
                 </a:solidFill>
                 <a:latin typeface="Times New Roman"/>
               </a:rPr>
-              <a:t>Open Line FR Report - As On 27.08.2026 (Rows 14-18)</a:t>
+              <a:t>Open Line FR Report - As On 05.09.2026 (Rows 14-18)</a:t>
             </a:r>
           </a:p>
         </p:txBody>
@@ -28850,7 +28850,7 @@
                           </a:solidFill>
                           <a:latin typeface="Times New Roman"/>
                         </a:rPr>
-                        <a:t>98,749</a:t>
+                        <a:t>103,375</a:t>
                       </a:r>
                       <a:br/>
                       <a:r>
@@ -28860,7 +28860,7 @@
                           </a:solidFill>
                           <a:latin typeface="Times New Roman"/>
                         </a:rPr>
-                        <a:t>Cr. 9.87</a:t>
+                        <a:t>Cr. 10.34</a:t>
                       </a:r>
                     </a:p>
                   </a:txBody>
@@ -28903,7 +28903,7 @@
                           </a:solidFill>
                           <a:latin typeface="Times New Roman"/>
                         </a:rPr>
-                        <a:t>-216,984</a:t>
+                        <a:t>-212,358</a:t>
                       </a:r>
                       <a:br/>
                       <a:r>
@@ -28913,7 +28913,7 @@
                           </a:solidFill>
                           <a:latin typeface="Times New Roman"/>
                         </a:rPr>
-                        <a:t>Cr. -21.70</a:t>
+                        <a:t>Cr. -21.24</a:t>
                       </a:r>
                     </a:p>
                   </a:txBody>
@@ -28956,7 +28956,7 @@
                           </a:solidFill>
                           <a:latin typeface="Times New Roman"/>
                         </a:rPr>
-                        <a:t>31.28</a:t>
+                        <a:t>32.74</a:t>
                       </a:r>
                     </a:p>
                   </a:txBody>
@@ -29849,7 +29849,7 @@
                           </a:solidFill>
                           <a:latin typeface="Times New Roman"/>
                         </a:rPr>
-                        <a:t>4,250,558</a:t>
+                        <a:t>4,896,554</a:t>
                       </a:r>
                       <a:br/>
                       <a:r>
@@ -29859,7 +29859,7 @@
                           </a:solidFill>
                           <a:latin typeface="Times New Roman"/>
                         </a:rPr>
-                        <a:t>Cr. 425.06</a:t>
+                        <a:t>Cr. 489.66</a:t>
                       </a:r>
                     </a:p>
                   </a:txBody>
@@ -29902,7 +29902,7 @@
                           </a:solidFill>
                           <a:latin typeface="Times New Roman"/>
                         </a:rPr>
-                        <a:t>-1,357,143</a:t>
+                        <a:t>-711,147</a:t>
                       </a:r>
                       <a:br/>
                       <a:r>
@@ -29912,7 +29912,7 @@
                           </a:solidFill>
                           <a:latin typeface="Times New Roman"/>
                         </a:rPr>
-                        <a:t>Cr. -135.71</a:t>
+                        <a:t>Cr. -71.11</a:t>
                       </a:r>
                     </a:p>
                   </a:txBody>
@@ -29955,7 +29955,7 @@
                           </a:solidFill>
                           <a:latin typeface="Times New Roman"/>
                         </a:rPr>
-                        <a:t>75.80</a:t>
+                        <a:t>87.32</a:t>
                       </a:r>
                     </a:p>
                   </a:txBody>
@@ -30089,7 +30089,7 @@
                 </a:solidFill>
                 <a:latin typeface="Times New Roman"/>
               </a:rPr>
-              <a:t>Open Line FR Fund Wise - As On 27.08.2026</a:t>
+              <a:t>Open Line FR Fund Wise - As On 05.09.2026</a:t>
             </a:r>
           </a:p>
         </p:txBody>
@@ -30590,7 +30590,7 @@
                           </a:solidFill>
                           <a:latin typeface="Times New Roman"/>
                         </a:rPr>
-                        <a:t>380,485</a:t>
+                        <a:t>408,842</a:t>
                       </a:r>
                       <a:br/>
                       <a:r>
@@ -30600,7 +30600,7 @@
                           </a:solidFill>
                           <a:latin typeface="Times New Roman"/>
                         </a:rPr>
-                        <a:t>Cr. 38.05</a:t>
+                        <a:t>Cr. 40.88</a:t>
                       </a:r>
                     </a:p>
                   </a:txBody>
@@ -30643,7 +30643,7 @@
                           </a:solidFill>
                           <a:latin typeface="Times New Roman"/>
                         </a:rPr>
-                        <a:t>637,868</a:t>
+                        <a:t>609,511</a:t>
                       </a:r>
                       <a:br/>
                       <a:r>
@@ -30653,7 +30653,7 @@
                           </a:solidFill>
                           <a:latin typeface="Times New Roman"/>
                         </a:rPr>
-                        <a:t>Cr. 63.79</a:t>
+                        <a:t>Cr. 60.95</a:t>
                       </a:r>
                     </a:p>
                   </a:txBody>
@@ -30696,7 +30696,7 @@
                           </a:solidFill>
                           <a:latin typeface="Times New Roman"/>
                         </a:rPr>
-                        <a:t>37.36</a:t>
+                        <a:t>40.15</a:t>
                       </a:r>
                     </a:p>
                   </a:txBody>
@@ -30739,7 +30739,7 @@
                           </a:solidFill>
                           <a:latin typeface="Times New Roman"/>
                         </a:rPr>
-                        <a:t>62.64</a:t>
+                        <a:t>59.85</a:t>
                       </a:r>
                     </a:p>
                   </a:txBody>
@@ -31256,7 +31256,7 @@
                           </a:solidFill>
                           <a:latin typeface="Times New Roman"/>
                         </a:rPr>
-                        <a:t>11,290</a:t>
+                        <a:t>18,459</a:t>
                       </a:r>
                       <a:br/>
                       <a:r>
@@ -31266,7 +31266,7 @@
                           </a:solidFill>
                           <a:latin typeface="Times New Roman"/>
                         </a:rPr>
-                        <a:t>Cr. 1.13</a:t>
+                        <a:t>Cr. 1.85</a:t>
                       </a:r>
                     </a:p>
                   </a:txBody>
@@ -31309,7 +31309,7 @@
                           </a:solidFill>
                           <a:latin typeface="Times New Roman"/>
                         </a:rPr>
-                        <a:t>119,302</a:t>
+                        <a:t>112,133</a:t>
                       </a:r>
                       <a:br/>
                       <a:r>
@@ -31319,7 +31319,7 @@
                           </a:solidFill>
                           <a:latin typeface="Times New Roman"/>
                         </a:rPr>
-                        <a:t>Cr. 11.93</a:t>
+                        <a:t>Cr. 11.21</a:t>
                       </a:r>
                     </a:p>
                   </a:txBody>
@@ -31362,7 +31362,7 @@
                           </a:solidFill>
                           <a:latin typeface="Times New Roman"/>
                         </a:rPr>
-                        <a:t>8.65</a:t>
+                        <a:t>14.13</a:t>
                       </a:r>
                     </a:p>
                   </a:txBody>
@@ -31405,7 +31405,7 @@
                           </a:solidFill>
                           <a:latin typeface="Times New Roman"/>
                         </a:rPr>
-                        <a:t>91.35</a:t>
+                        <a:t>85.87</a:t>
                       </a:r>
                     </a:p>
                   </a:txBody>
@@ -31922,7 +31922,7 @@
                           </a:solidFill>
                           <a:latin typeface="Times New Roman"/>
                         </a:rPr>
-                        <a:t>3,175,144</a:t>
+                        <a:t>3,746,106</a:t>
                       </a:r>
                       <a:br/>
                       <a:r>
@@ -31932,7 +31932,7 @@
                           </a:solidFill>
                           <a:latin typeface="Times New Roman"/>
                         </a:rPr>
-                        <a:t>Cr. 317.51</a:t>
+                        <a:t>Cr. 374.61</a:t>
                       </a:r>
                     </a:p>
                   </a:txBody>
@@ -31975,7 +31975,7 @@
                           </a:solidFill>
                           <a:latin typeface="Times New Roman"/>
                         </a:rPr>
-                        <a:t>-57,629</a:t>
+                        <a:t>-628,591</a:t>
                       </a:r>
                       <a:br/>
                       <a:r>
@@ -31985,7 +31985,7 @@
                           </a:solidFill>
                           <a:latin typeface="Times New Roman"/>
                         </a:rPr>
-                        <a:t>Cr. -5.76</a:t>
+                        <a:t>Cr. -62.86</a:t>
                       </a:r>
                     </a:p>
                   </a:txBody>
@@ -32028,7 +32028,7 @@
                           </a:solidFill>
                           <a:latin typeface="Times New Roman"/>
                         </a:rPr>
-                        <a:t>101.85</a:t>
+                        <a:t>120.16</a:t>
                       </a:r>
                     </a:p>
                   </a:txBody>
@@ -32071,7 +32071,7 @@
                           </a:solidFill>
                           <a:latin typeface="Times New Roman"/>
                         </a:rPr>
-                        <a:t>-1.85</a:t>
+                        <a:t>-20.16</a:t>
                       </a:r>
                     </a:p>
                   </a:txBody>
@@ -32588,7 +32588,7 @@
                           </a:solidFill>
                           <a:latin typeface="Times New Roman"/>
                         </a:rPr>
-                        <a:t>668,148</a:t>
+                        <a:t>707,656</a:t>
                       </a:r>
                       <a:br/>
                       <a:r>
@@ -32598,7 +32598,7 @@
                           </a:solidFill>
                           <a:latin typeface="Times New Roman"/>
                         </a:rPr>
-                        <a:t>Cr. 66.81</a:t>
+                        <a:t>Cr. 70.77</a:t>
                       </a:r>
                     </a:p>
                   </a:txBody>
@@ -32641,7 +32641,7 @@
                           </a:solidFill>
                           <a:latin typeface="Times New Roman"/>
                         </a:rPr>
-                        <a:t>632,861</a:t>
+                        <a:t>593,353</a:t>
                       </a:r>
                       <a:br/>
                       <a:r>
@@ -32651,7 +32651,7 @@
                           </a:solidFill>
                           <a:latin typeface="Times New Roman"/>
                         </a:rPr>
-                        <a:t>Cr. 63.29</a:t>
+                        <a:t>Cr. 59.34</a:t>
                       </a:r>
                     </a:p>
                   </a:txBody>
@@ -32694,7 +32694,7 @@
                           </a:solidFill>
                           <a:latin typeface="Times New Roman"/>
                         </a:rPr>
-                        <a:t>51.36</a:t>
+                        <a:t>54.39</a:t>
                       </a:r>
                     </a:p>
                   </a:txBody>
@@ -32737,7 +32737,7 @@
                           </a:solidFill>
                           <a:latin typeface="Times New Roman"/>
                         </a:rPr>
-                        <a:t>48.64</a:t>
+                        <a:t>45.61</a:t>
                       </a:r>
                     </a:p>
                   </a:txBody>
